--- a/Универ/4/ЦОСиИ/Презентация к реферату.pptx
+++ b/Универ/4/ЦОСиИ/Презентация к реферату.pptx
@@ -13,12 +13,12 @@
     <p:sldId id="258" r:id="rId4"/>
     <p:sldId id="259" r:id="rId5"/>
     <p:sldId id="260" r:id="rId6"/>
-    <p:sldId id="261" r:id="rId7"/>
-    <p:sldId id="262" r:id="rId8"/>
-    <p:sldId id="263" r:id="rId9"/>
-    <p:sldId id="264" r:id="rId10"/>
-    <p:sldId id="268" r:id="rId11"/>
-    <p:sldId id="265" r:id="rId12"/>
+    <p:sldId id="262" r:id="rId7"/>
+    <p:sldId id="263" r:id="rId8"/>
+    <p:sldId id="261" r:id="rId9"/>
+    <p:sldId id="265" r:id="rId10"/>
+    <p:sldId id="264" r:id="rId11"/>
+    <p:sldId id="268" r:id="rId12"/>
     <p:sldId id="266" r:id="rId13"/>
   </p:sldIdLst>
   <p:sldSz cx="12192000" cy="6858000"/>
@@ -341,6 +341,94 @@
   <p:cSld>
     <p:spTree>
       <p:nvGrpSpPr>
+        <p:cNvPr id="1" name=""/>
+        <p:cNvGrpSpPr/>
+        <p:nvPr/>
+      </p:nvGrpSpPr>
+      <p:grpSpPr>
+        <a:xfrm>
+          <a:off x="0" y="0"/>
+          <a:ext cx="0" cy="0"/>
+          <a:chOff x="0" y="0"/>
+          <a:chExt cx="0" cy="0"/>
+        </a:xfrm>
+      </p:grpSpPr>
+      <p:sp>
+        <p:nvSpPr>
+          <p:cNvPr id="2" name="Slide Image Placeholder 1"/>
+          <p:cNvSpPr>
+            <a:spLocks noGrp="1" noRot="1" noChangeAspect="1"/>
+          </p:cNvSpPr>
+          <p:nvPr>
+            <p:ph type="sldImg"/>
+          </p:nvPr>
+        </p:nvSpPr>
+        <p:spPr/>
+      </p:sp>
+      <p:sp>
+        <p:nvSpPr>
+          <p:cNvPr id="3" name="Notes Placeholder 2"/>
+          <p:cNvSpPr>
+            <a:spLocks noGrp="1"/>
+          </p:cNvSpPr>
+          <p:nvPr>
+            <p:ph type="body" idx="1"/>
+          </p:nvPr>
+        </p:nvSpPr>
+        <p:spPr/>
+        <p:txBody>
+          <a:bodyPr/>
+          <a:lstStyle/>
+          <a:p>
+            <a:r>
+              <a:rPr lang="en-US" dirty="0"/>
+              <a:t>[Sources]
+- parseval_report_10_pages.docx: раздел «Практическая роль теоремы в вычислительных системах» (тест алгоритмов, ошибки нормировки, потеря отсчётов, разработка ПО).</a:t>
+            </a:r>
+          </a:p>
+        </p:txBody>
+      </p:sp>
+      <p:sp>
+        <p:nvSpPr>
+          <p:cNvPr id="4" name="Slide Number Placeholder 3"/>
+          <p:cNvSpPr>
+            <a:spLocks noGrp="1"/>
+          </p:cNvSpPr>
+          <p:nvPr>
+            <p:ph type="sldNum" sz="quarter" idx="10"/>
+          </p:nvPr>
+        </p:nvSpPr>
+        <p:spPr/>
+        <p:txBody>
+          <a:bodyPr/>
+          <a:lstStyle/>
+          <a:p>
+            <a:fld id="{F7021451-1387-4CA6-816F-3879F97B5CBC}" type="slidenum">
+              <a:rPr lang="en-US"/>
+              <a:t>10</a:t>
+            </a:fld>
+            <a:endParaRPr lang="en-US"/>
+          </a:p>
+        </p:txBody>
+      </p:sp>
+    </p:spTree>
+    <p:extLst>
+      <p:ext uri="{BB962C8B-B14F-4D97-AF65-F5344CB8AC3E}">
+        <p14:creationId xmlns:p14="http://schemas.microsoft.com/office/powerpoint/2010/main" val="1024086991"/>
+      </p:ext>
+    </p:extLst>
+  </p:cSld>
+  <p:clrMapOvr>
+    <a:masterClrMapping/>
+  </p:clrMapOvr>
+</p:notes>
+</file>
+
+<file path=ppt/notesSlides/notesSlide11.xml><?xml version="1.0" encoding="utf-8"?>
+<p:notes xmlns:a="http://schemas.openxmlformats.org/drawingml/2006/main" xmlns:r="http://schemas.openxmlformats.org/officeDocument/2006/relationships" xmlns:p="http://schemas.openxmlformats.org/presentationml/2006/main">
+  <p:cSld>
+    <p:spTree>
+      <p:nvGrpSpPr>
         <p:cNvPr id="1" name="">
           <a:extLst>
             <a:ext uri="{FF2B5EF4-FFF2-40B4-BE49-F238E27FC236}">
@@ -429,7 +517,7 @@
           <a:p>
             <a:fld id="{F7021451-1387-4CA6-816F-3879F97B5CBC}" type="slidenum">
               <a:rPr lang="en-US"/>
-              <a:t>10</a:t>
+              <a:t>11</a:t>
             </a:fld>
             <a:endParaRPr lang="en-US"/>
           </a:p>
@@ -439,94 +527,6 @@
     <p:extLst>
       <p:ext uri="{BB962C8B-B14F-4D97-AF65-F5344CB8AC3E}">
         <p14:creationId xmlns:p14="http://schemas.microsoft.com/office/powerpoint/2010/main" val="1199069631"/>
-      </p:ext>
-    </p:extLst>
-  </p:cSld>
-  <p:clrMapOvr>
-    <a:masterClrMapping/>
-  </p:clrMapOvr>
-</p:notes>
-</file>
-
-<file path=ppt/notesSlides/notesSlide11.xml><?xml version="1.0" encoding="utf-8"?>
-<p:notes xmlns:a="http://schemas.openxmlformats.org/drawingml/2006/main" xmlns:r="http://schemas.openxmlformats.org/officeDocument/2006/relationships" xmlns:p="http://schemas.openxmlformats.org/presentationml/2006/main">
-  <p:cSld>
-    <p:spTree>
-      <p:nvGrpSpPr>
-        <p:cNvPr id="1" name=""/>
-        <p:cNvGrpSpPr/>
-        <p:nvPr/>
-      </p:nvGrpSpPr>
-      <p:grpSpPr>
-        <a:xfrm>
-          <a:off x="0" y="0"/>
-          <a:ext cx="0" cy="0"/>
-          <a:chOff x="0" y="0"/>
-          <a:chExt cx="0" cy="0"/>
-        </a:xfrm>
-      </p:grpSpPr>
-      <p:sp>
-        <p:nvSpPr>
-          <p:cNvPr id="2" name="Slide Image Placeholder 1"/>
-          <p:cNvSpPr>
-            <a:spLocks noGrp="1" noRot="1" noChangeAspect="1"/>
-          </p:cNvSpPr>
-          <p:nvPr>
-            <p:ph type="sldImg"/>
-          </p:nvPr>
-        </p:nvSpPr>
-        <p:spPr/>
-      </p:sp>
-      <p:sp>
-        <p:nvSpPr>
-          <p:cNvPr id="3" name="Notes Placeholder 2"/>
-          <p:cNvSpPr>
-            <a:spLocks noGrp="1"/>
-          </p:cNvSpPr>
-          <p:nvPr>
-            <p:ph type="body" idx="1"/>
-          </p:nvPr>
-        </p:nvSpPr>
-        <p:spPr/>
-        <p:txBody>
-          <a:bodyPr/>
-          <a:lstStyle/>
-          <a:p>
-            <a:r>
-              <a:rPr lang="en-US" dirty="0"/>
-              <a:t>[Sources]
-- parseval_report_10_pages.docx: раздел о нормализации громкости в аудиоплеерах и уточнение про perceptual loudness / LUFS.</a:t>
-            </a:r>
-          </a:p>
-        </p:txBody>
-      </p:sp>
-      <p:sp>
-        <p:nvSpPr>
-          <p:cNvPr id="4" name="Slide Number Placeholder 3"/>
-          <p:cNvSpPr>
-            <a:spLocks noGrp="1"/>
-          </p:cNvSpPr>
-          <p:nvPr>
-            <p:ph type="sldNum" sz="quarter" idx="10"/>
-          </p:nvPr>
-        </p:nvSpPr>
-        <p:spPr/>
-        <p:txBody>
-          <a:bodyPr/>
-          <a:lstStyle/>
-          <a:p>
-            <a:fld id="{F7021451-1387-4CA6-816F-3879F97B5CBC}" type="slidenum">
-              <a:rPr lang="en-US"/>
-              <a:t>11</a:t>
-            </a:fld>
-            <a:endParaRPr lang="en-US"/>
-          </a:p>
-        </p:txBody>
-      </p:sp>
-    </p:spTree>
-    <p:extLst>
-      <p:ext uri="{BB962C8B-B14F-4D97-AF65-F5344CB8AC3E}">
-        <p14:creationId xmlns:p14="http://schemas.microsoft.com/office/powerpoint/2010/main" val="1024086991"/>
       </p:ext>
     </p:extLst>
   </p:cSld>
@@ -1023,7 +1023,7 @@
             <a:r>
               <a:rPr lang="en-US" dirty="0"/>
               <a:t>[Sources]
-- parseval_report_10_pages.docx: раздел «Доказательство» (дискретный случай, шаги 1–5, использование ортогональности).</a:t>
+- parseval_report_10_pages.docx: раздел «Геометрическая интерпретация» (ДПФ как переход между базисами, унитарность, сохранение нормы).</a:t>
             </a:r>
           </a:p>
         </p:txBody>
@@ -1111,7 +1111,7 @@
             <a:r>
               <a:rPr lang="en-US" dirty="0"/>
               <a:t>[Sources]
-- parseval_report_10_pages.docx: раздел «Геометрическая интерпретация» (ДПФ как переход между базисами, унитарность, сохранение нормы).</a:t>
+- parseval_report_10_pages.docx: пример проверки теоремы для сигнала x[n] = [1, −1, 1, −1], таблица с ручным расчётом.</a:t>
             </a:r>
           </a:p>
         </p:txBody>
@@ -1199,7 +1199,7 @@
             <a:r>
               <a:rPr lang="en-US" dirty="0"/>
               <a:t>[Sources]
-- parseval_report_10_pages.docx: пример проверки теоремы для сигнала x[n] = [1, −1, 1, −1], таблица с ручным расчётом.</a:t>
+- parseval_report_10_pages.docx: раздел «Доказательство» (дискретный случай, шаги 1–5, использование ортогональности).</a:t>
             </a:r>
           </a:p>
         </p:txBody>
@@ -1287,7 +1287,7 @@
             <a:r>
               <a:rPr lang="en-US" dirty="0"/>
               <a:t>[Sources]
-- parseval_report_10_pages.docx: раздел «Практическая роль теоремы в вычислительных системах» (тест алгоритмов, ошибки нормировки, потеря отсчётов, разработка ПО).</a:t>
+- parseval_report_10_pages.docx: раздел о нормализации громкости в аудиоплеерах и уточнение про perceptual loudness / LUFS.</a:t>
             </a:r>
           </a:p>
         </p:txBody>
@@ -1908,10 +1908,10 @@
           <p:nvPr/>
         </p:nvPicPr>
         <p:blipFill>
-          <a:blip r:embed="rId3">
+          <a:blip>
             <a:extLst>
               <a:ext uri="{96DAC541-7B7A-43D3-8B79-37D633B846F1}">
-                <asvg:svgBlip xmlns:asvg="http://schemas.microsoft.com/office/drawing/2016/SVG/main" r:embed="rId4"/>
+                <asvg:svgBlip xmlns:asvg="http://schemas.microsoft.com/office/drawing/2016/SVG/main" r:embed="rId3"/>
               </a:ext>
             </a:extLst>
           </a:blip>
@@ -2284,7 +2284,7 @@
           <p:nvPr/>
         </p:nvPicPr>
         <p:blipFill>
-          <a:blip r:embed="rId5"/>
+          <a:blip r:embed="rId4"/>
           <a:srcRect t="1220" b="1220"/>
           <a:stretch/>
         </p:blipFill>
@@ -2307,6 +2307,1015 @@
 </file>
 
 <file path=ppt/slides/slide10.xml><?xml version="1.0" encoding="utf-8"?>
+<p:sld xmlns:a="http://schemas.openxmlformats.org/drawingml/2006/main" xmlns:r="http://schemas.openxmlformats.org/officeDocument/2006/relationships" xmlns:p="http://schemas.openxmlformats.org/presentationml/2006/main">
+  <p:cSld name="Slide 9">
+    <p:bg>
+      <p:bgPr>
+        <a:solidFill>
+          <a:srgbClr val="061426"/>
+        </a:solidFill>
+        <a:effectLst/>
+      </p:bgPr>
+    </p:bg>
+    <p:spTree>
+      <p:nvGrpSpPr>
+        <p:cNvPr id="1" name=""/>
+        <p:cNvGrpSpPr/>
+        <p:nvPr/>
+      </p:nvGrpSpPr>
+      <p:grpSpPr>
+        <a:xfrm>
+          <a:off x="0" y="0"/>
+          <a:ext cx="0" cy="0"/>
+          <a:chOff x="0" y="0"/>
+          <a:chExt cx="0" cy="0"/>
+        </a:xfrm>
+      </p:grpSpPr>
+      <p:sp>
+        <p:nvSpPr>
+          <p:cNvPr id="2" name="Shape 0"/>
+          <p:cNvSpPr/>
+          <p:nvPr/>
+        </p:nvSpPr>
+        <p:spPr>
+          <a:xfrm>
+            <a:off x="8732520" y="411480"/>
+            <a:ext cx="2560320" cy="0"/>
+          </a:xfrm>
+          <a:prstGeom prst="line">
+            <a:avLst/>
+          </a:prstGeom>
+          <a:noFill/>
+          <a:ln w="12700">
+            <a:solidFill>
+              <a:srgbClr val="17395A"/>
+            </a:solidFill>
+            <a:prstDash val="solid"/>
+          </a:ln>
+        </p:spPr>
+        <p:txBody>
+          <a:bodyPr/>
+          <a:lstStyle/>
+          <a:p>
+            <a:endParaRPr lang="ru-BY"/>
+          </a:p>
+        </p:txBody>
+      </p:sp>
+      <p:sp>
+        <p:nvSpPr>
+          <p:cNvPr id="3" name="Shape 1"/>
+          <p:cNvSpPr/>
+          <p:nvPr/>
+        </p:nvSpPr>
+        <p:spPr>
+          <a:xfrm>
+            <a:off x="11292840" y="411480"/>
+            <a:ext cx="0" cy="1097280"/>
+          </a:xfrm>
+          <a:prstGeom prst="line">
+            <a:avLst/>
+          </a:prstGeom>
+          <a:noFill/>
+          <a:ln w="12700">
+            <a:solidFill>
+              <a:srgbClr val="17395A"/>
+            </a:solidFill>
+            <a:prstDash val="solid"/>
+          </a:ln>
+        </p:spPr>
+        <p:txBody>
+          <a:bodyPr/>
+          <a:lstStyle/>
+          <a:p>
+            <a:endParaRPr lang="ru-BY"/>
+          </a:p>
+        </p:txBody>
+      </p:sp>
+      <p:sp>
+        <p:nvSpPr>
+          <p:cNvPr id="4" name="Text 2"/>
+          <p:cNvSpPr/>
+          <p:nvPr/>
+        </p:nvSpPr>
+        <p:spPr>
+          <a:xfrm>
+            <a:off x="594360" y="219456"/>
+            <a:ext cx="1645920" cy="201168"/>
+          </a:xfrm>
+          <a:prstGeom prst="rect">
+            <a:avLst/>
+          </a:prstGeom>
+          <a:noFill/>
+          <a:ln/>
+        </p:spPr>
+        <p:txBody>
+          <a:bodyPr wrap="square" lIns="0" tIns="0" rIns="0" bIns="0" rtlCol="0" anchor="ctr"/>
+          <a:lstStyle/>
+          <a:p>
+            <a:pPr marL="0" indent="0">
+              <a:buNone/>
+            </a:pPr>
+            <a:r>
+              <a:rPr lang="en-US" sz="950" b="1" dirty="0">
+                <a:solidFill>
+                  <a:srgbClr val="2DD4FF"/>
+                </a:solidFill>
+                <a:latin typeface="Aptos" pitchFamily="34" charset="0"/>
+                <a:ea typeface="Aptos" pitchFamily="34" charset="-122"/>
+                <a:cs typeface="Aptos" pitchFamily="34" charset="-120"/>
+              </a:rPr>
+              <a:t>ПРАКТИЧЕСКАЯ РОЛЬ</a:t>
+            </a:r>
+            <a:endParaRPr lang="en-US" sz="950" dirty="0"/>
+          </a:p>
+        </p:txBody>
+      </p:sp>
+      <p:sp>
+        <p:nvSpPr>
+          <p:cNvPr id="5" name="Shape 3"/>
+          <p:cNvSpPr/>
+          <p:nvPr/>
+        </p:nvSpPr>
+        <p:spPr>
+          <a:xfrm>
+            <a:off x="576072" y="429768"/>
+            <a:ext cx="73152" cy="0"/>
+          </a:xfrm>
+          <a:prstGeom prst="line">
+            <a:avLst/>
+          </a:prstGeom>
+          <a:noFill/>
+          <a:ln w="25400">
+            <a:solidFill>
+              <a:srgbClr val="2DD4FF"/>
+            </a:solidFill>
+            <a:prstDash val="solid"/>
+          </a:ln>
+        </p:spPr>
+        <p:txBody>
+          <a:bodyPr/>
+          <a:lstStyle/>
+          <a:p>
+            <a:endParaRPr lang="ru-BY"/>
+          </a:p>
+        </p:txBody>
+      </p:sp>
+      <p:sp>
+        <p:nvSpPr>
+          <p:cNvPr id="6" name="Text 4"/>
+          <p:cNvSpPr/>
+          <p:nvPr/>
+        </p:nvSpPr>
+        <p:spPr>
+          <a:xfrm>
+            <a:off x="594360" y="475488"/>
+            <a:ext cx="7589520" cy="457200"/>
+          </a:xfrm>
+          <a:prstGeom prst="rect">
+            <a:avLst/>
+          </a:prstGeom>
+          <a:noFill/>
+          <a:ln/>
+        </p:spPr>
+        <p:txBody>
+          <a:bodyPr wrap="square" lIns="0" tIns="0" rIns="0" bIns="0" rtlCol="0" anchor="ctr"/>
+          <a:lstStyle/>
+          <a:p>
+            <a:pPr marL="0" indent="0">
+              <a:buNone/>
+            </a:pPr>
+            <a:r>
+              <a:rPr lang="en-US" sz="2300" b="1" dirty="0">
+                <a:solidFill>
+                  <a:srgbClr val="F7F7F3"/>
+                </a:solidFill>
+                <a:latin typeface="Aptos Display" pitchFamily="34" charset="0"/>
+                <a:ea typeface="Aptos Display" pitchFamily="34" charset="-122"/>
+                <a:cs typeface="Aptos Display" pitchFamily="34" charset="-120"/>
+              </a:rPr>
+              <a:t>Зачем теорема нужна в вычислительных системах</a:t>
+            </a:r>
+            <a:endParaRPr lang="en-US" sz="2300" dirty="0"/>
+          </a:p>
+        </p:txBody>
+      </p:sp>
+      <p:sp>
+        <p:nvSpPr>
+          <p:cNvPr id="7" name="Text 5"/>
+          <p:cNvSpPr/>
+          <p:nvPr/>
+        </p:nvSpPr>
+        <p:spPr>
+          <a:xfrm>
+            <a:off x="11521440" y="6473952"/>
+            <a:ext cx="182880" cy="164592"/>
+          </a:xfrm>
+          <a:prstGeom prst="rect">
+            <a:avLst/>
+          </a:prstGeom>
+          <a:noFill/>
+          <a:ln/>
+        </p:spPr>
+        <p:txBody>
+          <a:bodyPr wrap="square" lIns="0" tIns="0" rIns="0" bIns="0" rtlCol="0" anchor="ctr"/>
+          <a:lstStyle/>
+          <a:p>
+            <a:pPr marL="0" indent="0" algn="r">
+              <a:buNone/>
+            </a:pPr>
+            <a:r>
+              <a:rPr lang="en-US" sz="850" dirty="0">
+                <a:solidFill>
+                  <a:srgbClr val="9FB4C9"/>
+                </a:solidFill>
+                <a:latin typeface="Aptos" pitchFamily="34" charset="0"/>
+                <a:ea typeface="Aptos" pitchFamily="34" charset="-122"/>
+                <a:cs typeface="Aptos" pitchFamily="34" charset="-120"/>
+              </a:rPr>
+              <a:t>9</a:t>
+            </a:r>
+            <a:endParaRPr lang="en-US" sz="850" dirty="0"/>
+          </a:p>
+        </p:txBody>
+      </p:sp>
+      <p:sp>
+        <p:nvSpPr>
+          <p:cNvPr id="8" name="Shape 6"/>
+          <p:cNvSpPr/>
+          <p:nvPr/>
+        </p:nvSpPr>
+        <p:spPr>
+          <a:xfrm>
+            <a:off x="658368" y="1234440"/>
+            <a:ext cx="10972800" cy="4526280"/>
+          </a:xfrm>
+          <a:prstGeom prst="roundRect">
+            <a:avLst>
+              <a:gd name="adj" fmla="val 3636"/>
+            </a:avLst>
+          </a:prstGeom>
+          <a:solidFill>
+            <a:srgbClr val="0A1F38"/>
+          </a:solidFill>
+          <a:ln w="12700">
+            <a:solidFill>
+              <a:srgbClr val="17395A"/>
+            </a:solidFill>
+            <a:prstDash val="solid"/>
+          </a:ln>
+        </p:spPr>
+        <p:txBody>
+          <a:bodyPr/>
+          <a:lstStyle/>
+          <a:p>
+            <a:endParaRPr lang="ru-BY"/>
+          </a:p>
+        </p:txBody>
+      </p:sp>
+      <p:sp>
+        <p:nvSpPr>
+          <p:cNvPr id="9" name="Shape 7"/>
+          <p:cNvSpPr/>
+          <p:nvPr/>
+        </p:nvSpPr>
+        <p:spPr>
+          <a:xfrm>
+            <a:off x="896112" y="1517904"/>
+            <a:ext cx="1097280" cy="256032"/>
+          </a:xfrm>
+          <a:prstGeom prst="roundRect">
+            <a:avLst>
+              <a:gd name="adj" fmla="val 42857"/>
+            </a:avLst>
+          </a:prstGeom>
+          <a:solidFill>
+            <a:srgbClr val="2DD4FF"/>
+          </a:solidFill>
+          <a:ln w="12700">
+            <a:solidFill>
+              <a:srgbClr val="2DD4FF"/>
+            </a:solidFill>
+            <a:prstDash val="solid"/>
+          </a:ln>
+        </p:spPr>
+        <p:txBody>
+          <a:bodyPr/>
+          <a:lstStyle/>
+          <a:p>
+            <a:endParaRPr lang="ru-BY"/>
+          </a:p>
+        </p:txBody>
+      </p:sp>
+      <p:sp>
+        <p:nvSpPr>
+          <p:cNvPr id="10" name="Text 8"/>
+          <p:cNvSpPr/>
+          <p:nvPr/>
+        </p:nvSpPr>
+        <p:spPr>
+          <a:xfrm>
+            <a:off x="941832" y="1536192"/>
+            <a:ext cx="1005840" cy="182880"/>
+          </a:xfrm>
+          <a:prstGeom prst="rect">
+            <a:avLst/>
+          </a:prstGeom>
+          <a:noFill/>
+          <a:ln/>
+        </p:spPr>
+        <p:txBody>
+          <a:bodyPr wrap="square" lIns="0" tIns="0" rIns="0" bIns="0" rtlCol="0" anchor="ctr"/>
+          <a:lstStyle/>
+          <a:p>
+            <a:pPr marL="0" indent="0" algn="ctr">
+              <a:buNone/>
+            </a:pPr>
+            <a:r>
+              <a:rPr lang="en-US" sz="850" b="1" dirty="0">
+                <a:solidFill>
+                  <a:srgbClr val="061426"/>
+                </a:solidFill>
+                <a:latin typeface="Aptos" pitchFamily="34" charset="0"/>
+                <a:ea typeface="Aptos" pitchFamily="34" charset="-122"/>
+                <a:cs typeface="Aptos" pitchFamily="34" charset="-120"/>
+              </a:rPr>
+              <a:t>ПОСЛЕ БПФ</a:t>
+            </a:r>
+            <a:endParaRPr lang="en-US" sz="850" dirty="0"/>
+          </a:p>
+        </p:txBody>
+      </p:sp>
+      <p:sp>
+        <p:nvSpPr>
+          <p:cNvPr id="11" name="Shape 9"/>
+          <p:cNvSpPr/>
+          <p:nvPr/>
+        </p:nvSpPr>
+        <p:spPr>
+          <a:xfrm>
+            <a:off x="2139696" y="1517904"/>
+            <a:ext cx="1325880" cy="256032"/>
+          </a:xfrm>
+          <a:prstGeom prst="roundRect">
+            <a:avLst>
+              <a:gd name="adj" fmla="val 42857"/>
+            </a:avLst>
+          </a:prstGeom>
+          <a:solidFill>
+            <a:srgbClr val="FFB14A"/>
+          </a:solidFill>
+          <a:ln w="12700">
+            <a:solidFill>
+              <a:srgbClr val="FFB14A"/>
+            </a:solidFill>
+            <a:prstDash val="solid"/>
+          </a:ln>
+        </p:spPr>
+        <p:txBody>
+          <a:bodyPr/>
+          <a:lstStyle/>
+          <a:p>
+            <a:endParaRPr lang="ru-BY"/>
+          </a:p>
+        </p:txBody>
+      </p:sp>
+      <p:sp>
+        <p:nvSpPr>
+          <p:cNvPr id="12" name="Text 10"/>
+          <p:cNvSpPr/>
+          <p:nvPr/>
+        </p:nvSpPr>
+        <p:spPr>
+          <a:xfrm>
+            <a:off x="2185416" y="1536192"/>
+            <a:ext cx="1234440" cy="182880"/>
+          </a:xfrm>
+          <a:prstGeom prst="rect">
+            <a:avLst/>
+          </a:prstGeom>
+          <a:noFill/>
+          <a:ln/>
+        </p:spPr>
+        <p:txBody>
+          <a:bodyPr wrap="square" lIns="0" tIns="0" rIns="0" bIns="0" rtlCol="0" anchor="ctr"/>
+          <a:lstStyle/>
+          <a:p>
+            <a:pPr marL="0" indent="0" algn="ctr">
+              <a:buNone/>
+            </a:pPr>
+            <a:r>
+              <a:rPr lang="en-US" sz="850" b="1" dirty="0">
+                <a:solidFill>
+                  <a:srgbClr val="061426"/>
+                </a:solidFill>
+                <a:latin typeface="Aptos" pitchFamily="34" charset="0"/>
+                <a:ea typeface="Aptos" pitchFamily="34" charset="-122"/>
+                <a:cs typeface="Aptos" pitchFamily="34" charset="-120"/>
+              </a:rPr>
+              <a:t>ФИЛЬТРЫ И СЖАТИЕ</a:t>
+            </a:r>
+            <a:endParaRPr lang="en-US" sz="850" dirty="0"/>
+          </a:p>
+        </p:txBody>
+      </p:sp>
+      <p:sp>
+        <p:nvSpPr>
+          <p:cNvPr id="13" name="Shape 11"/>
+          <p:cNvSpPr/>
+          <p:nvPr/>
+        </p:nvSpPr>
+        <p:spPr>
+          <a:xfrm>
+            <a:off x="3630168" y="1517904"/>
+            <a:ext cx="1737360" cy="256032"/>
+          </a:xfrm>
+          <a:prstGeom prst="roundRect">
+            <a:avLst>
+              <a:gd name="adj" fmla="val 42857"/>
+            </a:avLst>
+          </a:prstGeom>
+          <a:solidFill>
+            <a:srgbClr val="43D17C"/>
+          </a:solidFill>
+          <a:ln w="12700">
+            <a:solidFill>
+              <a:srgbClr val="43D17C"/>
+            </a:solidFill>
+            <a:prstDash val="solid"/>
+          </a:ln>
+        </p:spPr>
+        <p:txBody>
+          <a:bodyPr/>
+          <a:lstStyle/>
+          <a:p>
+            <a:endParaRPr lang="ru-BY"/>
+          </a:p>
+        </p:txBody>
+      </p:sp>
+      <p:sp>
+        <p:nvSpPr>
+          <p:cNvPr id="14" name="Text 12"/>
+          <p:cNvSpPr/>
+          <p:nvPr/>
+        </p:nvSpPr>
+        <p:spPr>
+          <a:xfrm>
+            <a:off x="3675888" y="1536192"/>
+            <a:ext cx="1645920" cy="182880"/>
+          </a:xfrm>
+          <a:prstGeom prst="rect">
+            <a:avLst/>
+          </a:prstGeom>
+          <a:noFill/>
+          <a:ln/>
+        </p:spPr>
+        <p:txBody>
+          <a:bodyPr wrap="square" lIns="0" tIns="0" rIns="0" bIns="0" rtlCol="0" anchor="ctr"/>
+          <a:lstStyle/>
+          <a:p>
+            <a:pPr marL="0" indent="0" algn="ctr">
+              <a:buNone/>
+            </a:pPr>
+            <a:r>
+              <a:rPr lang="en-US" sz="850" b="1" dirty="0">
+                <a:solidFill>
+                  <a:srgbClr val="061426"/>
+                </a:solidFill>
+                <a:latin typeface="Aptos" pitchFamily="34" charset="0"/>
+                <a:ea typeface="Aptos" pitchFamily="34" charset="-122"/>
+                <a:cs typeface="Aptos" pitchFamily="34" charset="-120"/>
+              </a:rPr>
+              <a:t>ПРОВЕРКА КОРРЕКТНОСТИ</a:t>
+            </a:r>
+            <a:endParaRPr lang="en-US" sz="850" dirty="0"/>
+          </a:p>
+        </p:txBody>
+      </p:sp>
+      <p:sp>
+        <p:nvSpPr>
+          <p:cNvPr id="15" name="Shape 13"/>
+          <p:cNvSpPr/>
+          <p:nvPr/>
+        </p:nvSpPr>
+        <p:spPr>
+          <a:xfrm>
+            <a:off x="896112" y="1965960"/>
+            <a:ext cx="5074920" cy="3291840"/>
+          </a:xfrm>
+          <a:prstGeom prst="roundRect">
+            <a:avLst>
+              <a:gd name="adj" fmla="val 5000"/>
+            </a:avLst>
+          </a:prstGeom>
+          <a:solidFill>
+            <a:srgbClr val="0D2947"/>
+          </a:solidFill>
+          <a:ln w="12700">
+            <a:solidFill>
+              <a:srgbClr val="17395A"/>
+            </a:solidFill>
+            <a:prstDash val="solid"/>
+          </a:ln>
+        </p:spPr>
+        <p:txBody>
+          <a:bodyPr/>
+          <a:lstStyle/>
+          <a:p>
+            <a:endParaRPr lang="ru-BY"/>
+          </a:p>
+        </p:txBody>
+      </p:sp>
+      <p:sp>
+        <p:nvSpPr>
+          <p:cNvPr id="16" name="Shape 14"/>
+          <p:cNvSpPr/>
+          <p:nvPr/>
+        </p:nvSpPr>
+        <p:spPr>
+          <a:xfrm>
+            <a:off x="1115568" y="2404872"/>
+            <a:ext cx="82296" cy="82296"/>
+          </a:xfrm>
+          <a:prstGeom prst="ellipse">
+            <a:avLst/>
+          </a:prstGeom>
+          <a:solidFill>
+            <a:srgbClr val="2DD4FF"/>
+          </a:solidFill>
+          <a:ln w="12700">
+            <a:solidFill>
+              <a:srgbClr val="2DD4FF"/>
+            </a:solidFill>
+            <a:prstDash val="solid"/>
+          </a:ln>
+        </p:spPr>
+        <p:txBody>
+          <a:bodyPr/>
+          <a:lstStyle/>
+          <a:p>
+            <a:endParaRPr lang="ru-BY"/>
+          </a:p>
+        </p:txBody>
+      </p:sp>
+      <p:sp>
+        <p:nvSpPr>
+          <p:cNvPr id="17" name="Text 15"/>
+          <p:cNvSpPr/>
+          <p:nvPr/>
+        </p:nvSpPr>
+        <p:spPr>
+          <a:xfrm>
+            <a:off x="1280160" y="2331720"/>
+            <a:ext cx="4407408" cy="777240"/>
+          </a:xfrm>
+          <a:prstGeom prst="rect">
+            <a:avLst/>
+          </a:prstGeom>
+          <a:noFill/>
+          <a:ln/>
+        </p:spPr>
+        <p:txBody>
+          <a:bodyPr wrap="square" lIns="0" tIns="0" rIns="0" bIns="0" rtlCol="0" anchor="ctr"/>
+          <a:lstStyle/>
+          <a:p>
+            <a:pPr marL="0" indent="0">
+              <a:buNone/>
+            </a:pPr>
+            <a:r>
+              <a:rPr lang="en-US" sz="1500" dirty="0">
+                <a:solidFill>
+                  <a:srgbClr val="D9E6F2"/>
+                </a:solidFill>
+                <a:latin typeface="Aptos" pitchFamily="34" charset="0"/>
+                <a:ea typeface="Aptos" pitchFamily="34" charset="-122"/>
+                <a:cs typeface="Aptos" pitchFamily="34" charset="-120"/>
+              </a:rPr>
+              <a:t>После реализации ДПФ/БПФ можно сравнить энергию сигнала в двух представлениях.</a:t>
+            </a:r>
+            <a:endParaRPr lang="en-US" sz="1500" dirty="0"/>
+          </a:p>
+        </p:txBody>
+      </p:sp>
+      <p:sp>
+        <p:nvSpPr>
+          <p:cNvPr id="18" name="Shape 16"/>
+          <p:cNvSpPr/>
+          <p:nvPr/>
+        </p:nvSpPr>
+        <p:spPr>
+          <a:xfrm>
+            <a:off x="1115568" y="3182112"/>
+            <a:ext cx="82296" cy="82296"/>
+          </a:xfrm>
+          <a:prstGeom prst="ellipse">
+            <a:avLst/>
+          </a:prstGeom>
+          <a:solidFill>
+            <a:srgbClr val="2DD4FF"/>
+          </a:solidFill>
+          <a:ln w="12700">
+            <a:solidFill>
+              <a:srgbClr val="2DD4FF"/>
+            </a:solidFill>
+            <a:prstDash val="solid"/>
+          </a:ln>
+        </p:spPr>
+        <p:txBody>
+          <a:bodyPr/>
+          <a:lstStyle/>
+          <a:p>
+            <a:endParaRPr lang="ru-BY"/>
+          </a:p>
+        </p:txBody>
+      </p:sp>
+      <p:sp>
+        <p:nvSpPr>
+          <p:cNvPr id="19" name="Text 17"/>
+          <p:cNvSpPr/>
+          <p:nvPr/>
+        </p:nvSpPr>
+        <p:spPr>
+          <a:xfrm>
+            <a:off x="1280160" y="3108960"/>
+            <a:ext cx="4407408" cy="777240"/>
+          </a:xfrm>
+          <a:prstGeom prst="rect">
+            <a:avLst/>
+          </a:prstGeom>
+          <a:noFill/>
+          <a:ln/>
+        </p:spPr>
+        <p:txBody>
+          <a:bodyPr wrap="square" lIns="0" tIns="0" rIns="0" bIns="0" rtlCol="0" anchor="ctr"/>
+          <a:lstStyle/>
+          <a:p>
+            <a:pPr marL="0" indent="0">
+              <a:buNone/>
+            </a:pPr>
+            <a:r>
+              <a:rPr lang="en-US" sz="1500" dirty="0">
+                <a:solidFill>
+                  <a:srgbClr val="D9E6F2"/>
+                </a:solidFill>
+                <a:latin typeface="Aptos" pitchFamily="34" charset="0"/>
+                <a:ea typeface="Aptos" pitchFamily="34" charset="-122"/>
+                <a:cs typeface="Aptos" pitchFamily="34" charset="-120"/>
+              </a:rPr>
+              <a:t>Если равенство заметно нарушается, чаще всего ошибка в нормировке, множителе 1/N или индексах.</a:t>
+            </a:r>
+            <a:endParaRPr lang="en-US" sz="1500" dirty="0"/>
+          </a:p>
+        </p:txBody>
+      </p:sp>
+      <p:sp>
+        <p:nvSpPr>
+          <p:cNvPr id="20" name="Shape 18"/>
+          <p:cNvSpPr/>
+          <p:nvPr/>
+        </p:nvSpPr>
+        <p:spPr>
+          <a:xfrm>
+            <a:off x="1115568" y="3959352"/>
+            <a:ext cx="82296" cy="82296"/>
+          </a:xfrm>
+          <a:prstGeom prst="ellipse">
+            <a:avLst/>
+          </a:prstGeom>
+          <a:solidFill>
+            <a:srgbClr val="2DD4FF"/>
+          </a:solidFill>
+          <a:ln w="12700">
+            <a:solidFill>
+              <a:srgbClr val="2DD4FF"/>
+            </a:solidFill>
+            <a:prstDash val="solid"/>
+          </a:ln>
+        </p:spPr>
+        <p:txBody>
+          <a:bodyPr/>
+          <a:lstStyle/>
+          <a:p>
+            <a:endParaRPr lang="ru-BY"/>
+          </a:p>
+        </p:txBody>
+      </p:sp>
+      <p:sp>
+        <p:nvSpPr>
+          <p:cNvPr id="21" name="Text 19"/>
+          <p:cNvSpPr/>
+          <p:nvPr/>
+        </p:nvSpPr>
+        <p:spPr>
+          <a:xfrm>
+            <a:off x="1280160" y="3886200"/>
+            <a:ext cx="4407408" cy="777240"/>
+          </a:xfrm>
+          <a:prstGeom prst="rect">
+            <a:avLst/>
+          </a:prstGeom>
+          <a:noFill/>
+          <a:ln/>
+        </p:spPr>
+        <p:txBody>
+          <a:bodyPr wrap="square" lIns="0" tIns="0" rIns="0" bIns="0" rtlCol="0" anchor="ctr"/>
+          <a:lstStyle/>
+          <a:p>
+            <a:pPr marL="0" indent="0">
+              <a:buNone/>
+            </a:pPr>
+            <a:r>
+              <a:rPr lang="en-US" sz="1500" dirty="0">
+                <a:solidFill>
+                  <a:srgbClr val="D9E6F2"/>
+                </a:solidFill>
+                <a:latin typeface="Aptos" pitchFamily="34" charset="0"/>
+                <a:ea typeface="Aptos" pitchFamily="34" charset="-122"/>
+                <a:cs typeface="Aptos" pitchFamily="34" charset="-120"/>
+              </a:rPr>
+              <a:t>Поэтому теорема работает как быстрый и строгий тест для программ обработки сигналов.</a:t>
+            </a:r>
+            <a:endParaRPr lang="en-US" sz="1500" dirty="0"/>
+          </a:p>
+        </p:txBody>
+      </p:sp>
+      <p:sp>
+        <p:nvSpPr>
+          <p:cNvPr id="22" name="Shape 20"/>
+          <p:cNvSpPr/>
+          <p:nvPr/>
+        </p:nvSpPr>
+        <p:spPr>
+          <a:xfrm>
+            <a:off x="6236208" y="1965960"/>
+            <a:ext cx="5047488" cy="3291840"/>
+          </a:xfrm>
+          <a:prstGeom prst="roundRect">
+            <a:avLst>
+              <a:gd name="adj" fmla="val 3333"/>
+            </a:avLst>
+          </a:prstGeom>
+          <a:solidFill>
+            <a:srgbClr val="EDEBE6"/>
+          </a:solidFill>
+          <a:ln w="12700">
+            <a:solidFill>
+              <a:srgbClr val="EDEBE6"/>
+            </a:solidFill>
+            <a:prstDash val="solid"/>
+          </a:ln>
+        </p:spPr>
+        <p:txBody>
+          <a:bodyPr/>
+          <a:lstStyle/>
+          <a:p>
+            <a:endParaRPr lang="ru-BY"/>
+          </a:p>
+        </p:txBody>
+      </p:sp>
+      <p:sp>
+        <p:nvSpPr>
+          <p:cNvPr id="23" name="Text 21"/>
+          <p:cNvSpPr/>
+          <p:nvPr/>
+        </p:nvSpPr>
+        <p:spPr>
+          <a:xfrm>
+            <a:off x="6510528" y="2240280"/>
+            <a:ext cx="2011680" cy="201168"/>
+          </a:xfrm>
+          <a:prstGeom prst="rect">
+            <a:avLst/>
+          </a:prstGeom>
+          <a:noFill/>
+          <a:ln/>
+        </p:spPr>
+        <p:txBody>
+          <a:bodyPr wrap="square" lIns="0" tIns="0" rIns="0" bIns="0" rtlCol="0" anchor="ctr"/>
+          <a:lstStyle/>
+          <a:p>
+            <a:pPr marL="0" indent="0">
+              <a:buNone/>
+            </a:pPr>
+            <a:r>
+              <a:rPr lang="en-US" sz="1400" b="1" dirty="0">
+                <a:solidFill>
+                  <a:srgbClr val="1F2937"/>
+                </a:solidFill>
+              </a:rPr>
+              <a:t>Типичные причины ошибки</a:t>
+            </a:r>
+            <a:endParaRPr lang="en-US" sz="1400" dirty="0"/>
+          </a:p>
+        </p:txBody>
+      </p:sp>
+      <p:sp>
+        <p:nvSpPr>
+          <p:cNvPr id="24" name="Text 22"/>
+          <p:cNvSpPr/>
+          <p:nvPr/>
+        </p:nvSpPr>
+        <p:spPr>
+          <a:xfrm>
+            <a:off x="6510528" y="2633472"/>
+            <a:ext cx="2651760" cy="1554480"/>
+          </a:xfrm>
+          <a:prstGeom prst="rect">
+            <a:avLst/>
+          </a:prstGeom>
+          <a:noFill/>
+          <a:ln/>
+        </p:spPr>
+        <p:txBody>
+          <a:bodyPr wrap="square" lIns="0" tIns="0" rIns="0" bIns="0" rtlCol="0" anchor="ctr"/>
+          <a:lstStyle/>
+          <a:p>
+            <a:pPr marL="0" indent="0">
+              <a:buNone/>
+            </a:pPr>
+            <a:r>
+              <a:rPr lang="en-US" sz="1550" dirty="0">
+                <a:solidFill>
+                  <a:srgbClr val="111827"/>
+                </a:solidFill>
+              </a:rPr>
+              <a:t>• неверный множитель 1/N</a:t>
+            </a:r>
+            <a:endParaRPr lang="en-US" sz="1550" dirty="0"/>
+          </a:p>
+          <a:p>
+            <a:pPr marL="0" indent="0">
+              <a:buNone/>
+            </a:pPr>
+            <a:r>
+              <a:rPr lang="en-US" sz="1550" dirty="0">
+                <a:solidFill>
+                  <a:srgbClr val="111827"/>
+                </a:solidFill>
+              </a:rPr>
+              <a:t>• переставленные индексы</a:t>
+            </a:r>
+            <a:endParaRPr lang="en-US" sz="1550" dirty="0"/>
+          </a:p>
+          <a:p>
+            <a:pPr marL="0" indent="0">
+              <a:buNone/>
+            </a:pPr>
+            <a:r>
+              <a:rPr lang="en-US" sz="1550" dirty="0">
+                <a:solidFill>
+                  <a:srgbClr val="111827"/>
+                </a:solidFill>
+              </a:rPr>
+              <a:t>• потеря части отсчётов</a:t>
+            </a:r>
+            <a:endParaRPr lang="en-US" sz="1550" dirty="0"/>
+          </a:p>
+          <a:p>
+            <a:pPr marL="0" indent="0">
+              <a:buNone/>
+            </a:pPr>
+            <a:r>
+              <a:rPr lang="en-US" sz="1550" dirty="0">
+                <a:solidFill>
+                  <a:srgbClr val="111827"/>
+                </a:solidFill>
+              </a:rPr>
+              <a:t>• некорректное сопряжение</a:t>
+            </a:r>
+            <a:endParaRPr lang="en-US" sz="1550" dirty="0"/>
+          </a:p>
+          <a:p>
+            <a:pPr marL="0" indent="0">
+              <a:buNone/>
+            </a:pPr>
+            <a:r>
+              <a:rPr lang="en-US" sz="1550" dirty="0">
+                <a:solidFill>
+                  <a:srgbClr val="111827"/>
+                </a:solidFill>
+              </a:rPr>
+              <a:t>• ошибки в коде фильтра / FFT</a:t>
+            </a:r>
+            <a:endParaRPr lang="en-US" sz="1550" dirty="0"/>
+          </a:p>
+        </p:txBody>
+      </p:sp>
+      <p:sp>
+        <p:nvSpPr>
+          <p:cNvPr id="25" name="Shape 23"/>
+          <p:cNvSpPr/>
+          <p:nvPr/>
+        </p:nvSpPr>
+        <p:spPr>
+          <a:xfrm>
+            <a:off x="9308592" y="4279392"/>
+            <a:ext cx="1371600" cy="420624"/>
+          </a:xfrm>
+          <a:prstGeom prst="roundRect">
+            <a:avLst>
+              <a:gd name="adj" fmla="val 26087"/>
+            </a:avLst>
+          </a:prstGeom>
+          <a:solidFill>
+            <a:srgbClr val="EDEBE6"/>
+          </a:solidFill>
+          <a:ln w="12700">
+            <a:solidFill>
+              <a:srgbClr val="EDEBE6"/>
+            </a:solidFill>
+            <a:prstDash val="solid"/>
+          </a:ln>
+          <a:effectLst>
+            <a:outerShdw blurRad="12700" dist="6350" dir="2700000" algn="bl" rotWithShape="0">
+              <a:srgbClr val="000000">
+                <a:alpha val="18000"/>
+              </a:srgbClr>
+            </a:outerShdw>
+          </a:effectLst>
+        </p:spPr>
+        <p:txBody>
+          <a:bodyPr/>
+          <a:lstStyle/>
+          <a:p>
+            <a:endParaRPr lang="ru-BY"/>
+          </a:p>
+        </p:txBody>
+      </p:sp>
+      <p:pic>
+        <p:nvPicPr>
+          <p:cNvPr id="26" name="Image 0" descr="preencoded.png"/>
+          <p:cNvPicPr>
+            <a:picLocks noChangeAspect="1"/>
+          </p:cNvPicPr>
+          <p:nvPr/>
+        </p:nvPicPr>
+        <p:blipFill>
+          <a:blip>
+            <a:extLst>
+              <a:ext uri="{96DAC541-7B7A-43D3-8B79-37D633B846F1}">
+                <asvg:svgBlip xmlns:asvg="http://schemas.microsoft.com/office/drawing/2016/SVG/main" r:embed="rId3"/>
+              </a:ext>
+            </a:extLst>
+          </a:blip>
+          <a:stretch>
+            <a:fillRect/>
+          </a:stretch>
+        </p:blipFill>
+        <p:spPr>
+          <a:xfrm>
+            <a:off x="9445752" y="4443984"/>
+            <a:ext cx="1097280" cy="164592"/>
+          </a:xfrm>
+          <a:prstGeom prst="rect">
+            <a:avLst/>
+          </a:prstGeom>
+        </p:spPr>
+      </p:pic>
+      <p:sp>
+        <p:nvSpPr>
+          <p:cNvPr id="27" name="Text 24"/>
+          <p:cNvSpPr/>
+          <p:nvPr/>
+        </p:nvSpPr>
+        <p:spPr>
+          <a:xfrm>
+            <a:off x="6510528" y="4736592"/>
+            <a:ext cx="4206240" cy="256032"/>
+          </a:xfrm>
+          <a:prstGeom prst="rect">
+            <a:avLst/>
+          </a:prstGeom>
+          <a:noFill/>
+          <a:ln/>
+        </p:spPr>
+        <p:txBody>
+          <a:bodyPr wrap="square" lIns="0" tIns="0" rIns="0" bIns="0" rtlCol="0" anchor="ctr"/>
+          <a:lstStyle/>
+          <a:p>
+            <a:pPr marL="0" indent="0">
+              <a:buNone/>
+            </a:pPr>
+            <a:r>
+              <a:rPr lang="en-US" sz="1180" dirty="0">
+                <a:solidFill>
+                  <a:srgbClr val="475569"/>
+                </a:solidFill>
+              </a:rPr>
+              <a:t>Один и тот же инвариант удобно проверять и по времени, и по спектру.</a:t>
+            </a:r>
+            <a:endParaRPr lang="en-US" sz="1180" dirty="0"/>
+          </a:p>
+        </p:txBody>
+      </p:sp>
+    </p:spTree>
+  </p:cSld>
+  <p:clrMapOvr>
+    <a:masterClrMapping/>
+  </p:clrMapOvr>
+</p:sld>
+</file>
+
+<file path=ppt/slides/slide11.xml><?xml version="1.0" encoding="utf-8"?>
 <p:sld xmlns:a="http://schemas.openxmlformats.org/drawingml/2006/main" xmlns:r="http://schemas.openxmlformats.org/officeDocument/2006/relationships" xmlns:p="http://schemas.openxmlformats.org/presentationml/2006/main">
   <p:cSld>
     <p:bg>
@@ -2547,7 +3556,51 @@
                 <a:ea typeface="Inter Display" pitchFamily="34" charset="-122"/>
                 <a:cs typeface="Inter Display" pitchFamily="34" charset="-120"/>
               </a:rPr>
-              <a:t>Почему теорема реально важна в инженерии</a:t>
+              <a:t>Почему </a:t>
+            </a:r>
+            <a:r>
+              <a:rPr lang="en-US" sz="3000" b="1" dirty="0" err="1">
+                <a:solidFill>
+                  <a:srgbClr val="F5F7FB"/>
+                </a:solidFill>
+                <a:latin typeface="Inter Display" pitchFamily="34" charset="0"/>
+                <a:ea typeface="Inter Display" pitchFamily="34" charset="-122"/>
+                <a:cs typeface="Inter Display" pitchFamily="34" charset="-120"/>
+              </a:rPr>
+              <a:t>теорема</a:t>
+            </a:r>
+            <a:r>
+              <a:rPr lang="en-US" sz="3000" b="1" dirty="0">
+                <a:solidFill>
+                  <a:srgbClr val="F5F7FB"/>
+                </a:solidFill>
+                <a:latin typeface="Inter Display" pitchFamily="34" charset="0"/>
+                <a:ea typeface="Inter Display" pitchFamily="34" charset="-122"/>
+                <a:cs typeface="Inter Display" pitchFamily="34" charset="-120"/>
+              </a:rPr>
+              <a:t> </a:t>
+            </a:r>
+            <a:r>
+              <a:rPr lang="en-US" sz="3000" b="1" dirty="0" err="1">
+                <a:solidFill>
+                  <a:srgbClr val="F5F7FB"/>
+                </a:solidFill>
+                <a:latin typeface="Inter Display" pitchFamily="34" charset="0"/>
+                <a:ea typeface="Inter Display" pitchFamily="34" charset="-122"/>
+                <a:cs typeface="Inter Display" pitchFamily="34" charset="-120"/>
+              </a:rPr>
+              <a:t>важна</a:t>
+            </a:r>
+            <a:r>
+              <a:rPr lang="en-US" sz="3000" b="1" dirty="0">
+                <a:solidFill>
+                  <a:srgbClr val="F5F7FB"/>
+                </a:solidFill>
+                <a:latin typeface="Inter Display" pitchFamily="34" charset="0"/>
+                <a:ea typeface="Inter Display" pitchFamily="34" charset="-122"/>
+                <a:cs typeface="Inter Display" pitchFamily="34" charset="-120"/>
+              </a:rPr>
+              <a:t> в инженерии</a:t>
             </a:r>
             <a:endParaRPr lang="en-US" sz="3000" dirty="0"/>
           </a:p>
@@ -3362,1321 +4415,6 @@
         <p14:creationId xmlns:p14="http://schemas.microsoft.com/office/powerpoint/2010/main" val="383613997"/>
       </p:ext>
     </p:extLst>
-  </p:cSld>
-  <p:clrMapOvr>
-    <a:masterClrMapping/>
-  </p:clrMapOvr>
-</p:sld>
-</file>
-
-<file path=ppt/slides/slide11.xml><?xml version="1.0" encoding="utf-8"?>
-<p:sld xmlns:a="http://schemas.openxmlformats.org/drawingml/2006/main" xmlns:r="http://schemas.openxmlformats.org/officeDocument/2006/relationships" xmlns:p="http://schemas.openxmlformats.org/presentationml/2006/main">
-  <p:cSld name="Slide 10">
-    <p:bg>
-      <p:bgPr>
-        <a:solidFill>
-          <a:srgbClr val="061426"/>
-        </a:solidFill>
-        <a:effectLst/>
-      </p:bgPr>
-    </p:bg>
-    <p:spTree>
-      <p:nvGrpSpPr>
-        <p:cNvPr id="1" name=""/>
-        <p:cNvGrpSpPr/>
-        <p:nvPr/>
-      </p:nvGrpSpPr>
-      <p:grpSpPr>
-        <a:xfrm>
-          <a:off x="0" y="0"/>
-          <a:ext cx="0" cy="0"/>
-          <a:chOff x="0" y="0"/>
-          <a:chExt cx="0" cy="0"/>
-        </a:xfrm>
-      </p:grpSpPr>
-      <p:sp>
-        <p:nvSpPr>
-          <p:cNvPr id="2" name="Shape 0"/>
-          <p:cNvSpPr/>
-          <p:nvPr/>
-        </p:nvSpPr>
-        <p:spPr>
-          <a:xfrm>
-            <a:off x="8732520" y="411480"/>
-            <a:ext cx="2560320" cy="0"/>
-          </a:xfrm>
-          <a:prstGeom prst="line">
-            <a:avLst/>
-          </a:prstGeom>
-          <a:noFill/>
-          <a:ln w="12700">
-            <a:solidFill>
-              <a:srgbClr val="17395A"/>
-            </a:solidFill>
-            <a:prstDash val="solid"/>
-          </a:ln>
-        </p:spPr>
-        <p:txBody>
-          <a:bodyPr/>
-          <a:lstStyle/>
-          <a:p>
-            <a:endParaRPr lang="ru-BY"/>
-          </a:p>
-        </p:txBody>
-      </p:sp>
-      <p:sp>
-        <p:nvSpPr>
-          <p:cNvPr id="3" name="Shape 1"/>
-          <p:cNvSpPr/>
-          <p:nvPr/>
-        </p:nvSpPr>
-        <p:spPr>
-          <a:xfrm>
-            <a:off x="11292840" y="411480"/>
-            <a:ext cx="0" cy="1097280"/>
-          </a:xfrm>
-          <a:prstGeom prst="line">
-            <a:avLst/>
-          </a:prstGeom>
-          <a:noFill/>
-          <a:ln w="12700">
-            <a:solidFill>
-              <a:srgbClr val="17395A"/>
-            </a:solidFill>
-            <a:prstDash val="solid"/>
-          </a:ln>
-        </p:spPr>
-        <p:txBody>
-          <a:bodyPr/>
-          <a:lstStyle/>
-          <a:p>
-            <a:endParaRPr lang="ru-BY"/>
-          </a:p>
-        </p:txBody>
-      </p:sp>
-      <p:sp>
-        <p:nvSpPr>
-          <p:cNvPr id="4" name="Text 2"/>
-          <p:cNvSpPr/>
-          <p:nvPr/>
-        </p:nvSpPr>
-        <p:spPr>
-          <a:xfrm>
-            <a:off x="594360" y="219456"/>
-            <a:ext cx="1645920" cy="201168"/>
-          </a:xfrm>
-          <a:prstGeom prst="rect">
-            <a:avLst/>
-          </a:prstGeom>
-          <a:noFill/>
-          <a:ln/>
-        </p:spPr>
-        <p:txBody>
-          <a:bodyPr wrap="square" lIns="0" tIns="0" rIns="0" bIns="0" rtlCol="0" anchor="ctr"/>
-          <a:lstStyle/>
-          <a:p>
-            <a:pPr marL="0" indent="0">
-              <a:buNone/>
-            </a:pPr>
-            <a:r>
-              <a:rPr lang="en-US" sz="950" b="1" dirty="0">
-                <a:solidFill>
-                  <a:srgbClr val="2DD4FF"/>
-                </a:solidFill>
-                <a:latin typeface="Aptos" pitchFamily="34" charset="0"/>
-                <a:ea typeface="Aptos" pitchFamily="34" charset="-122"/>
-                <a:cs typeface="Aptos" pitchFamily="34" charset="-120"/>
-              </a:rPr>
-              <a:t>ПРИМЕР ПРИМЕНЕНИЯ</a:t>
-            </a:r>
-            <a:endParaRPr lang="en-US" sz="950" dirty="0"/>
-          </a:p>
-        </p:txBody>
-      </p:sp>
-      <p:sp>
-        <p:nvSpPr>
-          <p:cNvPr id="5" name="Shape 3"/>
-          <p:cNvSpPr/>
-          <p:nvPr/>
-        </p:nvSpPr>
-        <p:spPr>
-          <a:xfrm>
-            <a:off x="576072" y="429768"/>
-            <a:ext cx="73152" cy="0"/>
-          </a:xfrm>
-          <a:prstGeom prst="line">
-            <a:avLst/>
-          </a:prstGeom>
-          <a:noFill/>
-          <a:ln w="25400">
-            <a:solidFill>
-              <a:srgbClr val="2DD4FF"/>
-            </a:solidFill>
-            <a:prstDash val="solid"/>
-          </a:ln>
-        </p:spPr>
-        <p:txBody>
-          <a:bodyPr/>
-          <a:lstStyle/>
-          <a:p>
-            <a:endParaRPr lang="ru-BY"/>
-          </a:p>
-        </p:txBody>
-      </p:sp>
-      <p:sp>
-        <p:nvSpPr>
-          <p:cNvPr id="6" name="Text 4"/>
-          <p:cNvSpPr/>
-          <p:nvPr/>
-        </p:nvSpPr>
-        <p:spPr>
-          <a:xfrm>
-            <a:off x="612648" y="612648"/>
-            <a:ext cx="7589520" cy="457200"/>
-          </a:xfrm>
-          <a:prstGeom prst="rect">
-            <a:avLst/>
-          </a:prstGeom>
-          <a:noFill/>
-          <a:ln/>
-        </p:spPr>
-        <p:txBody>
-          <a:bodyPr wrap="square" lIns="0" tIns="0" rIns="0" bIns="0" rtlCol="0" anchor="ctr"/>
-          <a:lstStyle/>
-          <a:p>
-            <a:pPr marL="0" indent="0">
-              <a:buNone/>
-            </a:pPr>
-            <a:r>
-              <a:rPr lang="en-US" sz="2300" b="1" dirty="0" err="1">
-                <a:solidFill>
-                  <a:srgbClr val="F7F7F3"/>
-                </a:solidFill>
-                <a:latin typeface="Aptos Display" pitchFamily="34" charset="0"/>
-                <a:ea typeface="Aptos Display" pitchFamily="34" charset="-122"/>
-                <a:cs typeface="Aptos Display" pitchFamily="34" charset="-120"/>
-              </a:rPr>
-              <a:t>Нормализация</a:t>
-            </a:r>
-            <a:r>
-              <a:rPr lang="en-US" sz="2300" b="1" dirty="0">
-                <a:solidFill>
-                  <a:srgbClr val="F7F7F3"/>
-                </a:solidFill>
-                <a:latin typeface="Aptos Display" pitchFamily="34" charset="0"/>
-                <a:ea typeface="Aptos Display" pitchFamily="34" charset="-122"/>
-                <a:cs typeface="Aptos Display" pitchFamily="34" charset="-120"/>
-              </a:rPr>
-              <a:t> </a:t>
-            </a:r>
-            <a:r>
-              <a:rPr lang="en-US" sz="2300" b="1" dirty="0" err="1">
-                <a:solidFill>
-                  <a:srgbClr val="F7F7F3"/>
-                </a:solidFill>
-                <a:latin typeface="Aptos Display" pitchFamily="34" charset="0"/>
-                <a:ea typeface="Aptos Display" pitchFamily="34" charset="-122"/>
-                <a:cs typeface="Aptos Display" pitchFamily="34" charset="-120"/>
-              </a:rPr>
-              <a:t>громкости</a:t>
-            </a:r>
-            <a:endParaRPr lang="en-US" sz="2300" dirty="0"/>
-          </a:p>
-        </p:txBody>
-      </p:sp>
-      <p:sp>
-        <p:nvSpPr>
-          <p:cNvPr id="7" name="Text 5"/>
-          <p:cNvSpPr/>
-          <p:nvPr/>
-        </p:nvSpPr>
-        <p:spPr>
-          <a:xfrm>
-            <a:off x="11521440" y="6473952"/>
-            <a:ext cx="182880" cy="164592"/>
-          </a:xfrm>
-          <a:prstGeom prst="rect">
-            <a:avLst/>
-          </a:prstGeom>
-          <a:noFill/>
-          <a:ln/>
-        </p:spPr>
-        <p:txBody>
-          <a:bodyPr wrap="square" lIns="0" tIns="0" rIns="0" bIns="0" rtlCol="0" anchor="ctr"/>
-          <a:lstStyle/>
-          <a:p>
-            <a:pPr marL="0" indent="0" algn="r">
-              <a:buNone/>
-            </a:pPr>
-            <a:r>
-              <a:rPr lang="en-US" sz="850" dirty="0">
-                <a:solidFill>
-                  <a:srgbClr val="9FB4C9"/>
-                </a:solidFill>
-                <a:latin typeface="Aptos" pitchFamily="34" charset="0"/>
-                <a:ea typeface="Aptos" pitchFamily="34" charset="-122"/>
-                <a:cs typeface="Aptos" pitchFamily="34" charset="-120"/>
-              </a:rPr>
-              <a:t>10</a:t>
-            </a:r>
-            <a:endParaRPr lang="en-US" sz="850" dirty="0"/>
-          </a:p>
-        </p:txBody>
-      </p:sp>
-      <p:sp>
-        <p:nvSpPr>
-          <p:cNvPr id="8" name="Shape 6"/>
-          <p:cNvSpPr/>
-          <p:nvPr/>
-        </p:nvSpPr>
-        <p:spPr>
-          <a:xfrm>
-            <a:off x="658368" y="1234440"/>
-            <a:ext cx="10972800" cy="4572000"/>
-          </a:xfrm>
-          <a:prstGeom prst="roundRect">
-            <a:avLst>
-              <a:gd name="adj" fmla="val 3600"/>
-            </a:avLst>
-          </a:prstGeom>
-          <a:solidFill>
-            <a:srgbClr val="0A1F38"/>
-          </a:solidFill>
-          <a:ln w="12700">
-            <a:solidFill>
-              <a:srgbClr val="17395A"/>
-            </a:solidFill>
-            <a:prstDash val="solid"/>
-          </a:ln>
-        </p:spPr>
-        <p:txBody>
-          <a:bodyPr/>
-          <a:lstStyle/>
-          <a:p>
-            <a:endParaRPr lang="ru-BY"/>
-          </a:p>
-        </p:txBody>
-      </p:sp>
-      <p:sp>
-        <p:nvSpPr>
-          <p:cNvPr id="10" name="Shape 8"/>
-          <p:cNvSpPr/>
-          <p:nvPr/>
-        </p:nvSpPr>
-        <p:spPr>
-          <a:xfrm>
-            <a:off x="896112" y="1965960"/>
-            <a:ext cx="1755648" cy="914400"/>
-          </a:xfrm>
-          <a:prstGeom prst="roundRect">
-            <a:avLst>
-              <a:gd name="adj" fmla="val 18000"/>
-            </a:avLst>
-          </a:prstGeom>
-          <a:solidFill>
-            <a:srgbClr val="0D2947"/>
-          </a:solidFill>
-          <a:ln w="12700">
-            <a:solidFill>
-              <a:srgbClr val="17395A"/>
-            </a:solidFill>
-            <a:prstDash val="solid"/>
-          </a:ln>
-        </p:spPr>
-        <p:txBody>
-          <a:bodyPr/>
-          <a:lstStyle/>
-          <a:p>
-            <a:endParaRPr lang="ru-BY"/>
-          </a:p>
-        </p:txBody>
-      </p:sp>
-      <p:sp>
-        <p:nvSpPr>
-          <p:cNvPr id="11" name="Shape 9"/>
-          <p:cNvSpPr/>
-          <p:nvPr/>
-        </p:nvSpPr>
-        <p:spPr>
-          <a:xfrm>
-            <a:off x="1005840" y="2103120"/>
-            <a:ext cx="804672" cy="256032"/>
-          </a:xfrm>
-          <a:prstGeom prst="roundRect">
-            <a:avLst>
-              <a:gd name="adj" fmla="val 42857"/>
-            </a:avLst>
-          </a:prstGeom>
-          <a:solidFill>
-            <a:srgbClr val="2DD4FF"/>
-          </a:solidFill>
-          <a:ln w="12700">
-            <a:solidFill>
-              <a:srgbClr val="2DD4FF"/>
-            </a:solidFill>
-            <a:prstDash val="solid"/>
-          </a:ln>
-        </p:spPr>
-        <p:txBody>
-          <a:bodyPr/>
-          <a:lstStyle/>
-          <a:p>
-            <a:endParaRPr lang="ru-BY"/>
-          </a:p>
-        </p:txBody>
-      </p:sp>
-      <p:sp>
-        <p:nvSpPr>
-          <p:cNvPr id="12" name="Text 10"/>
-          <p:cNvSpPr/>
-          <p:nvPr/>
-        </p:nvSpPr>
-        <p:spPr>
-          <a:xfrm>
-            <a:off x="1051560" y="2121408"/>
-            <a:ext cx="713232" cy="182880"/>
-          </a:xfrm>
-          <a:prstGeom prst="rect">
-            <a:avLst/>
-          </a:prstGeom>
-          <a:noFill/>
-          <a:ln/>
-        </p:spPr>
-        <p:txBody>
-          <a:bodyPr wrap="square" lIns="0" tIns="0" rIns="0" bIns="0" rtlCol="0" anchor="ctr"/>
-          <a:lstStyle/>
-          <a:p>
-            <a:pPr marL="0" indent="0" algn="ctr">
-              <a:buNone/>
-            </a:pPr>
-            <a:r>
-              <a:rPr lang="en-US" sz="850" b="1" dirty="0">
-                <a:solidFill>
-                  <a:srgbClr val="061426"/>
-                </a:solidFill>
-                <a:latin typeface="Aptos" pitchFamily="34" charset="0"/>
-                <a:ea typeface="Aptos" pitchFamily="34" charset="-122"/>
-                <a:cs typeface="Aptos" pitchFamily="34" charset="-120"/>
-              </a:rPr>
-              <a:t>СИГНАЛ</a:t>
-            </a:r>
-            <a:endParaRPr lang="en-US" sz="850" dirty="0"/>
-          </a:p>
-        </p:txBody>
-      </p:sp>
-      <p:sp>
-        <p:nvSpPr>
-          <p:cNvPr id="13" name="Text 11"/>
-          <p:cNvSpPr/>
-          <p:nvPr/>
-        </p:nvSpPr>
-        <p:spPr>
-          <a:xfrm>
-            <a:off x="1005840" y="2486163"/>
-            <a:ext cx="1572768" cy="256032"/>
-          </a:xfrm>
-          <a:prstGeom prst="rect">
-            <a:avLst/>
-          </a:prstGeom>
-          <a:noFill/>
-          <a:ln/>
-        </p:spPr>
-        <p:txBody>
-          <a:bodyPr wrap="square" lIns="0" tIns="0" rIns="0" bIns="0" rtlCol="0" anchor="ctr"/>
-          <a:lstStyle/>
-          <a:p>
-            <a:pPr marL="0" indent="0" algn="ctr">
-              <a:buNone/>
-            </a:pPr>
-            <a:r>
-              <a:rPr lang="en-US" sz="1110" dirty="0">
-                <a:solidFill>
-                  <a:srgbClr val="D9E6F2"/>
-                </a:solidFill>
-              </a:rPr>
-              <a:t>окна по 1024/2048 отсчётов</a:t>
-            </a:r>
-            <a:endParaRPr lang="en-US" sz="1110" dirty="0"/>
-          </a:p>
-        </p:txBody>
-      </p:sp>
-      <p:sp>
-        <p:nvSpPr>
-          <p:cNvPr id="14" name="Shape 12"/>
-          <p:cNvSpPr/>
-          <p:nvPr/>
-        </p:nvSpPr>
-        <p:spPr>
-          <a:xfrm>
-            <a:off x="2734056" y="2295144"/>
-            <a:ext cx="164592" cy="201168"/>
-          </a:xfrm>
-          <a:prstGeom prst="chevron">
-            <a:avLst/>
-          </a:prstGeom>
-          <a:solidFill>
-            <a:srgbClr val="17395A"/>
-          </a:solidFill>
-          <a:ln w="12700">
-            <a:solidFill>
-              <a:srgbClr val="17395A"/>
-            </a:solidFill>
-            <a:prstDash val="solid"/>
-          </a:ln>
-        </p:spPr>
-        <p:txBody>
-          <a:bodyPr/>
-          <a:lstStyle/>
-          <a:p>
-            <a:endParaRPr lang="ru-BY"/>
-          </a:p>
-        </p:txBody>
-      </p:sp>
-      <p:sp>
-        <p:nvSpPr>
-          <p:cNvPr id="15" name="Shape 13"/>
-          <p:cNvSpPr/>
-          <p:nvPr/>
-        </p:nvSpPr>
-        <p:spPr>
-          <a:xfrm>
-            <a:off x="2944368" y="1965960"/>
-            <a:ext cx="1755648" cy="914400"/>
-          </a:xfrm>
-          <a:prstGeom prst="roundRect">
-            <a:avLst>
-              <a:gd name="adj" fmla="val 18000"/>
-            </a:avLst>
-          </a:prstGeom>
-          <a:solidFill>
-            <a:srgbClr val="0D2947"/>
-          </a:solidFill>
-          <a:ln w="12700">
-            <a:solidFill>
-              <a:srgbClr val="17395A"/>
-            </a:solidFill>
-            <a:prstDash val="solid"/>
-          </a:ln>
-        </p:spPr>
-        <p:txBody>
-          <a:bodyPr/>
-          <a:lstStyle/>
-          <a:p>
-            <a:endParaRPr lang="ru-BY"/>
-          </a:p>
-        </p:txBody>
-      </p:sp>
-      <p:sp>
-        <p:nvSpPr>
-          <p:cNvPr id="16" name="Shape 14"/>
-          <p:cNvSpPr/>
-          <p:nvPr/>
-        </p:nvSpPr>
-        <p:spPr>
-          <a:xfrm>
-            <a:off x="3054096" y="2103120"/>
-            <a:ext cx="804672" cy="256032"/>
-          </a:xfrm>
-          <a:prstGeom prst="roundRect">
-            <a:avLst>
-              <a:gd name="adj" fmla="val 42857"/>
-            </a:avLst>
-          </a:prstGeom>
-          <a:solidFill>
-            <a:srgbClr val="8C7CFF"/>
-          </a:solidFill>
-          <a:ln w="12700">
-            <a:solidFill>
-              <a:srgbClr val="8C7CFF"/>
-            </a:solidFill>
-            <a:prstDash val="solid"/>
-          </a:ln>
-        </p:spPr>
-        <p:txBody>
-          <a:bodyPr/>
-          <a:lstStyle/>
-          <a:p>
-            <a:endParaRPr lang="ru-BY"/>
-          </a:p>
-        </p:txBody>
-      </p:sp>
-      <p:sp>
-        <p:nvSpPr>
-          <p:cNvPr id="17" name="Text 15"/>
-          <p:cNvSpPr/>
-          <p:nvPr/>
-        </p:nvSpPr>
-        <p:spPr>
-          <a:xfrm>
-            <a:off x="3099816" y="2121408"/>
-            <a:ext cx="713232" cy="182880"/>
-          </a:xfrm>
-          <a:prstGeom prst="rect">
-            <a:avLst/>
-          </a:prstGeom>
-          <a:noFill/>
-          <a:ln/>
-        </p:spPr>
-        <p:txBody>
-          <a:bodyPr wrap="square" lIns="0" tIns="0" rIns="0" bIns="0" rtlCol="0" anchor="ctr"/>
-          <a:lstStyle/>
-          <a:p>
-            <a:pPr marL="0" indent="0" algn="ctr">
-              <a:buNone/>
-            </a:pPr>
-            <a:r>
-              <a:rPr lang="en-US" sz="850" b="1" dirty="0">
-                <a:solidFill>
-                  <a:srgbClr val="061426"/>
-                </a:solidFill>
-                <a:latin typeface="Aptos" pitchFamily="34" charset="0"/>
-                <a:ea typeface="Aptos" pitchFamily="34" charset="-122"/>
-                <a:cs typeface="Aptos" pitchFamily="34" charset="-120"/>
-              </a:rPr>
-              <a:t>БПФ</a:t>
-            </a:r>
-            <a:endParaRPr lang="en-US" sz="850" dirty="0"/>
-          </a:p>
-        </p:txBody>
-      </p:sp>
-      <p:sp>
-        <p:nvSpPr>
-          <p:cNvPr id="18" name="Text 16"/>
-          <p:cNvSpPr/>
-          <p:nvPr/>
-        </p:nvSpPr>
-        <p:spPr>
-          <a:xfrm>
-            <a:off x="3035808" y="2458731"/>
-            <a:ext cx="1572768" cy="256032"/>
-          </a:xfrm>
-          <a:prstGeom prst="rect">
-            <a:avLst/>
-          </a:prstGeom>
-          <a:noFill/>
-          <a:ln/>
-        </p:spPr>
-        <p:txBody>
-          <a:bodyPr wrap="square" lIns="0" tIns="0" rIns="0" bIns="0" rtlCol="0" anchor="ctr"/>
-          <a:lstStyle/>
-          <a:p>
-            <a:pPr marL="0" indent="0" algn="ctr">
-              <a:buNone/>
-            </a:pPr>
-            <a:r>
-              <a:rPr lang="en-US" sz="1110" dirty="0">
-                <a:solidFill>
-                  <a:srgbClr val="D9E6F2"/>
-                </a:solidFill>
-              </a:rPr>
-              <a:t>получаем спектр</a:t>
-            </a:r>
-            <a:endParaRPr lang="en-US" sz="1110" dirty="0"/>
-          </a:p>
-        </p:txBody>
-      </p:sp>
-      <p:sp>
-        <p:nvSpPr>
-          <p:cNvPr id="19" name="Shape 17"/>
-          <p:cNvSpPr/>
-          <p:nvPr/>
-        </p:nvSpPr>
-        <p:spPr>
-          <a:xfrm>
-            <a:off x="4782312" y="2295144"/>
-            <a:ext cx="164592" cy="201168"/>
-          </a:xfrm>
-          <a:prstGeom prst="chevron">
-            <a:avLst/>
-          </a:prstGeom>
-          <a:solidFill>
-            <a:srgbClr val="17395A"/>
-          </a:solidFill>
-          <a:ln w="12700">
-            <a:solidFill>
-              <a:srgbClr val="17395A"/>
-            </a:solidFill>
-            <a:prstDash val="solid"/>
-          </a:ln>
-        </p:spPr>
-        <p:txBody>
-          <a:bodyPr/>
-          <a:lstStyle/>
-          <a:p>
-            <a:endParaRPr lang="ru-BY"/>
-          </a:p>
-        </p:txBody>
-      </p:sp>
-      <p:sp>
-        <p:nvSpPr>
-          <p:cNvPr id="20" name="Shape 18"/>
-          <p:cNvSpPr/>
-          <p:nvPr/>
-        </p:nvSpPr>
-        <p:spPr>
-          <a:xfrm>
-            <a:off x="4992624" y="1965960"/>
-            <a:ext cx="1755648" cy="914400"/>
-          </a:xfrm>
-          <a:prstGeom prst="roundRect">
-            <a:avLst>
-              <a:gd name="adj" fmla="val 18000"/>
-            </a:avLst>
-          </a:prstGeom>
-          <a:solidFill>
-            <a:srgbClr val="0D2947"/>
-          </a:solidFill>
-          <a:ln w="12700">
-            <a:solidFill>
-              <a:srgbClr val="17395A"/>
-            </a:solidFill>
-            <a:prstDash val="solid"/>
-          </a:ln>
-        </p:spPr>
-        <p:txBody>
-          <a:bodyPr/>
-          <a:lstStyle/>
-          <a:p>
-            <a:endParaRPr lang="ru-BY"/>
-          </a:p>
-        </p:txBody>
-      </p:sp>
-      <p:sp>
-        <p:nvSpPr>
-          <p:cNvPr id="21" name="Shape 19"/>
-          <p:cNvSpPr/>
-          <p:nvPr/>
-        </p:nvSpPr>
-        <p:spPr>
-          <a:xfrm>
-            <a:off x="5102352" y="2103120"/>
-            <a:ext cx="804672" cy="256032"/>
-          </a:xfrm>
-          <a:prstGeom prst="roundRect">
-            <a:avLst>
-              <a:gd name="adj" fmla="val 42857"/>
-            </a:avLst>
-          </a:prstGeom>
-          <a:solidFill>
-            <a:srgbClr val="FFB14A"/>
-          </a:solidFill>
-          <a:ln w="12700">
-            <a:solidFill>
-              <a:srgbClr val="FFB14A"/>
-            </a:solidFill>
-            <a:prstDash val="solid"/>
-          </a:ln>
-        </p:spPr>
-        <p:txBody>
-          <a:bodyPr/>
-          <a:lstStyle/>
-          <a:p>
-            <a:endParaRPr lang="ru-BY"/>
-          </a:p>
-        </p:txBody>
-      </p:sp>
-      <p:sp>
-        <p:nvSpPr>
-          <p:cNvPr id="22" name="Text 20"/>
-          <p:cNvSpPr/>
-          <p:nvPr/>
-        </p:nvSpPr>
-        <p:spPr>
-          <a:xfrm>
-            <a:off x="5148072" y="2121408"/>
-            <a:ext cx="713232" cy="182880"/>
-          </a:xfrm>
-          <a:prstGeom prst="rect">
-            <a:avLst/>
-          </a:prstGeom>
-          <a:noFill/>
-          <a:ln/>
-        </p:spPr>
-        <p:txBody>
-          <a:bodyPr wrap="square" lIns="0" tIns="0" rIns="0" bIns="0" rtlCol="0" anchor="ctr"/>
-          <a:lstStyle/>
-          <a:p>
-            <a:pPr marL="0" indent="0" algn="ctr">
-              <a:buNone/>
-            </a:pPr>
-            <a:r>
-              <a:rPr lang="en-US" sz="850" b="1" dirty="0">
-                <a:solidFill>
-                  <a:srgbClr val="061426"/>
-                </a:solidFill>
-                <a:latin typeface="Aptos" pitchFamily="34" charset="0"/>
-                <a:ea typeface="Aptos" pitchFamily="34" charset="-122"/>
-                <a:cs typeface="Aptos" pitchFamily="34" charset="-120"/>
-              </a:rPr>
-              <a:t>ЭНЕРГИЯ</a:t>
-            </a:r>
-            <a:endParaRPr lang="en-US" sz="850" dirty="0"/>
-          </a:p>
-        </p:txBody>
-      </p:sp>
-      <p:sp>
-        <p:nvSpPr>
-          <p:cNvPr id="23" name="Text 21"/>
-          <p:cNvSpPr/>
-          <p:nvPr/>
-        </p:nvSpPr>
-        <p:spPr>
-          <a:xfrm>
-            <a:off x="5084064" y="2458731"/>
-            <a:ext cx="1572768" cy="256032"/>
-          </a:xfrm>
-          <a:prstGeom prst="rect">
-            <a:avLst/>
-          </a:prstGeom>
-          <a:noFill/>
-          <a:ln/>
-        </p:spPr>
-        <p:txBody>
-          <a:bodyPr wrap="square" lIns="0" tIns="0" rIns="0" bIns="0" rtlCol="0" anchor="ctr"/>
-          <a:lstStyle/>
-          <a:p>
-            <a:pPr marL="0" indent="0" algn="ctr">
-              <a:buNone/>
-            </a:pPr>
-            <a:r>
-              <a:rPr lang="en-US" sz="1110" dirty="0">
-                <a:solidFill>
-                  <a:srgbClr val="D9E6F2"/>
-                </a:solidFill>
-              </a:rPr>
-              <a:t>суммируем |X[k]|² / N</a:t>
-            </a:r>
-            <a:endParaRPr lang="en-US" sz="1110" dirty="0"/>
-          </a:p>
-        </p:txBody>
-      </p:sp>
-      <p:sp>
-        <p:nvSpPr>
-          <p:cNvPr id="24" name="Shape 22"/>
-          <p:cNvSpPr/>
-          <p:nvPr/>
-        </p:nvSpPr>
-        <p:spPr>
-          <a:xfrm>
-            <a:off x="6830568" y="2295144"/>
-            <a:ext cx="164592" cy="201168"/>
-          </a:xfrm>
-          <a:prstGeom prst="chevron">
-            <a:avLst/>
-          </a:prstGeom>
-          <a:solidFill>
-            <a:srgbClr val="17395A"/>
-          </a:solidFill>
-          <a:ln w="12700">
-            <a:solidFill>
-              <a:srgbClr val="17395A"/>
-            </a:solidFill>
-            <a:prstDash val="solid"/>
-          </a:ln>
-        </p:spPr>
-        <p:txBody>
-          <a:bodyPr/>
-          <a:lstStyle/>
-          <a:p>
-            <a:endParaRPr lang="ru-BY"/>
-          </a:p>
-        </p:txBody>
-      </p:sp>
-      <p:sp>
-        <p:nvSpPr>
-          <p:cNvPr id="25" name="Shape 23"/>
-          <p:cNvSpPr/>
-          <p:nvPr/>
-        </p:nvSpPr>
-        <p:spPr>
-          <a:xfrm>
-            <a:off x="7040880" y="1965960"/>
-            <a:ext cx="1755648" cy="914400"/>
-          </a:xfrm>
-          <a:prstGeom prst="roundRect">
-            <a:avLst>
-              <a:gd name="adj" fmla="val 18000"/>
-            </a:avLst>
-          </a:prstGeom>
-          <a:solidFill>
-            <a:srgbClr val="0D2947"/>
-          </a:solidFill>
-          <a:ln w="12700">
-            <a:solidFill>
-              <a:srgbClr val="17395A"/>
-            </a:solidFill>
-            <a:prstDash val="solid"/>
-          </a:ln>
-        </p:spPr>
-        <p:txBody>
-          <a:bodyPr/>
-          <a:lstStyle/>
-          <a:p>
-            <a:endParaRPr lang="ru-BY"/>
-          </a:p>
-        </p:txBody>
-      </p:sp>
-      <p:sp>
-        <p:nvSpPr>
-          <p:cNvPr id="26" name="Shape 24"/>
-          <p:cNvSpPr/>
-          <p:nvPr/>
-        </p:nvSpPr>
-        <p:spPr>
-          <a:xfrm>
-            <a:off x="7150608" y="2103120"/>
-            <a:ext cx="804672" cy="256032"/>
-          </a:xfrm>
-          <a:prstGeom prst="roundRect">
-            <a:avLst>
-              <a:gd name="adj" fmla="val 42857"/>
-            </a:avLst>
-          </a:prstGeom>
-          <a:solidFill>
-            <a:srgbClr val="43D17C"/>
-          </a:solidFill>
-          <a:ln w="12700">
-            <a:solidFill>
-              <a:srgbClr val="43D17C"/>
-            </a:solidFill>
-            <a:prstDash val="solid"/>
-          </a:ln>
-        </p:spPr>
-        <p:txBody>
-          <a:bodyPr/>
-          <a:lstStyle/>
-          <a:p>
-            <a:endParaRPr lang="ru-BY"/>
-          </a:p>
-        </p:txBody>
-      </p:sp>
-      <p:sp>
-        <p:nvSpPr>
-          <p:cNvPr id="27" name="Text 25"/>
-          <p:cNvSpPr/>
-          <p:nvPr/>
-        </p:nvSpPr>
-        <p:spPr>
-          <a:xfrm>
-            <a:off x="7196328" y="2121408"/>
-            <a:ext cx="713232" cy="182880"/>
-          </a:xfrm>
-          <a:prstGeom prst="rect">
-            <a:avLst/>
-          </a:prstGeom>
-          <a:noFill/>
-          <a:ln/>
-        </p:spPr>
-        <p:txBody>
-          <a:bodyPr wrap="square" lIns="0" tIns="0" rIns="0" bIns="0" rtlCol="0" anchor="ctr"/>
-          <a:lstStyle/>
-          <a:p>
-            <a:pPr marL="0" indent="0" algn="ctr">
-              <a:buNone/>
-            </a:pPr>
-            <a:r>
-              <a:rPr lang="en-US" sz="850" b="1" dirty="0">
-                <a:solidFill>
-                  <a:srgbClr val="061426"/>
-                </a:solidFill>
-                <a:latin typeface="Aptos" pitchFamily="34" charset="0"/>
-                <a:ea typeface="Aptos" pitchFamily="34" charset="-122"/>
-                <a:cs typeface="Aptos" pitchFamily="34" charset="-120"/>
-              </a:rPr>
-              <a:t>СРАВНЕНИЕ</a:t>
-            </a:r>
-            <a:endParaRPr lang="en-US" sz="850" dirty="0"/>
-          </a:p>
-        </p:txBody>
-      </p:sp>
-      <p:sp>
-        <p:nvSpPr>
-          <p:cNvPr id="28" name="Text 26"/>
-          <p:cNvSpPr/>
-          <p:nvPr/>
-        </p:nvSpPr>
-        <p:spPr>
-          <a:xfrm>
-            <a:off x="7132320" y="2467674"/>
-            <a:ext cx="1572768" cy="256032"/>
-          </a:xfrm>
-          <a:prstGeom prst="rect">
-            <a:avLst/>
-          </a:prstGeom>
-          <a:noFill/>
-          <a:ln/>
-        </p:spPr>
-        <p:txBody>
-          <a:bodyPr wrap="square" lIns="0" tIns="0" rIns="0" bIns="0" rtlCol="0" anchor="ctr"/>
-          <a:lstStyle/>
-          <a:p>
-            <a:pPr marL="0" indent="0" algn="ctr">
-              <a:buNone/>
-            </a:pPr>
-            <a:r>
-              <a:rPr lang="en-US" sz="1110" dirty="0">
-                <a:solidFill>
-                  <a:srgbClr val="D9E6F2"/>
-                </a:solidFill>
-              </a:rPr>
-              <a:t>с целевым уровнем</a:t>
-            </a:r>
-            <a:endParaRPr lang="en-US" sz="1110" dirty="0"/>
-          </a:p>
-        </p:txBody>
-      </p:sp>
-      <p:sp>
-        <p:nvSpPr>
-          <p:cNvPr id="29" name="Shape 27"/>
-          <p:cNvSpPr/>
-          <p:nvPr/>
-        </p:nvSpPr>
-        <p:spPr>
-          <a:xfrm>
-            <a:off x="8878824" y="2295144"/>
-            <a:ext cx="164592" cy="201168"/>
-          </a:xfrm>
-          <a:prstGeom prst="chevron">
-            <a:avLst/>
-          </a:prstGeom>
-          <a:solidFill>
-            <a:srgbClr val="17395A"/>
-          </a:solidFill>
-          <a:ln w="12700">
-            <a:solidFill>
-              <a:srgbClr val="17395A"/>
-            </a:solidFill>
-            <a:prstDash val="solid"/>
-          </a:ln>
-        </p:spPr>
-        <p:txBody>
-          <a:bodyPr/>
-          <a:lstStyle/>
-          <a:p>
-            <a:endParaRPr lang="ru-BY"/>
-          </a:p>
-        </p:txBody>
-      </p:sp>
-      <p:sp>
-        <p:nvSpPr>
-          <p:cNvPr id="30" name="Shape 28"/>
-          <p:cNvSpPr/>
-          <p:nvPr/>
-        </p:nvSpPr>
-        <p:spPr>
-          <a:xfrm>
-            <a:off x="9089136" y="1965960"/>
-            <a:ext cx="1755648" cy="914400"/>
-          </a:xfrm>
-          <a:prstGeom prst="roundRect">
-            <a:avLst>
-              <a:gd name="adj" fmla="val 18000"/>
-            </a:avLst>
-          </a:prstGeom>
-          <a:solidFill>
-            <a:srgbClr val="0D2947"/>
-          </a:solidFill>
-          <a:ln w="12700">
-            <a:solidFill>
-              <a:srgbClr val="17395A"/>
-            </a:solidFill>
-            <a:prstDash val="solid"/>
-          </a:ln>
-        </p:spPr>
-        <p:txBody>
-          <a:bodyPr/>
-          <a:lstStyle/>
-          <a:p>
-            <a:endParaRPr lang="ru-BY"/>
-          </a:p>
-        </p:txBody>
-      </p:sp>
-      <p:sp>
-        <p:nvSpPr>
-          <p:cNvPr id="31" name="Shape 29"/>
-          <p:cNvSpPr/>
-          <p:nvPr/>
-        </p:nvSpPr>
-        <p:spPr>
-          <a:xfrm>
-            <a:off x="9198864" y="2103120"/>
-            <a:ext cx="804672" cy="256032"/>
-          </a:xfrm>
-          <a:prstGeom prst="roundRect">
-            <a:avLst>
-              <a:gd name="adj" fmla="val 42857"/>
-            </a:avLst>
-          </a:prstGeom>
-          <a:solidFill>
-            <a:srgbClr val="6B7280"/>
-          </a:solidFill>
-          <a:ln w="12700">
-            <a:solidFill>
-              <a:srgbClr val="6B7280"/>
-            </a:solidFill>
-            <a:prstDash val="solid"/>
-          </a:ln>
-        </p:spPr>
-        <p:txBody>
-          <a:bodyPr/>
-          <a:lstStyle/>
-          <a:p>
-            <a:endParaRPr lang="ru-BY"/>
-          </a:p>
-        </p:txBody>
-      </p:sp>
-      <p:sp>
-        <p:nvSpPr>
-          <p:cNvPr id="32" name="Text 30"/>
-          <p:cNvSpPr/>
-          <p:nvPr/>
-        </p:nvSpPr>
-        <p:spPr>
-          <a:xfrm>
-            <a:off x="9244584" y="2121407"/>
-            <a:ext cx="758952" cy="279645"/>
-          </a:xfrm>
-          <a:prstGeom prst="rect">
-            <a:avLst/>
-          </a:prstGeom>
-          <a:noFill/>
-          <a:ln/>
-        </p:spPr>
-        <p:txBody>
-          <a:bodyPr wrap="square" lIns="0" tIns="0" rIns="0" bIns="0" rtlCol="0" anchor="ctr"/>
-          <a:lstStyle/>
-          <a:p>
-            <a:pPr marL="0" indent="0" algn="ctr">
-              <a:buNone/>
-            </a:pPr>
-            <a:r>
-              <a:rPr lang="en-US" sz="850" b="1" dirty="0">
-                <a:solidFill>
-                  <a:srgbClr val="F7F7F3"/>
-                </a:solidFill>
-                <a:latin typeface="Aptos" pitchFamily="34" charset="0"/>
-                <a:ea typeface="Aptos" pitchFamily="34" charset="-122"/>
-                <a:cs typeface="Aptos" pitchFamily="34" charset="-120"/>
-              </a:rPr>
-              <a:t>МАСШТАБИРОВАНИЕ</a:t>
-            </a:r>
-            <a:endParaRPr lang="en-US" sz="850" dirty="0"/>
-          </a:p>
-        </p:txBody>
-      </p:sp>
-      <p:sp>
-        <p:nvSpPr>
-          <p:cNvPr id="33" name="Text 31"/>
-          <p:cNvSpPr/>
-          <p:nvPr/>
-        </p:nvSpPr>
-        <p:spPr>
-          <a:xfrm>
-            <a:off x="9180576" y="2483349"/>
-            <a:ext cx="1572768" cy="256032"/>
-          </a:xfrm>
-          <a:prstGeom prst="rect">
-            <a:avLst/>
-          </a:prstGeom>
-          <a:noFill/>
-          <a:ln/>
-        </p:spPr>
-        <p:txBody>
-          <a:bodyPr wrap="square" lIns="0" tIns="0" rIns="0" bIns="0" rtlCol="0" anchor="ctr"/>
-          <a:lstStyle/>
-          <a:p>
-            <a:pPr marL="0" indent="0" algn="ctr">
-              <a:buNone/>
-            </a:pPr>
-            <a:r>
-              <a:rPr lang="en-US" sz="1110" dirty="0">
-                <a:solidFill>
-                  <a:srgbClr val="D9E6F2"/>
-                </a:solidFill>
-              </a:rPr>
-              <a:t>усиление или ослабление</a:t>
-            </a:r>
-            <a:endParaRPr lang="en-US" sz="1110" dirty="0"/>
-          </a:p>
-        </p:txBody>
-      </p:sp>
-      <p:sp>
-        <p:nvSpPr>
-          <p:cNvPr id="34" name="Shape 32"/>
-          <p:cNvSpPr/>
-          <p:nvPr/>
-        </p:nvSpPr>
-        <p:spPr>
-          <a:xfrm>
-            <a:off x="896112" y="3337560"/>
-            <a:ext cx="5989320" cy="1874520"/>
-          </a:xfrm>
-          <a:prstGeom prst="roundRect">
-            <a:avLst>
-              <a:gd name="adj" fmla="val 5854"/>
-            </a:avLst>
-          </a:prstGeom>
-          <a:solidFill>
-            <a:srgbClr val="EDEBE6"/>
-          </a:solidFill>
-          <a:ln w="12700">
-            <a:solidFill>
-              <a:srgbClr val="EDEBE6"/>
-            </a:solidFill>
-            <a:prstDash val="solid"/>
-          </a:ln>
-        </p:spPr>
-        <p:txBody>
-          <a:bodyPr/>
-          <a:lstStyle/>
-          <a:p>
-            <a:endParaRPr lang="ru-BY"/>
-          </a:p>
-        </p:txBody>
-      </p:sp>
-      <p:sp>
-        <p:nvSpPr>
-          <p:cNvPr id="36" name="Text 34"/>
-          <p:cNvSpPr/>
-          <p:nvPr/>
-        </p:nvSpPr>
-        <p:spPr>
-          <a:xfrm>
-            <a:off x="1133856" y="3931920"/>
-            <a:ext cx="5440680" cy="640080"/>
-          </a:xfrm>
-          <a:prstGeom prst="rect">
-            <a:avLst/>
-          </a:prstGeom>
-          <a:noFill/>
-          <a:ln/>
-        </p:spPr>
-        <p:txBody>
-          <a:bodyPr wrap="square" lIns="0" tIns="0" rIns="0" bIns="0" rtlCol="0" anchor="ctr"/>
-          <a:lstStyle/>
-          <a:p>
-            <a:pPr marL="0" indent="0">
-              <a:buNone/>
-            </a:pPr>
-            <a:r>
-              <a:rPr lang="en-US" sz="1420" dirty="0">
-                <a:solidFill>
-                  <a:srgbClr val="111827"/>
-                </a:solidFill>
-              </a:rPr>
-              <a:t>Теорема Парсеваля описывает физическую энергию сигнала. Субъективная loudness человека зависит ещё и от частотного состава, длительности и особенностей слуха.</a:t>
-            </a:r>
-            <a:endParaRPr lang="en-US" sz="1420" dirty="0"/>
-          </a:p>
-        </p:txBody>
-      </p:sp>
-      <p:sp>
-        <p:nvSpPr>
-          <p:cNvPr id="37" name="Shape 35"/>
-          <p:cNvSpPr/>
-          <p:nvPr/>
-        </p:nvSpPr>
-        <p:spPr>
-          <a:xfrm>
-            <a:off x="7150608" y="3337560"/>
-            <a:ext cx="4133088" cy="1874520"/>
-          </a:xfrm>
-          <a:prstGeom prst="roundRect">
-            <a:avLst>
-              <a:gd name="adj" fmla="val 8780"/>
-            </a:avLst>
-          </a:prstGeom>
-          <a:solidFill>
-            <a:srgbClr val="0D2947"/>
-          </a:solidFill>
-          <a:ln w="12700">
-            <a:solidFill>
-              <a:srgbClr val="17395A"/>
-            </a:solidFill>
-            <a:prstDash val="solid"/>
-          </a:ln>
-        </p:spPr>
-        <p:txBody>
-          <a:bodyPr/>
-          <a:lstStyle/>
-          <a:p>
-            <a:endParaRPr lang="ru-BY"/>
-          </a:p>
-        </p:txBody>
-      </p:sp>
-      <p:sp>
-        <p:nvSpPr>
-          <p:cNvPr id="38" name="Text 36"/>
-          <p:cNvSpPr/>
-          <p:nvPr/>
-        </p:nvSpPr>
-        <p:spPr>
-          <a:xfrm>
-            <a:off x="7388352" y="3456432"/>
-            <a:ext cx="2651760" cy="356616"/>
-          </a:xfrm>
-          <a:prstGeom prst="rect">
-            <a:avLst/>
-          </a:prstGeom>
-          <a:noFill/>
-          <a:ln/>
-        </p:spPr>
-        <p:txBody>
-          <a:bodyPr wrap="square" lIns="0" tIns="0" rIns="0" bIns="0" rtlCol="0" anchor="ctr"/>
-          <a:lstStyle/>
-          <a:p>
-            <a:pPr marL="0" indent="0">
-              <a:buNone/>
-            </a:pPr>
-            <a:r>
-              <a:rPr lang="en-US" sz="1400" b="1" dirty="0">
-                <a:solidFill>
-                  <a:srgbClr val="F7F7F3"/>
-                </a:solidFill>
-              </a:rPr>
-              <a:t>Поэтому в реальных аудиосервисах</a:t>
-            </a:r>
-            <a:endParaRPr lang="en-US" sz="1400" dirty="0"/>
-          </a:p>
-        </p:txBody>
-      </p:sp>
-      <p:sp>
-        <p:nvSpPr>
-          <p:cNvPr id="39" name="Text 37"/>
-          <p:cNvSpPr/>
-          <p:nvPr/>
-        </p:nvSpPr>
-        <p:spPr>
-          <a:xfrm>
-            <a:off x="7388352" y="4023360"/>
-            <a:ext cx="3657600" cy="877824"/>
-          </a:xfrm>
-          <a:prstGeom prst="rect">
-            <a:avLst/>
-          </a:prstGeom>
-          <a:noFill/>
-          <a:ln/>
-        </p:spPr>
-        <p:txBody>
-          <a:bodyPr wrap="square" lIns="0" tIns="0" rIns="0" bIns="0" rtlCol="0" anchor="ctr"/>
-          <a:lstStyle/>
-          <a:p>
-            <a:pPr marL="0" indent="0">
-              <a:buNone/>
-            </a:pPr>
-            <a:r>
-              <a:rPr lang="en-US" sz="1260" dirty="0">
-                <a:solidFill>
-                  <a:srgbClr val="D9E6F2"/>
-                </a:solidFill>
-              </a:rPr>
-              <a:t>для итоговой оценки loudness применяют перцептивные меры (например, LUFS по ITU-R BS.1770), а Парсеваль остаётся математической основой для спектральной энергии, RMS и предварительной нормировки.</a:t>
-            </a:r>
-            <a:endParaRPr lang="en-US" sz="1260" dirty="0"/>
-          </a:p>
-        </p:txBody>
-      </p:sp>
-    </p:spTree>
   </p:cSld>
   <p:clrMapOvr>
     <a:masterClrMapping/>
@@ -5542,10 +5280,10 @@
           <p:nvPr/>
         </p:nvPicPr>
         <p:blipFill>
-          <a:blip r:embed="rId3">
+          <a:blip>
             <a:extLst>
               <a:ext uri="{96DAC541-7B7A-43D3-8B79-37D633B846F1}">
-                <asvg:svgBlip xmlns:asvg="http://schemas.microsoft.com/office/drawing/2016/SVG/main" r:embed="rId4"/>
+                <asvg:svgBlip xmlns:asvg="http://schemas.microsoft.com/office/drawing/2016/SVG/main" r:embed="rId3"/>
               </a:ext>
             </a:extLst>
           </a:blip>
@@ -7430,10 +7168,10 @@
           <p:nvPr/>
         </p:nvPicPr>
         <p:blipFill>
-          <a:blip r:embed="rId3">
+          <a:blip>
             <a:extLst>
               <a:ext uri="{96DAC541-7B7A-43D3-8B79-37D633B846F1}">
-                <asvg:svgBlip xmlns:asvg="http://schemas.microsoft.com/office/drawing/2016/SVG/main" r:embed="rId4"/>
+                <asvg:svgBlip xmlns:asvg="http://schemas.microsoft.com/office/drawing/2016/SVG/main" r:embed="rId3"/>
               </a:ext>
             </a:extLst>
           </a:blip>
@@ -7768,10 +7506,10 @@
           <p:nvPr/>
         </p:nvPicPr>
         <p:blipFill>
-          <a:blip r:embed="rId5">
+          <a:blip>
             <a:extLst>
               <a:ext uri="{96DAC541-7B7A-43D3-8B79-37D633B846F1}">
-                <asvg:svgBlip xmlns:asvg="http://schemas.microsoft.com/office/drawing/2016/SVG/main" r:embed="rId6"/>
+                <asvg:svgBlip xmlns:asvg="http://schemas.microsoft.com/office/drawing/2016/SVG/main" r:embed="rId4"/>
               </a:ext>
             </a:extLst>
           </a:blip>
@@ -7887,10 +7625,10 @@
           <p:nvPr/>
         </p:nvPicPr>
         <p:blipFill>
-          <a:blip r:embed="rId7">
+          <a:blip>
             <a:extLst>
               <a:ext uri="{96DAC541-7B7A-43D3-8B79-37D633B846F1}">
-                <asvg:svgBlip xmlns:asvg="http://schemas.microsoft.com/office/drawing/2016/SVG/main" r:embed="rId8"/>
+                <asvg:svgBlip xmlns:asvg="http://schemas.microsoft.com/office/drawing/2016/SVG/main" r:embed="rId5"/>
               </a:ext>
             </a:extLst>
           </a:blip>
@@ -7970,10 +7708,10 @@
           <p:nvPr/>
         </p:nvPicPr>
         <p:blipFill>
-          <a:blip r:embed="rId9">
+          <a:blip>
             <a:extLst>
               <a:ext uri="{96DAC541-7B7A-43D3-8B79-37D633B846F1}">
-                <asvg:svgBlip xmlns:asvg="http://schemas.microsoft.com/office/drawing/2016/SVG/main" r:embed="rId10"/>
+                <asvg:svgBlip xmlns:asvg="http://schemas.microsoft.com/office/drawing/2016/SVG/main" r:embed="rId6"/>
               </a:ext>
             </a:extLst>
           </a:blip>
@@ -8916,10 +8654,10 @@
           <p:nvPr/>
         </p:nvPicPr>
         <p:blipFill>
-          <a:blip r:embed="rId3">
+          <a:blip>
             <a:extLst>
               <a:ext uri="{96DAC541-7B7A-43D3-8B79-37D633B846F1}">
-                <asvg:svgBlip xmlns:asvg="http://schemas.microsoft.com/office/drawing/2016/SVG/main" r:embed="rId4"/>
+                <asvg:svgBlip xmlns:asvg="http://schemas.microsoft.com/office/drawing/2016/SVG/main" r:embed="rId3"/>
               </a:ext>
             </a:extLst>
           </a:blip>
@@ -9370,10 +9108,10 @@
           <p:nvPr/>
         </p:nvPicPr>
         <p:blipFill>
-          <a:blip r:embed="rId3">
+          <a:blip>
             <a:extLst>
               <a:ext uri="{96DAC541-7B7A-43D3-8B79-37D633B846F1}">
-                <asvg:svgBlip xmlns:asvg="http://schemas.microsoft.com/office/drawing/2016/SVG/main" r:embed="rId4"/>
+                <asvg:svgBlip xmlns:asvg="http://schemas.microsoft.com/office/drawing/2016/SVG/main" r:embed="rId3"/>
               </a:ext>
             </a:extLst>
           </a:blip>
@@ -9620,10 +9358,10 @@
           <p:nvPr/>
         </p:nvPicPr>
         <p:blipFill>
-          <a:blip r:embed="rId5">
+          <a:blip>
             <a:extLst>
               <a:ext uri="{96DAC541-7B7A-43D3-8B79-37D633B846F1}">
-                <asvg:svgBlip xmlns:asvg="http://schemas.microsoft.com/office/drawing/2016/SVG/main" r:embed="rId6"/>
+                <asvg:svgBlip xmlns:asvg="http://schemas.microsoft.com/office/drawing/2016/SVG/main" r:embed="rId4"/>
               </a:ext>
             </a:extLst>
           </a:blip>
@@ -9870,10 +9608,10 @@
           <p:nvPr/>
         </p:nvPicPr>
         <p:blipFill>
-          <a:blip r:embed="rId7">
+          <a:blip>
             <a:extLst>
               <a:ext uri="{96DAC541-7B7A-43D3-8B79-37D633B846F1}">
-                <asvg:svgBlip xmlns:asvg="http://schemas.microsoft.com/office/drawing/2016/SVG/main" r:embed="rId8"/>
+                <asvg:svgBlip xmlns:asvg="http://schemas.microsoft.com/office/drawing/2016/SVG/main" r:embed="rId5"/>
               </a:ext>
             </a:extLst>
           </a:blip>
@@ -9936,6 +9674,1733 @@
 </file>
 
 <file path=ppt/slides/slide6.xml><?xml version="1.0" encoding="utf-8"?>
+<p:sld xmlns:a="http://schemas.openxmlformats.org/drawingml/2006/main" xmlns:r="http://schemas.openxmlformats.org/officeDocument/2006/relationships" xmlns:p="http://schemas.openxmlformats.org/presentationml/2006/main">
+  <p:cSld name="Slide 7">
+    <p:bg>
+      <p:bgPr>
+        <a:solidFill>
+          <a:srgbClr val="061426"/>
+        </a:solidFill>
+        <a:effectLst/>
+      </p:bgPr>
+    </p:bg>
+    <p:spTree>
+      <p:nvGrpSpPr>
+        <p:cNvPr id="1" name=""/>
+        <p:cNvGrpSpPr/>
+        <p:nvPr/>
+      </p:nvGrpSpPr>
+      <p:grpSpPr>
+        <a:xfrm>
+          <a:off x="0" y="0"/>
+          <a:ext cx="0" cy="0"/>
+          <a:chOff x="0" y="0"/>
+          <a:chExt cx="0" cy="0"/>
+        </a:xfrm>
+      </p:grpSpPr>
+      <p:sp>
+        <p:nvSpPr>
+          <p:cNvPr id="2" name="Shape 0"/>
+          <p:cNvSpPr/>
+          <p:nvPr/>
+        </p:nvSpPr>
+        <p:spPr>
+          <a:xfrm>
+            <a:off x="8732520" y="411480"/>
+            <a:ext cx="2560320" cy="0"/>
+          </a:xfrm>
+          <a:prstGeom prst="line">
+            <a:avLst/>
+          </a:prstGeom>
+          <a:noFill/>
+          <a:ln w="12700">
+            <a:solidFill>
+              <a:srgbClr val="17395A"/>
+            </a:solidFill>
+            <a:prstDash val="solid"/>
+          </a:ln>
+        </p:spPr>
+        <p:txBody>
+          <a:bodyPr/>
+          <a:lstStyle/>
+          <a:p>
+            <a:endParaRPr lang="ru-BY"/>
+          </a:p>
+        </p:txBody>
+      </p:sp>
+      <p:sp>
+        <p:nvSpPr>
+          <p:cNvPr id="3" name="Shape 1"/>
+          <p:cNvSpPr/>
+          <p:nvPr/>
+        </p:nvSpPr>
+        <p:spPr>
+          <a:xfrm>
+            <a:off x="11292840" y="411480"/>
+            <a:ext cx="0" cy="1097280"/>
+          </a:xfrm>
+          <a:prstGeom prst="line">
+            <a:avLst/>
+          </a:prstGeom>
+          <a:noFill/>
+          <a:ln w="12700">
+            <a:solidFill>
+              <a:srgbClr val="17395A"/>
+            </a:solidFill>
+            <a:prstDash val="solid"/>
+          </a:ln>
+        </p:spPr>
+        <p:txBody>
+          <a:bodyPr/>
+          <a:lstStyle/>
+          <a:p>
+            <a:endParaRPr lang="ru-BY"/>
+          </a:p>
+        </p:txBody>
+      </p:sp>
+      <p:sp>
+        <p:nvSpPr>
+          <p:cNvPr id="4" name="Text 2"/>
+          <p:cNvSpPr/>
+          <p:nvPr/>
+        </p:nvSpPr>
+        <p:spPr>
+          <a:xfrm>
+            <a:off x="594360" y="219456"/>
+            <a:ext cx="2651760" cy="164586"/>
+          </a:xfrm>
+          <a:prstGeom prst="rect">
+            <a:avLst/>
+          </a:prstGeom>
+          <a:noFill/>
+          <a:ln/>
+        </p:spPr>
+        <p:txBody>
+          <a:bodyPr wrap="square" lIns="0" tIns="0" rIns="0" bIns="0" rtlCol="0" anchor="ctr"/>
+          <a:lstStyle/>
+          <a:p>
+            <a:pPr marL="0" indent="0">
+              <a:buNone/>
+            </a:pPr>
+            <a:r>
+              <a:rPr lang="en-US" sz="950" b="1" dirty="0">
+                <a:solidFill>
+                  <a:srgbClr val="2DD4FF"/>
+                </a:solidFill>
+                <a:latin typeface="Aptos" pitchFamily="34" charset="0"/>
+                <a:ea typeface="Aptos" pitchFamily="34" charset="-122"/>
+                <a:cs typeface="Aptos" pitchFamily="34" charset="-120"/>
+              </a:rPr>
+              <a:t>ГЕОМЕТРИЧЕСКАЯ ИНТЕРПРЕТАЦИЯ</a:t>
+            </a:r>
+            <a:endParaRPr lang="en-US" sz="950" dirty="0"/>
+          </a:p>
+        </p:txBody>
+      </p:sp>
+      <p:sp>
+        <p:nvSpPr>
+          <p:cNvPr id="5" name="Shape 3"/>
+          <p:cNvSpPr/>
+          <p:nvPr/>
+        </p:nvSpPr>
+        <p:spPr>
+          <a:xfrm>
+            <a:off x="576072" y="429768"/>
+            <a:ext cx="73152" cy="0"/>
+          </a:xfrm>
+          <a:prstGeom prst="line">
+            <a:avLst/>
+          </a:prstGeom>
+          <a:noFill/>
+          <a:ln w="25400">
+            <a:solidFill>
+              <a:srgbClr val="2DD4FF"/>
+            </a:solidFill>
+            <a:prstDash val="solid"/>
+          </a:ln>
+        </p:spPr>
+        <p:txBody>
+          <a:bodyPr/>
+          <a:lstStyle/>
+          <a:p>
+            <a:endParaRPr lang="ru-BY"/>
+          </a:p>
+        </p:txBody>
+      </p:sp>
+      <p:sp>
+        <p:nvSpPr>
+          <p:cNvPr id="6" name="Text 4"/>
+          <p:cNvSpPr/>
+          <p:nvPr/>
+        </p:nvSpPr>
+        <p:spPr>
+          <a:xfrm>
+            <a:off x="594360" y="475488"/>
+            <a:ext cx="7589520" cy="457200"/>
+          </a:xfrm>
+          <a:prstGeom prst="rect">
+            <a:avLst/>
+          </a:prstGeom>
+          <a:noFill/>
+          <a:ln/>
+        </p:spPr>
+        <p:txBody>
+          <a:bodyPr wrap="square" lIns="0" tIns="0" rIns="0" bIns="0" rtlCol="0" anchor="ctr"/>
+          <a:lstStyle/>
+          <a:p>
+            <a:pPr marL="0" indent="0">
+              <a:buNone/>
+            </a:pPr>
+            <a:r>
+              <a:rPr lang="en-US" sz="2300" b="1" dirty="0">
+                <a:solidFill>
+                  <a:srgbClr val="F7F7F3"/>
+                </a:solidFill>
+                <a:latin typeface="Aptos Display" pitchFamily="34" charset="0"/>
+                <a:ea typeface="Aptos Display" pitchFamily="34" charset="-122"/>
+                <a:cs typeface="Aptos Display" pitchFamily="34" charset="-120"/>
+              </a:rPr>
+              <a:t>Преобразование Фурье как смена базиса</a:t>
+            </a:r>
+            <a:endParaRPr lang="en-US" sz="2300" dirty="0"/>
+          </a:p>
+        </p:txBody>
+      </p:sp>
+      <p:sp>
+        <p:nvSpPr>
+          <p:cNvPr id="7" name="Text 5"/>
+          <p:cNvSpPr/>
+          <p:nvPr/>
+        </p:nvSpPr>
+        <p:spPr>
+          <a:xfrm>
+            <a:off x="11521440" y="6473952"/>
+            <a:ext cx="182880" cy="164592"/>
+          </a:xfrm>
+          <a:prstGeom prst="rect">
+            <a:avLst/>
+          </a:prstGeom>
+          <a:noFill/>
+          <a:ln/>
+        </p:spPr>
+        <p:txBody>
+          <a:bodyPr wrap="square" lIns="0" tIns="0" rIns="0" bIns="0" rtlCol="0" anchor="ctr"/>
+          <a:lstStyle/>
+          <a:p>
+            <a:pPr marL="0" indent="0" algn="r">
+              <a:buNone/>
+            </a:pPr>
+            <a:r>
+              <a:rPr lang="en-US" sz="850" dirty="0">
+                <a:solidFill>
+                  <a:srgbClr val="9FB4C9"/>
+                </a:solidFill>
+                <a:latin typeface="Aptos" pitchFamily="34" charset="0"/>
+                <a:ea typeface="Aptos" pitchFamily="34" charset="-122"/>
+                <a:cs typeface="Aptos" pitchFamily="34" charset="-120"/>
+              </a:rPr>
+              <a:t>7</a:t>
+            </a:r>
+            <a:endParaRPr lang="en-US" sz="850" dirty="0"/>
+          </a:p>
+        </p:txBody>
+      </p:sp>
+      <p:sp>
+        <p:nvSpPr>
+          <p:cNvPr id="8" name="Shape 6"/>
+          <p:cNvSpPr/>
+          <p:nvPr/>
+        </p:nvSpPr>
+        <p:spPr>
+          <a:xfrm>
+            <a:off x="658368" y="1325880"/>
+            <a:ext cx="10972800" cy="4526280"/>
+          </a:xfrm>
+          <a:prstGeom prst="roundRect">
+            <a:avLst>
+              <a:gd name="adj" fmla="val 3636"/>
+            </a:avLst>
+          </a:prstGeom>
+          <a:solidFill>
+            <a:srgbClr val="0A1F38"/>
+          </a:solidFill>
+          <a:ln w="12700">
+            <a:solidFill>
+              <a:srgbClr val="17395A"/>
+            </a:solidFill>
+            <a:prstDash val="solid"/>
+          </a:ln>
+        </p:spPr>
+        <p:txBody>
+          <a:bodyPr/>
+          <a:lstStyle/>
+          <a:p>
+            <a:endParaRPr lang="ru-BY"/>
+          </a:p>
+        </p:txBody>
+      </p:sp>
+      <p:sp>
+        <p:nvSpPr>
+          <p:cNvPr id="9" name="Shape 7"/>
+          <p:cNvSpPr/>
+          <p:nvPr/>
+        </p:nvSpPr>
+        <p:spPr>
+          <a:xfrm>
+            <a:off x="960120" y="1874520"/>
+            <a:ext cx="2286000" cy="1371600"/>
+          </a:xfrm>
+          <a:prstGeom prst="roundRect">
+            <a:avLst>
+              <a:gd name="adj" fmla="val 12000"/>
+            </a:avLst>
+          </a:prstGeom>
+          <a:solidFill>
+            <a:srgbClr val="0D2947"/>
+          </a:solidFill>
+          <a:ln w="12700">
+            <a:solidFill>
+              <a:srgbClr val="17395A"/>
+            </a:solidFill>
+            <a:prstDash val="solid"/>
+          </a:ln>
+        </p:spPr>
+        <p:txBody>
+          <a:bodyPr/>
+          <a:lstStyle/>
+          <a:p>
+            <a:endParaRPr lang="ru-BY"/>
+          </a:p>
+        </p:txBody>
+      </p:sp>
+      <p:sp>
+        <p:nvSpPr>
+          <p:cNvPr id="10" name="Text 8"/>
+          <p:cNvSpPr/>
+          <p:nvPr/>
+        </p:nvSpPr>
+        <p:spPr>
+          <a:xfrm>
+            <a:off x="1143000" y="2162556"/>
+            <a:ext cx="1874520" cy="457200"/>
+          </a:xfrm>
+          <a:prstGeom prst="rect">
+            <a:avLst/>
+          </a:prstGeom>
+          <a:noFill/>
+          <a:ln/>
+        </p:spPr>
+        <p:txBody>
+          <a:bodyPr wrap="square" lIns="0" tIns="0" rIns="0" bIns="0" rtlCol="0" anchor="ctr"/>
+          <a:lstStyle/>
+          <a:p>
+            <a:pPr marL="0" indent="0" algn="ctr">
+              <a:buNone/>
+            </a:pPr>
+            <a:r>
+              <a:rPr lang="en-US" sz="2400" b="1" dirty="0">
+                <a:solidFill>
+                  <a:srgbClr val="F7F7F3"/>
+                </a:solidFill>
+              </a:rPr>
+              <a:t>временной</a:t>
+            </a:r>
+            <a:endParaRPr lang="en-US" sz="2400" dirty="0"/>
+          </a:p>
+          <a:p>
+            <a:pPr marL="0" indent="0" algn="ctr">
+              <a:buNone/>
+            </a:pPr>
+            <a:r>
+              <a:rPr lang="en-US" sz="2400" b="1" dirty="0">
+                <a:solidFill>
+                  <a:srgbClr val="F7F7F3"/>
+                </a:solidFill>
+              </a:rPr>
+              <a:t>базис</a:t>
+            </a:r>
+            <a:endParaRPr lang="en-US" sz="2400" dirty="0"/>
+          </a:p>
+        </p:txBody>
+      </p:sp>
+      <p:sp>
+        <p:nvSpPr>
+          <p:cNvPr id="11" name="Text 9"/>
+          <p:cNvSpPr/>
+          <p:nvPr/>
+        </p:nvSpPr>
+        <p:spPr>
+          <a:xfrm>
+            <a:off x="1234440" y="2907792"/>
+            <a:ext cx="1737360" cy="182880"/>
+          </a:xfrm>
+          <a:prstGeom prst="rect">
+            <a:avLst/>
+          </a:prstGeom>
+          <a:noFill/>
+          <a:ln/>
+        </p:spPr>
+        <p:txBody>
+          <a:bodyPr wrap="square" lIns="0" tIns="0" rIns="0" bIns="0" rtlCol="0" anchor="ctr"/>
+          <a:lstStyle/>
+          <a:p>
+            <a:pPr marL="0" indent="0" algn="ctr">
+              <a:buNone/>
+            </a:pPr>
+            <a:r>
+              <a:rPr lang="en-US" sz="1250" dirty="0">
+                <a:solidFill>
+                  <a:srgbClr val="9FB4C9"/>
+                </a:solidFill>
+              </a:rPr>
+              <a:t>x — координаты сигнала</a:t>
+            </a:r>
+            <a:endParaRPr lang="en-US" sz="1250" dirty="0"/>
+          </a:p>
+        </p:txBody>
+      </p:sp>
+      <p:sp>
+        <p:nvSpPr>
+          <p:cNvPr id="12" name="Shape 10"/>
+          <p:cNvSpPr/>
+          <p:nvPr/>
+        </p:nvSpPr>
+        <p:spPr>
+          <a:xfrm>
+            <a:off x="3611880" y="2286000"/>
+            <a:ext cx="548640" cy="457200"/>
+          </a:xfrm>
+          <a:prstGeom prst="chevron">
+            <a:avLst/>
+          </a:prstGeom>
+          <a:solidFill>
+            <a:srgbClr val="2DD4FF"/>
+          </a:solidFill>
+          <a:ln w="12700">
+            <a:solidFill>
+              <a:srgbClr val="2DD4FF"/>
+            </a:solidFill>
+            <a:prstDash val="solid"/>
+          </a:ln>
+        </p:spPr>
+        <p:txBody>
+          <a:bodyPr/>
+          <a:lstStyle/>
+          <a:p>
+            <a:endParaRPr lang="ru-BY"/>
+          </a:p>
+        </p:txBody>
+      </p:sp>
+      <p:sp>
+        <p:nvSpPr>
+          <p:cNvPr id="17" name="Shape 14"/>
+          <p:cNvSpPr/>
+          <p:nvPr/>
+        </p:nvSpPr>
+        <p:spPr>
+          <a:xfrm>
+            <a:off x="7635240" y="2286000"/>
+            <a:ext cx="548640" cy="457200"/>
+          </a:xfrm>
+          <a:prstGeom prst="chevron">
+            <a:avLst/>
+          </a:prstGeom>
+          <a:solidFill>
+            <a:srgbClr val="FFB14A"/>
+          </a:solidFill>
+          <a:ln w="12700">
+            <a:solidFill>
+              <a:srgbClr val="FFB14A"/>
+            </a:solidFill>
+            <a:prstDash val="solid"/>
+          </a:ln>
+        </p:spPr>
+        <p:txBody>
+          <a:bodyPr/>
+          <a:lstStyle/>
+          <a:p>
+            <a:endParaRPr lang="ru-BY"/>
+          </a:p>
+        </p:txBody>
+      </p:sp>
+      <p:sp>
+        <p:nvSpPr>
+          <p:cNvPr id="18" name="Shape 15"/>
+          <p:cNvSpPr/>
+          <p:nvPr/>
+        </p:nvSpPr>
+        <p:spPr>
+          <a:xfrm>
+            <a:off x="8503920" y="1874520"/>
+            <a:ext cx="2286000" cy="1371600"/>
+          </a:xfrm>
+          <a:prstGeom prst="roundRect">
+            <a:avLst>
+              <a:gd name="adj" fmla="val 12000"/>
+            </a:avLst>
+          </a:prstGeom>
+          <a:solidFill>
+            <a:srgbClr val="0D2947"/>
+          </a:solidFill>
+          <a:ln w="12700">
+            <a:solidFill>
+              <a:srgbClr val="17395A"/>
+            </a:solidFill>
+            <a:prstDash val="solid"/>
+          </a:ln>
+        </p:spPr>
+        <p:txBody>
+          <a:bodyPr/>
+          <a:lstStyle/>
+          <a:p>
+            <a:endParaRPr lang="ru-BY"/>
+          </a:p>
+        </p:txBody>
+      </p:sp>
+      <p:sp>
+        <p:nvSpPr>
+          <p:cNvPr id="19" name="Text 16"/>
+          <p:cNvSpPr/>
+          <p:nvPr/>
+        </p:nvSpPr>
+        <p:spPr>
+          <a:xfrm>
+            <a:off x="8503920" y="2039514"/>
+            <a:ext cx="2362200" cy="667512"/>
+          </a:xfrm>
+          <a:prstGeom prst="rect">
+            <a:avLst/>
+          </a:prstGeom>
+          <a:noFill/>
+          <a:ln/>
+        </p:spPr>
+        <p:txBody>
+          <a:bodyPr wrap="square" lIns="0" tIns="0" rIns="0" bIns="0" rtlCol="0" anchor="ctr"/>
+          <a:lstStyle/>
+          <a:p>
+            <a:pPr marL="0" indent="0" algn="ctr">
+              <a:buNone/>
+            </a:pPr>
+            <a:r>
+              <a:rPr lang="en-US" sz="2400" b="1" dirty="0">
+                <a:solidFill>
+                  <a:srgbClr val="F7F7F3"/>
+                </a:solidFill>
+              </a:rPr>
+              <a:t>гармонический</a:t>
+            </a:r>
+            <a:endParaRPr lang="en-US" sz="2400" dirty="0"/>
+          </a:p>
+          <a:p>
+            <a:pPr marL="0" indent="0" algn="ctr">
+              <a:buNone/>
+            </a:pPr>
+            <a:r>
+              <a:rPr lang="en-US" sz="2400" b="1" dirty="0">
+                <a:solidFill>
+                  <a:srgbClr val="F7F7F3"/>
+                </a:solidFill>
+              </a:rPr>
+              <a:t>базис</a:t>
+            </a:r>
+            <a:endParaRPr lang="en-US" sz="2400" dirty="0"/>
+          </a:p>
+        </p:txBody>
+      </p:sp>
+      <p:sp>
+        <p:nvSpPr>
+          <p:cNvPr id="20" name="Text 17"/>
+          <p:cNvSpPr/>
+          <p:nvPr/>
+        </p:nvSpPr>
+        <p:spPr>
+          <a:xfrm>
+            <a:off x="8705088" y="2907792"/>
+            <a:ext cx="1883664" cy="182880"/>
+          </a:xfrm>
+          <a:prstGeom prst="rect">
+            <a:avLst/>
+          </a:prstGeom>
+          <a:noFill/>
+          <a:ln/>
+        </p:spPr>
+        <p:txBody>
+          <a:bodyPr wrap="square" lIns="0" tIns="0" rIns="0" bIns="0" rtlCol="0" anchor="ctr"/>
+          <a:lstStyle/>
+          <a:p>
+            <a:pPr marL="0" indent="0" algn="ctr">
+              <a:buNone/>
+            </a:pPr>
+            <a:r>
+              <a:rPr lang="en-US" sz="1250" dirty="0">
+                <a:solidFill>
+                  <a:srgbClr val="9FB4C9"/>
+                </a:solidFill>
+              </a:rPr>
+              <a:t>X — спектральные координаты</a:t>
+            </a:r>
+            <a:endParaRPr lang="en-US" sz="1250" dirty="0"/>
+          </a:p>
+        </p:txBody>
+      </p:sp>
+      <p:sp>
+        <p:nvSpPr>
+          <p:cNvPr id="21" name="Shape 18"/>
+          <p:cNvSpPr/>
+          <p:nvPr/>
+        </p:nvSpPr>
+        <p:spPr>
+          <a:xfrm>
+            <a:off x="3794760" y="4041648"/>
+            <a:ext cx="4937760" cy="841248"/>
+          </a:xfrm>
+          <a:prstGeom prst="roundRect">
+            <a:avLst>
+              <a:gd name="adj" fmla="val 13043"/>
+            </a:avLst>
+          </a:prstGeom>
+          <a:solidFill>
+            <a:srgbClr val="EDEBE6"/>
+          </a:solidFill>
+          <a:ln w="12700">
+            <a:solidFill>
+              <a:srgbClr val="EDEBE6"/>
+            </a:solidFill>
+            <a:prstDash val="solid"/>
+          </a:ln>
+          <a:effectLst>
+            <a:outerShdw blurRad="12700" dist="6350" dir="2700000" algn="bl" rotWithShape="0">
+              <a:srgbClr val="000000">
+                <a:alpha val="18000"/>
+              </a:srgbClr>
+            </a:outerShdw>
+          </a:effectLst>
+        </p:spPr>
+        <p:txBody>
+          <a:bodyPr/>
+          <a:lstStyle/>
+          <a:p>
+            <a:endParaRPr lang="ru-BY"/>
+          </a:p>
+        </p:txBody>
+      </p:sp>
+      <p:pic>
+        <p:nvPicPr>
+          <p:cNvPr id="22" name="Image 1" descr="preencoded.png"/>
+          <p:cNvPicPr>
+            <a:picLocks noChangeAspect="1"/>
+          </p:cNvPicPr>
+          <p:nvPr/>
+        </p:nvPicPr>
+        <p:blipFill>
+          <a:blip>
+            <a:extLst>
+              <a:ext uri="{96DAC541-7B7A-43D3-8B79-37D633B846F1}">
+                <asvg:svgBlip xmlns:asvg="http://schemas.microsoft.com/office/drawing/2016/SVG/main" r:embed="rId3"/>
+              </a:ext>
+            </a:extLst>
+          </a:blip>
+          <a:stretch>
+            <a:fillRect/>
+          </a:stretch>
+        </p:blipFill>
+        <p:spPr>
+          <a:xfrm>
+            <a:off x="3931920" y="4206240"/>
+            <a:ext cx="4663440" cy="585216"/>
+          </a:xfrm>
+          <a:prstGeom prst="rect">
+            <a:avLst/>
+          </a:prstGeom>
+        </p:spPr>
+      </p:pic>
+      <p:sp>
+        <p:nvSpPr>
+          <p:cNvPr id="23" name="Text 19"/>
+          <p:cNvSpPr/>
+          <p:nvPr/>
+        </p:nvSpPr>
+        <p:spPr>
+          <a:xfrm>
+            <a:off x="1965960" y="5047488"/>
+            <a:ext cx="8686800" cy="384048"/>
+          </a:xfrm>
+          <a:prstGeom prst="rect">
+            <a:avLst/>
+          </a:prstGeom>
+          <a:noFill/>
+          <a:ln/>
+        </p:spPr>
+        <p:txBody>
+          <a:bodyPr wrap="square" lIns="0" tIns="0" rIns="0" bIns="0" rtlCol="0" anchor="ctr"/>
+          <a:lstStyle/>
+          <a:p>
+            <a:pPr marL="0" indent="0" algn="ctr">
+              <a:buNone/>
+            </a:pPr>
+            <a:r>
+              <a:rPr lang="en-US" sz="1400" dirty="0">
+                <a:solidFill>
+                  <a:srgbClr val="D9E6F2"/>
+                </a:solidFill>
+              </a:rPr>
+              <a:t>То есть ДПФ меняет систему координат, но не длину вектора. Это тот же смысл, что и у ортогонального поворота в обычной геометрии.</a:t>
+            </a:r>
+            <a:endParaRPr lang="en-US" sz="1400" dirty="0"/>
+          </a:p>
+        </p:txBody>
+      </p:sp>
+      <p:sp>
+        <p:nvSpPr>
+          <p:cNvPr id="33" name="Shape 33">
+            <a:extLst>
+              <a:ext uri="{FF2B5EF4-FFF2-40B4-BE49-F238E27FC236}">
+                <a16:creationId xmlns:a16="http://schemas.microsoft.com/office/drawing/2014/main" id="{5F9971A3-5174-B447-069C-888DB0532536}"/>
+              </a:ext>
+            </a:extLst>
+          </p:cNvPr>
+          <p:cNvSpPr/>
+          <p:nvPr/>
+        </p:nvSpPr>
+        <p:spPr>
+          <a:xfrm>
+            <a:off x="4343400" y="1700784"/>
+            <a:ext cx="2971800" cy="1719072"/>
+          </a:xfrm>
+          <a:prstGeom prst="roundRect">
+            <a:avLst>
+              <a:gd name="adj" fmla="val 6383"/>
+            </a:avLst>
+          </a:prstGeom>
+          <a:solidFill>
+            <a:srgbClr val="F3F7FD"/>
+          </a:solidFill>
+          <a:ln w="12700">
+            <a:solidFill>
+              <a:srgbClr val="D9E7F6"/>
+            </a:solidFill>
+            <a:prstDash val="solid"/>
+          </a:ln>
+          <a:effectLst>
+            <a:outerShdw blurRad="19050" dist="12700" dir="2700000" algn="bl" rotWithShape="0">
+              <a:srgbClr val="000000">
+                <a:alpha val="18000"/>
+              </a:srgbClr>
+            </a:outerShdw>
+          </a:effectLst>
+        </p:spPr>
+        <p:txBody>
+          <a:bodyPr/>
+          <a:lstStyle/>
+          <a:p>
+            <a:endParaRPr lang="ru-BY"/>
+          </a:p>
+        </p:txBody>
+      </p:sp>
+      <p:pic>
+        <p:nvPicPr>
+          <p:cNvPr id="34" name="Image 1" descr="preencoded.png">
+            <a:extLst>
+              <a:ext uri="{FF2B5EF4-FFF2-40B4-BE49-F238E27FC236}">
+                <a16:creationId xmlns:a16="http://schemas.microsoft.com/office/drawing/2014/main" id="{08F9971F-A448-0B3A-98F8-9F4F311B061C}"/>
+              </a:ext>
+            </a:extLst>
+          </p:cNvPr>
+          <p:cNvPicPr>
+            <a:picLocks noChangeAspect="1"/>
+          </p:cNvPicPr>
+          <p:nvPr/>
+        </p:nvPicPr>
+        <p:blipFill>
+          <a:blip>
+            <a:extLst>
+              <a:ext uri="{96DAC541-7B7A-43D3-8B79-37D633B846F1}">
+                <asvg:svgBlip xmlns:asvg="http://schemas.microsoft.com/office/drawing/2016/SVG/main" r:embed="rId4"/>
+              </a:ext>
+            </a:extLst>
+          </a:blip>
+          <a:stretch>
+            <a:fillRect/>
+          </a:stretch>
+        </p:blipFill>
+        <p:spPr>
+          <a:xfrm>
+            <a:off x="5449824" y="1970532"/>
+            <a:ext cx="877824" cy="365760"/>
+          </a:xfrm>
+          <a:prstGeom prst="rect">
+            <a:avLst/>
+          </a:prstGeom>
+        </p:spPr>
+      </p:pic>
+      <p:pic>
+        <p:nvPicPr>
+          <p:cNvPr id="35" name="Image 2" descr="preencoded.png">
+            <a:extLst>
+              <a:ext uri="{FF2B5EF4-FFF2-40B4-BE49-F238E27FC236}">
+                <a16:creationId xmlns:a16="http://schemas.microsoft.com/office/drawing/2014/main" id="{4D9EAFD5-1C8F-918B-F543-C8F2A50D385B}"/>
+              </a:ext>
+            </a:extLst>
+          </p:cNvPr>
+          <p:cNvPicPr>
+            <a:picLocks noChangeAspect="1"/>
+          </p:cNvPicPr>
+          <p:nvPr/>
+        </p:nvPicPr>
+        <p:blipFill>
+          <a:blip>
+            <a:extLst>
+              <a:ext uri="{96DAC541-7B7A-43D3-8B79-37D633B846F1}">
+                <asvg:svgBlip xmlns:asvg="http://schemas.microsoft.com/office/drawing/2016/SVG/main" r:embed="rId5"/>
+              </a:ext>
+            </a:extLst>
+          </a:blip>
+          <a:stretch>
+            <a:fillRect/>
+          </a:stretch>
+        </p:blipFill>
+        <p:spPr>
+          <a:xfrm>
+            <a:off x="5174361" y="2464308"/>
+            <a:ext cx="1437894" cy="310896"/>
+          </a:xfrm>
+          <a:prstGeom prst="rect">
+            <a:avLst/>
+          </a:prstGeom>
+        </p:spPr>
+      </p:pic>
+      <p:sp>
+        <p:nvSpPr>
+          <p:cNvPr id="36" name="Text 34">
+            <a:extLst>
+              <a:ext uri="{FF2B5EF4-FFF2-40B4-BE49-F238E27FC236}">
+                <a16:creationId xmlns:a16="http://schemas.microsoft.com/office/drawing/2014/main" id="{FA94AA41-58CA-410F-2855-D7574ABE67FF}"/>
+              </a:ext>
+            </a:extLst>
+          </p:cNvPr>
+          <p:cNvSpPr/>
+          <p:nvPr/>
+        </p:nvSpPr>
+        <p:spPr>
+          <a:xfrm>
+            <a:off x="4754880" y="2875788"/>
+            <a:ext cx="2286000" cy="201168"/>
+          </a:xfrm>
+          <a:prstGeom prst="rect">
+            <a:avLst/>
+          </a:prstGeom>
+          <a:noFill/>
+          <a:ln/>
+        </p:spPr>
+        <p:txBody>
+          <a:bodyPr wrap="square" lIns="0" tIns="0" rIns="0" bIns="0" rtlCol="0" anchor="ctr"/>
+          <a:lstStyle/>
+          <a:p>
+            <a:pPr marL="0" indent="0" algn="ctr">
+              <a:buNone/>
+            </a:pPr>
+            <a:r>
+              <a:rPr lang="en-US" sz="1250" b="1" dirty="0">
+                <a:solidFill>
+                  <a:srgbClr val="102038"/>
+                </a:solidFill>
+                <a:latin typeface="Inter" pitchFamily="34" charset="0"/>
+                <a:ea typeface="Inter" pitchFamily="34" charset="-122"/>
+                <a:cs typeface="Inter" pitchFamily="34" charset="-120"/>
+              </a:rPr>
+              <a:t>Унитарное преобразование</a:t>
+            </a:r>
+            <a:endParaRPr lang="en-US" sz="1250" dirty="0"/>
+          </a:p>
+        </p:txBody>
+      </p:sp>
+    </p:spTree>
+  </p:cSld>
+  <p:clrMapOvr>
+    <a:masterClrMapping/>
+  </p:clrMapOvr>
+</p:sld>
+</file>
+
+<file path=ppt/slides/slide7.xml><?xml version="1.0" encoding="utf-8"?>
+<p:sld xmlns:a="http://schemas.openxmlformats.org/drawingml/2006/main" xmlns:r="http://schemas.openxmlformats.org/officeDocument/2006/relationships" xmlns:p="http://schemas.openxmlformats.org/presentationml/2006/main">
+  <p:cSld name="Slide 8">
+    <p:bg>
+      <p:bgPr>
+        <a:solidFill>
+          <a:srgbClr val="061426"/>
+        </a:solidFill>
+        <a:effectLst/>
+      </p:bgPr>
+    </p:bg>
+    <p:spTree>
+      <p:nvGrpSpPr>
+        <p:cNvPr id="1" name=""/>
+        <p:cNvGrpSpPr/>
+        <p:nvPr/>
+      </p:nvGrpSpPr>
+      <p:grpSpPr>
+        <a:xfrm>
+          <a:off x="0" y="0"/>
+          <a:ext cx="0" cy="0"/>
+          <a:chOff x="0" y="0"/>
+          <a:chExt cx="0" cy="0"/>
+        </a:xfrm>
+      </p:grpSpPr>
+      <p:sp>
+        <p:nvSpPr>
+          <p:cNvPr id="2" name="Shape 0"/>
+          <p:cNvSpPr/>
+          <p:nvPr/>
+        </p:nvSpPr>
+        <p:spPr>
+          <a:xfrm>
+            <a:off x="8732520" y="411480"/>
+            <a:ext cx="2560320" cy="0"/>
+          </a:xfrm>
+          <a:prstGeom prst="line">
+            <a:avLst/>
+          </a:prstGeom>
+          <a:noFill/>
+          <a:ln w="12700">
+            <a:solidFill>
+              <a:srgbClr val="17395A"/>
+            </a:solidFill>
+            <a:prstDash val="solid"/>
+          </a:ln>
+        </p:spPr>
+        <p:txBody>
+          <a:bodyPr/>
+          <a:lstStyle/>
+          <a:p>
+            <a:endParaRPr lang="ru-BY"/>
+          </a:p>
+        </p:txBody>
+      </p:sp>
+      <p:sp>
+        <p:nvSpPr>
+          <p:cNvPr id="3" name="Shape 1"/>
+          <p:cNvSpPr/>
+          <p:nvPr/>
+        </p:nvSpPr>
+        <p:spPr>
+          <a:xfrm>
+            <a:off x="11292840" y="411480"/>
+            <a:ext cx="0" cy="1097280"/>
+          </a:xfrm>
+          <a:prstGeom prst="line">
+            <a:avLst/>
+          </a:prstGeom>
+          <a:noFill/>
+          <a:ln w="12700">
+            <a:solidFill>
+              <a:srgbClr val="17395A"/>
+            </a:solidFill>
+            <a:prstDash val="solid"/>
+          </a:ln>
+        </p:spPr>
+        <p:txBody>
+          <a:bodyPr/>
+          <a:lstStyle/>
+          <a:p>
+            <a:endParaRPr lang="ru-BY"/>
+          </a:p>
+        </p:txBody>
+      </p:sp>
+      <p:sp>
+        <p:nvSpPr>
+          <p:cNvPr id="4" name="Text 2"/>
+          <p:cNvSpPr/>
+          <p:nvPr/>
+        </p:nvSpPr>
+        <p:spPr>
+          <a:xfrm>
+            <a:off x="594360" y="219456"/>
+            <a:ext cx="1645920" cy="201168"/>
+          </a:xfrm>
+          <a:prstGeom prst="rect">
+            <a:avLst/>
+          </a:prstGeom>
+          <a:noFill/>
+          <a:ln/>
+        </p:spPr>
+        <p:txBody>
+          <a:bodyPr wrap="square" lIns="0" tIns="0" rIns="0" bIns="0" rtlCol="0" anchor="ctr"/>
+          <a:lstStyle/>
+          <a:p>
+            <a:pPr marL="0" indent="0">
+              <a:buNone/>
+            </a:pPr>
+            <a:r>
+              <a:rPr lang="en-US" sz="950" b="1" dirty="0">
+                <a:solidFill>
+                  <a:srgbClr val="2DD4FF"/>
+                </a:solidFill>
+                <a:latin typeface="Aptos" pitchFamily="34" charset="0"/>
+                <a:ea typeface="Aptos" pitchFamily="34" charset="-122"/>
+                <a:cs typeface="Aptos" pitchFamily="34" charset="-120"/>
+              </a:rPr>
+              <a:t>ПРИМЕР</a:t>
+            </a:r>
+            <a:endParaRPr lang="en-US" sz="950" dirty="0"/>
+          </a:p>
+        </p:txBody>
+      </p:sp>
+      <p:sp>
+        <p:nvSpPr>
+          <p:cNvPr id="5" name="Shape 3"/>
+          <p:cNvSpPr/>
+          <p:nvPr/>
+        </p:nvSpPr>
+        <p:spPr>
+          <a:xfrm>
+            <a:off x="576072" y="429768"/>
+            <a:ext cx="73152" cy="0"/>
+          </a:xfrm>
+          <a:prstGeom prst="line">
+            <a:avLst/>
+          </a:prstGeom>
+          <a:noFill/>
+          <a:ln w="25400">
+            <a:solidFill>
+              <a:srgbClr val="2DD4FF"/>
+            </a:solidFill>
+            <a:prstDash val="solid"/>
+          </a:ln>
+        </p:spPr>
+        <p:txBody>
+          <a:bodyPr/>
+          <a:lstStyle/>
+          <a:p>
+            <a:endParaRPr lang="ru-BY"/>
+          </a:p>
+        </p:txBody>
+      </p:sp>
+      <p:sp>
+        <p:nvSpPr>
+          <p:cNvPr id="6" name="Text 4"/>
+          <p:cNvSpPr/>
+          <p:nvPr/>
+        </p:nvSpPr>
+        <p:spPr>
+          <a:xfrm>
+            <a:off x="594360" y="475488"/>
+            <a:ext cx="7589520" cy="457200"/>
+          </a:xfrm>
+          <a:prstGeom prst="rect">
+            <a:avLst/>
+          </a:prstGeom>
+          <a:noFill/>
+          <a:ln/>
+        </p:spPr>
+        <p:txBody>
+          <a:bodyPr wrap="square" lIns="0" tIns="0" rIns="0" bIns="0" rtlCol="0" anchor="ctr"/>
+          <a:lstStyle/>
+          <a:p>
+            <a:pPr marL="0" indent="0">
+              <a:buNone/>
+            </a:pPr>
+            <a:r>
+              <a:rPr lang="en-US" sz="2300" b="1" dirty="0">
+                <a:solidFill>
+                  <a:srgbClr val="F7F7F3"/>
+                </a:solidFill>
+                <a:latin typeface="Aptos Display" pitchFamily="34" charset="0"/>
+                <a:ea typeface="Aptos Display" pitchFamily="34" charset="-122"/>
+                <a:cs typeface="Aptos Display" pitchFamily="34" charset="-120"/>
+              </a:rPr>
+              <a:t>Проверка на простом сигнале x[n] = [1, −1, 1, −1]</a:t>
+            </a:r>
+            <a:endParaRPr lang="en-US" sz="2300" dirty="0"/>
+          </a:p>
+        </p:txBody>
+      </p:sp>
+      <p:sp>
+        <p:nvSpPr>
+          <p:cNvPr id="7" name="Text 5"/>
+          <p:cNvSpPr/>
+          <p:nvPr/>
+        </p:nvSpPr>
+        <p:spPr>
+          <a:xfrm>
+            <a:off x="11521440" y="6473952"/>
+            <a:ext cx="182880" cy="164592"/>
+          </a:xfrm>
+          <a:prstGeom prst="rect">
+            <a:avLst/>
+          </a:prstGeom>
+          <a:noFill/>
+          <a:ln/>
+        </p:spPr>
+        <p:txBody>
+          <a:bodyPr wrap="square" lIns="0" tIns="0" rIns="0" bIns="0" rtlCol="0" anchor="ctr"/>
+          <a:lstStyle/>
+          <a:p>
+            <a:pPr marL="0" indent="0" algn="r">
+              <a:buNone/>
+            </a:pPr>
+            <a:r>
+              <a:rPr lang="en-US" sz="850" dirty="0">
+                <a:solidFill>
+                  <a:srgbClr val="9FB4C9"/>
+                </a:solidFill>
+                <a:latin typeface="Aptos" pitchFamily="34" charset="0"/>
+                <a:ea typeface="Aptos" pitchFamily="34" charset="-122"/>
+                <a:cs typeface="Aptos" pitchFamily="34" charset="-120"/>
+              </a:rPr>
+              <a:t>8</a:t>
+            </a:r>
+            <a:endParaRPr lang="en-US" sz="850" dirty="0"/>
+          </a:p>
+        </p:txBody>
+      </p:sp>
+      <p:sp>
+        <p:nvSpPr>
+          <p:cNvPr id="8" name="Shape 6"/>
+          <p:cNvSpPr/>
+          <p:nvPr/>
+        </p:nvSpPr>
+        <p:spPr>
+          <a:xfrm>
+            <a:off x="658368" y="1188720"/>
+            <a:ext cx="10972800" cy="4572000"/>
+          </a:xfrm>
+          <a:prstGeom prst="roundRect">
+            <a:avLst>
+              <a:gd name="adj" fmla="val 3600"/>
+            </a:avLst>
+          </a:prstGeom>
+          <a:solidFill>
+            <a:srgbClr val="0A1F38"/>
+          </a:solidFill>
+          <a:ln w="12700">
+            <a:solidFill>
+              <a:srgbClr val="17395A"/>
+            </a:solidFill>
+            <a:prstDash val="solid"/>
+          </a:ln>
+        </p:spPr>
+        <p:txBody>
+          <a:bodyPr/>
+          <a:lstStyle/>
+          <a:p>
+            <a:endParaRPr lang="ru-BY"/>
+          </a:p>
+        </p:txBody>
+      </p:sp>
+      <p:sp>
+        <p:nvSpPr>
+          <p:cNvPr id="9" name="Shape 7"/>
+          <p:cNvSpPr/>
+          <p:nvPr/>
+        </p:nvSpPr>
+        <p:spPr>
+          <a:xfrm>
+            <a:off x="868680" y="1508760"/>
+            <a:ext cx="3108960" cy="749808"/>
+          </a:xfrm>
+          <a:prstGeom prst="roundRect">
+            <a:avLst>
+              <a:gd name="adj" fmla="val 14634"/>
+            </a:avLst>
+          </a:prstGeom>
+          <a:solidFill>
+            <a:srgbClr val="EDEBE6"/>
+          </a:solidFill>
+          <a:ln w="12700">
+            <a:solidFill>
+              <a:srgbClr val="EDEBE6"/>
+            </a:solidFill>
+            <a:prstDash val="solid"/>
+          </a:ln>
+          <a:effectLst>
+            <a:outerShdw blurRad="12700" dist="6350" dir="2700000" algn="bl" rotWithShape="0">
+              <a:srgbClr val="000000">
+                <a:alpha val="18000"/>
+              </a:srgbClr>
+            </a:outerShdw>
+          </a:effectLst>
+        </p:spPr>
+        <p:txBody>
+          <a:bodyPr/>
+          <a:lstStyle/>
+          <a:p>
+            <a:endParaRPr lang="ru-BY"/>
+          </a:p>
+        </p:txBody>
+      </p:sp>
+      <p:pic>
+        <p:nvPicPr>
+          <p:cNvPr id="10" name="Image 0" descr="preencoded.png"/>
+          <p:cNvPicPr>
+            <a:picLocks noChangeAspect="1"/>
+          </p:cNvPicPr>
+          <p:nvPr/>
+        </p:nvPicPr>
+        <p:blipFill>
+          <a:blip>
+            <a:extLst>
+              <a:ext uri="{96DAC541-7B7A-43D3-8B79-37D633B846F1}">
+                <asvg:svgBlip xmlns:asvg="http://schemas.microsoft.com/office/drawing/2016/SVG/main" r:embed="rId3"/>
+              </a:ext>
+            </a:extLst>
+          </a:blip>
+          <a:stretch>
+            <a:fillRect/>
+          </a:stretch>
+        </p:blipFill>
+        <p:spPr>
+          <a:xfrm>
+            <a:off x="1005840" y="1673352"/>
+            <a:ext cx="2834640" cy="493776"/>
+          </a:xfrm>
+          <a:prstGeom prst="rect">
+            <a:avLst/>
+          </a:prstGeom>
+        </p:spPr>
+      </p:pic>
+      <p:sp>
+        <p:nvSpPr>
+          <p:cNvPr id="11" name="Shape 8"/>
+          <p:cNvSpPr/>
+          <p:nvPr/>
+        </p:nvSpPr>
+        <p:spPr>
+          <a:xfrm>
+            <a:off x="868680" y="2514600"/>
+            <a:ext cx="3154680" cy="2148840"/>
+          </a:xfrm>
+          <a:prstGeom prst="roundRect">
+            <a:avLst>
+              <a:gd name="adj" fmla="val 7660"/>
+            </a:avLst>
+          </a:prstGeom>
+          <a:solidFill>
+            <a:srgbClr val="0D2947"/>
+          </a:solidFill>
+          <a:ln w="12700">
+            <a:solidFill>
+              <a:srgbClr val="17395A"/>
+            </a:solidFill>
+            <a:prstDash val="solid"/>
+          </a:ln>
+        </p:spPr>
+        <p:txBody>
+          <a:bodyPr/>
+          <a:lstStyle/>
+          <a:p>
+            <a:endParaRPr lang="ru-BY"/>
+          </a:p>
+        </p:txBody>
+      </p:sp>
+      <p:sp>
+        <p:nvSpPr>
+          <p:cNvPr id="12" name="Text 9"/>
+          <p:cNvSpPr/>
+          <p:nvPr/>
+        </p:nvSpPr>
+        <p:spPr>
+          <a:xfrm>
+            <a:off x="1097280" y="2724912"/>
+            <a:ext cx="1645920" cy="182880"/>
+          </a:xfrm>
+          <a:prstGeom prst="rect">
+            <a:avLst/>
+          </a:prstGeom>
+          <a:noFill/>
+          <a:ln/>
+        </p:spPr>
+        <p:txBody>
+          <a:bodyPr wrap="square" lIns="0" tIns="0" rIns="0" bIns="0" rtlCol="0" anchor="ctr"/>
+          <a:lstStyle/>
+          <a:p>
+            <a:pPr marL="0" indent="0">
+              <a:buNone/>
+            </a:pPr>
+            <a:r>
+              <a:rPr lang="en-US" sz="1350" b="1" dirty="0">
+                <a:solidFill>
+                  <a:srgbClr val="2DD4FF"/>
+                </a:solidFill>
+              </a:rPr>
+              <a:t>Во временной области</a:t>
+            </a:r>
+            <a:endParaRPr lang="en-US" sz="1350" dirty="0"/>
+          </a:p>
+        </p:txBody>
+      </p:sp>
+      <p:sp>
+        <p:nvSpPr>
+          <p:cNvPr id="13" name="Text 10"/>
+          <p:cNvSpPr/>
+          <p:nvPr/>
+        </p:nvSpPr>
+        <p:spPr>
+          <a:xfrm>
+            <a:off x="1097280" y="3154680"/>
+            <a:ext cx="2377440" cy="237744"/>
+          </a:xfrm>
+          <a:prstGeom prst="rect">
+            <a:avLst/>
+          </a:prstGeom>
+          <a:noFill/>
+          <a:ln/>
+        </p:spPr>
+        <p:txBody>
+          <a:bodyPr wrap="square" lIns="0" tIns="0" rIns="0" bIns="0" rtlCol="0" anchor="ctr"/>
+          <a:lstStyle/>
+          <a:p>
+            <a:pPr marL="0" indent="0">
+              <a:buNone/>
+            </a:pPr>
+            <a:r>
+              <a:rPr lang="en-US" sz="1750" dirty="0">
+                <a:solidFill>
+                  <a:srgbClr val="F7F7F3"/>
+                </a:solidFill>
+              </a:rPr>
+              <a:t>1² + (−1)² + 1² + (−1)² = 4</a:t>
+            </a:r>
+            <a:endParaRPr lang="en-US" sz="1750" dirty="0"/>
+          </a:p>
+        </p:txBody>
+      </p:sp>
+      <p:sp>
+        <p:nvSpPr>
+          <p:cNvPr id="14" name="Text 11"/>
+          <p:cNvSpPr/>
+          <p:nvPr/>
+        </p:nvSpPr>
+        <p:spPr>
+          <a:xfrm>
+            <a:off x="1097280" y="3822192"/>
+            <a:ext cx="1005840" cy="182880"/>
+          </a:xfrm>
+          <a:prstGeom prst="rect">
+            <a:avLst/>
+          </a:prstGeom>
+          <a:noFill/>
+          <a:ln/>
+        </p:spPr>
+        <p:txBody>
+          <a:bodyPr wrap="square" lIns="0" tIns="0" rIns="0" bIns="0" rtlCol="0" anchor="ctr"/>
+          <a:lstStyle/>
+          <a:p>
+            <a:pPr marL="0" indent="0">
+              <a:buNone/>
+            </a:pPr>
+            <a:r>
+              <a:rPr lang="en-US" sz="1600" b="1" dirty="0">
+                <a:solidFill>
+                  <a:srgbClr val="9FB4C9"/>
+                </a:solidFill>
+              </a:rPr>
+              <a:t>Eₜ = 4</a:t>
+            </a:r>
+            <a:endParaRPr lang="en-US" sz="1600" dirty="0"/>
+          </a:p>
+        </p:txBody>
+      </p:sp>
+      <p:sp>
+        <p:nvSpPr>
+          <p:cNvPr id="15" name="Shape 12"/>
+          <p:cNvSpPr/>
+          <p:nvPr/>
+        </p:nvSpPr>
+        <p:spPr>
+          <a:xfrm>
+            <a:off x="4315968" y="1965960"/>
+            <a:ext cx="2788920" cy="2743200"/>
+          </a:xfrm>
+          <a:prstGeom prst="roundRect">
+            <a:avLst>
+              <a:gd name="adj" fmla="val 4000"/>
+            </a:avLst>
+          </a:prstGeom>
+          <a:solidFill>
+            <a:srgbClr val="EDEBE6"/>
+          </a:solidFill>
+          <a:ln w="12700">
+            <a:solidFill>
+              <a:srgbClr val="EDEBE6"/>
+            </a:solidFill>
+            <a:prstDash val="solid"/>
+          </a:ln>
+        </p:spPr>
+        <p:txBody>
+          <a:bodyPr/>
+          <a:lstStyle/>
+          <a:p>
+            <a:endParaRPr lang="ru-BY"/>
+          </a:p>
+        </p:txBody>
+      </p:sp>
+      <p:sp>
+        <p:nvSpPr>
+          <p:cNvPr id="16" name="Text 13"/>
+          <p:cNvSpPr/>
+          <p:nvPr/>
+        </p:nvSpPr>
+        <p:spPr>
+          <a:xfrm>
+            <a:off x="4572000" y="2240280"/>
+            <a:ext cx="1463040" cy="182880"/>
+          </a:xfrm>
+          <a:prstGeom prst="rect">
+            <a:avLst/>
+          </a:prstGeom>
+          <a:noFill/>
+          <a:ln/>
+        </p:spPr>
+        <p:txBody>
+          <a:bodyPr wrap="square" lIns="0" tIns="0" rIns="0" bIns="0" rtlCol="0" anchor="ctr"/>
+          <a:lstStyle/>
+          <a:p>
+            <a:pPr marL="0" indent="0">
+              <a:buNone/>
+            </a:pPr>
+            <a:r>
+              <a:rPr lang="en-US" sz="1350" b="1" dirty="0">
+                <a:solidFill>
+                  <a:srgbClr val="334155"/>
+                </a:solidFill>
+              </a:rPr>
+              <a:t>Коэффициенты ДПФ</a:t>
+            </a:r>
+            <a:endParaRPr lang="en-US" sz="1350" dirty="0"/>
+          </a:p>
+        </p:txBody>
+      </p:sp>
+      <p:sp>
+        <p:nvSpPr>
+          <p:cNvPr id="17" name="Text 14"/>
+          <p:cNvSpPr/>
+          <p:nvPr/>
+        </p:nvSpPr>
+        <p:spPr>
+          <a:xfrm>
+            <a:off x="4572000" y="2651760"/>
+            <a:ext cx="1371600" cy="1097280"/>
+          </a:xfrm>
+          <a:prstGeom prst="rect">
+            <a:avLst/>
+          </a:prstGeom>
+          <a:noFill/>
+          <a:ln/>
+        </p:spPr>
+        <p:txBody>
+          <a:bodyPr wrap="square" lIns="0" tIns="0" rIns="0" bIns="0" rtlCol="0" anchor="ctr"/>
+          <a:lstStyle/>
+          <a:p>
+            <a:pPr marL="0" indent="0">
+              <a:buNone/>
+            </a:pPr>
+            <a:r>
+              <a:rPr lang="en-US" sz="1700" b="1" dirty="0">
+                <a:solidFill>
+                  <a:srgbClr val="111827"/>
+                </a:solidFill>
+              </a:rPr>
+              <a:t>X[0] = 0</a:t>
+            </a:r>
+            <a:endParaRPr lang="en-US" sz="1700" dirty="0"/>
+          </a:p>
+          <a:p>
+            <a:pPr marL="0" indent="0">
+              <a:buNone/>
+            </a:pPr>
+            <a:r>
+              <a:rPr lang="en-US" sz="1700" b="1" dirty="0">
+                <a:solidFill>
+                  <a:srgbClr val="111827"/>
+                </a:solidFill>
+              </a:rPr>
+              <a:t>X[1] = 0</a:t>
+            </a:r>
+            <a:endParaRPr lang="en-US" sz="1700" dirty="0"/>
+          </a:p>
+          <a:p>
+            <a:pPr marL="0" indent="0">
+              <a:buNone/>
+            </a:pPr>
+            <a:r>
+              <a:rPr lang="en-US" sz="1700" b="1" dirty="0">
+                <a:solidFill>
+                  <a:srgbClr val="111827"/>
+                </a:solidFill>
+              </a:rPr>
+              <a:t>X[2] = 4</a:t>
+            </a:r>
+            <a:endParaRPr lang="en-US" sz="1700" dirty="0"/>
+          </a:p>
+          <a:p>
+            <a:pPr marL="0" indent="0">
+              <a:buNone/>
+            </a:pPr>
+            <a:r>
+              <a:rPr lang="en-US" sz="1700" b="1" dirty="0">
+                <a:solidFill>
+                  <a:srgbClr val="111827"/>
+                </a:solidFill>
+              </a:rPr>
+              <a:t>X[3] = 0</a:t>
+            </a:r>
+            <a:endParaRPr lang="en-US" sz="1700" dirty="0"/>
+          </a:p>
+        </p:txBody>
+      </p:sp>
+      <p:sp>
+        <p:nvSpPr>
+          <p:cNvPr id="18" name="Text 15"/>
+          <p:cNvSpPr/>
+          <p:nvPr/>
+        </p:nvSpPr>
+        <p:spPr>
+          <a:xfrm>
+            <a:off x="4572000" y="4114800"/>
+            <a:ext cx="1965960" cy="310896"/>
+          </a:xfrm>
+          <a:prstGeom prst="rect">
+            <a:avLst/>
+          </a:prstGeom>
+          <a:noFill/>
+          <a:ln/>
+        </p:spPr>
+        <p:txBody>
+          <a:bodyPr wrap="square" lIns="0" tIns="0" rIns="0" bIns="0" rtlCol="0" anchor="ctr"/>
+          <a:lstStyle/>
+          <a:p>
+            <a:pPr marL="0" indent="0">
+              <a:buNone/>
+            </a:pPr>
+            <a:r>
+              <a:rPr lang="en-US" sz="1150" dirty="0">
+                <a:solidFill>
+                  <a:srgbClr val="475569"/>
+                </a:solidFill>
+              </a:rPr>
+              <a:t>вся энергия сосредоточена в одной гармонике</a:t>
+            </a:r>
+            <a:endParaRPr lang="en-US" sz="1150" dirty="0"/>
+          </a:p>
+        </p:txBody>
+      </p:sp>
+      <p:sp>
+        <p:nvSpPr>
+          <p:cNvPr id="19" name="Shape 16"/>
+          <p:cNvSpPr/>
+          <p:nvPr/>
+        </p:nvSpPr>
+        <p:spPr>
+          <a:xfrm>
+            <a:off x="7388352" y="2514600"/>
+            <a:ext cx="3154680" cy="2148840"/>
+          </a:xfrm>
+          <a:prstGeom prst="roundRect">
+            <a:avLst>
+              <a:gd name="adj" fmla="val 7660"/>
+            </a:avLst>
+          </a:prstGeom>
+          <a:solidFill>
+            <a:srgbClr val="0D2947"/>
+          </a:solidFill>
+          <a:ln w="12700">
+            <a:solidFill>
+              <a:srgbClr val="17395A"/>
+            </a:solidFill>
+            <a:prstDash val="solid"/>
+          </a:ln>
+        </p:spPr>
+        <p:txBody>
+          <a:bodyPr/>
+          <a:lstStyle/>
+          <a:p>
+            <a:endParaRPr lang="ru-BY"/>
+          </a:p>
+        </p:txBody>
+      </p:sp>
+      <p:sp>
+        <p:nvSpPr>
+          <p:cNvPr id="20" name="Text 17"/>
+          <p:cNvSpPr/>
+          <p:nvPr/>
+        </p:nvSpPr>
+        <p:spPr>
+          <a:xfrm>
+            <a:off x="7607808" y="2724912"/>
+            <a:ext cx="1783080" cy="182880"/>
+          </a:xfrm>
+          <a:prstGeom prst="rect">
+            <a:avLst/>
+          </a:prstGeom>
+          <a:noFill/>
+          <a:ln/>
+        </p:spPr>
+        <p:txBody>
+          <a:bodyPr wrap="square" lIns="0" tIns="0" rIns="0" bIns="0" rtlCol="0" anchor="ctr"/>
+          <a:lstStyle/>
+          <a:p>
+            <a:pPr marL="0" indent="0">
+              <a:buNone/>
+            </a:pPr>
+            <a:r>
+              <a:rPr lang="en-US" sz="1350" b="1" dirty="0">
+                <a:solidFill>
+                  <a:srgbClr val="FFB14A"/>
+                </a:solidFill>
+              </a:rPr>
+              <a:t>В частотной области</a:t>
+            </a:r>
+            <a:endParaRPr lang="en-US" sz="1350" dirty="0"/>
+          </a:p>
+        </p:txBody>
+      </p:sp>
+      <p:sp>
+        <p:nvSpPr>
+          <p:cNvPr id="21" name="Text 18"/>
+          <p:cNvSpPr/>
+          <p:nvPr/>
+        </p:nvSpPr>
+        <p:spPr>
+          <a:xfrm>
+            <a:off x="7607808" y="3154680"/>
+            <a:ext cx="2560320" cy="237744"/>
+          </a:xfrm>
+          <a:prstGeom prst="rect">
+            <a:avLst/>
+          </a:prstGeom>
+          <a:noFill/>
+          <a:ln/>
+        </p:spPr>
+        <p:txBody>
+          <a:bodyPr wrap="square" lIns="0" tIns="0" rIns="0" bIns="0" rtlCol="0" anchor="ctr"/>
+          <a:lstStyle/>
+          <a:p>
+            <a:pPr marL="0" indent="0">
+              <a:buNone/>
+            </a:pPr>
+            <a:r>
+              <a:rPr lang="en-US" sz="1750" dirty="0">
+                <a:solidFill>
+                  <a:srgbClr val="F7F7F3"/>
+                </a:solidFill>
+              </a:rPr>
+              <a:t>(1/4)·(0 + 0 + 16 + 0) = 4</a:t>
+            </a:r>
+            <a:endParaRPr lang="en-US" sz="1750" dirty="0"/>
+          </a:p>
+        </p:txBody>
+      </p:sp>
+      <p:sp>
+        <p:nvSpPr>
+          <p:cNvPr id="22" name="Text 19"/>
+          <p:cNvSpPr/>
+          <p:nvPr/>
+        </p:nvSpPr>
+        <p:spPr>
+          <a:xfrm>
+            <a:off x="7607808" y="3822192"/>
+            <a:ext cx="1005840" cy="182880"/>
+          </a:xfrm>
+          <a:prstGeom prst="rect">
+            <a:avLst/>
+          </a:prstGeom>
+          <a:noFill/>
+          <a:ln/>
+        </p:spPr>
+        <p:txBody>
+          <a:bodyPr wrap="square" lIns="0" tIns="0" rIns="0" bIns="0" rtlCol="0" anchor="ctr"/>
+          <a:lstStyle/>
+          <a:p>
+            <a:pPr marL="0" indent="0">
+              <a:buNone/>
+            </a:pPr>
+            <a:r>
+              <a:rPr lang="en-US" sz="1600" b="1" dirty="0">
+                <a:solidFill>
+                  <a:srgbClr val="9FB4C9"/>
+                </a:solidFill>
+              </a:rPr>
+              <a:t>E_f = 4</a:t>
+            </a:r>
+            <a:endParaRPr lang="en-US" sz="1600" dirty="0"/>
+          </a:p>
+        </p:txBody>
+      </p:sp>
+      <p:sp>
+        <p:nvSpPr>
+          <p:cNvPr id="23" name="Text 20"/>
+          <p:cNvSpPr/>
+          <p:nvPr/>
+        </p:nvSpPr>
+        <p:spPr>
+          <a:xfrm>
+            <a:off x="1078992" y="5010912"/>
+            <a:ext cx="9692640" cy="274320"/>
+          </a:xfrm>
+          <a:prstGeom prst="rect">
+            <a:avLst/>
+          </a:prstGeom>
+          <a:noFill/>
+          <a:ln/>
+        </p:spPr>
+        <p:txBody>
+          <a:bodyPr wrap="square" lIns="0" tIns="0" rIns="0" bIns="0" rtlCol="0" anchor="ctr"/>
+          <a:lstStyle/>
+          <a:p>
+            <a:pPr algn="ctr"/>
+            <a:r>
+              <a:rPr lang="en-US" sz="1400" dirty="0">
+                <a:solidFill>
+                  <a:srgbClr val="D9E6F2"/>
+                </a:solidFill>
+              </a:rPr>
+              <a:t>Итог: Eₜ = E_f = 4 — теорема подтверждается прямым </a:t>
+            </a:r>
+            <a:r>
+              <a:rPr lang="en-US" sz="1400" dirty="0" err="1">
+                <a:solidFill>
+                  <a:srgbClr val="D9E6F2"/>
+                </a:solidFill>
+              </a:rPr>
+              <a:t>расчётом</a:t>
+            </a:r>
+            <a:r>
+              <a:rPr lang="en-US" sz="1400" dirty="0">
+                <a:solidFill>
+                  <a:srgbClr val="D9E6F2"/>
+                </a:solidFill>
+              </a:rPr>
+              <a:t>.</a:t>
+            </a:r>
+            <a:br>
+              <a:rPr lang="ru-RU" sz="1400" dirty="0">
+                <a:solidFill>
+                  <a:srgbClr val="D9E6F2"/>
+                </a:solidFill>
+              </a:rPr>
+            </a:br>
+            <a:r>
+              <a:rPr lang="ru-RU" sz="1400" dirty="0">
+                <a:solidFill>
+                  <a:srgbClr val="D9E6F2"/>
+                </a:solidFill>
+              </a:rPr>
+              <a:t>Пример показывает, что энергия может собраться  в одной частоте</a:t>
+            </a:r>
+            <a:endParaRPr lang="en-US" sz="1400" dirty="0"/>
+          </a:p>
+        </p:txBody>
+      </p:sp>
+    </p:spTree>
+  </p:cSld>
+  <p:clrMapOvr>
+    <a:masterClrMapping/>
+  </p:clrMapOvr>
+</p:sld>
+</file>
+
+<file path=ppt/slides/slide8.xml><?xml version="1.0" encoding="utf-8"?>
 <p:sld xmlns:a="http://schemas.openxmlformats.org/drawingml/2006/main" xmlns:r="http://schemas.openxmlformats.org/officeDocument/2006/relationships" xmlns:p="http://schemas.openxmlformats.org/presentationml/2006/main">
   <p:cSld name="Slide 6">
     <p:bg>
@@ -10918,10 +12383,10 @@
           <p:nvPr/>
         </p:nvPicPr>
         <p:blipFill>
-          <a:blip r:embed="rId3">
+          <a:blip>
             <a:extLst>
               <a:ext uri="{96DAC541-7B7A-43D3-8B79-37D633B846F1}">
-                <asvg:svgBlip xmlns:asvg="http://schemas.microsoft.com/office/drawing/2016/SVG/main" r:embed="rId4"/>
+                <asvg:svgBlip xmlns:asvg="http://schemas.microsoft.com/office/drawing/2016/SVG/main" r:embed="rId3"/>
               </a:ext>
             </a:extLst>
           </a:blip>
@@ -11062,10 +12527,10 @@
           <p:nvPr/>
         </p:nvPicPr>
         <p:blipFill>
-          <a:blip r:embed="rId5">
+          <a:blip>
             <a:extLst>
               <a:ext uri="{96DAC541-7B7A-43D3-8B79-37D633B846F1}">
-                <asvg:svgBlip xmlns:asvg="http://schemas.microsoft.com/office/drawing/2016/SVG/main" r:embed="rId6"/>
+                <asvg:svgBlip xmlns:asvg="http://schemas.microsoft.com/office/drawing/2016/SVG/main" r:embed="rId4"/>
               </a:ext>
             </a:extLst>
           </a:blip>
@@ -11091,9 +12556,9 @@
 </p:sld>
 </file>
 
-<file path=ppt/slides/slide7.xml><?xml version="1.0" encoding="utf-8"?>
+<file path=ppt/slides/slide9.xml><?xml version="1.0" encoding="utf-8"?>
 <p:sld xmlns:a="http://schemas.openxmlformats.org/drawingml/2006/main" xmlns:r="http://schemas.openxmlformats.org/officeDocument/2006/relationships" xmlns:p="http://schemas.openxmlformats.org/presentationml/2006/main">
-  <p:cSld name="Slide 7">
+  <p:cSld name="Slide 10">
     <p:bg>
       <p:bgPr>
         <a:solidFill>
@@ -11185,7 +12650,7 @@
         <p:spPr>
           <a:xfrm>
             <a:off x="594360" y="219456"/>
-            <a:ext cx="2651760" cy="164586"/>
+            <a:ext cx="1645920" cy="201168"/>
           </a:xfrm>
           <a:prstGeom prst="rect">
             <a:avLst/>
@@ -11209,7 +12674,7 @@
                 <a:ea typeface="Aptos" pitchFamily="34" charset="-122"/>
                 <a:cs typeface="Aptos" pitchFamily="34" charset="-120"/>
               </a:rPr>
-              <a:t>ГЕОМЕТРИЧЕСКАЯ ИНТЕРПРЕТАЦИЯ</a:t>
+              <a:t>ПРИМЕР ПРИМЕНЕНИЯ</a:t>
             </a:r>
             <a:endParaRPr lang="en-US" sz="950" dirty="0"/>
           </a:p>
@@ -11253,7 +12718,7 @@
         </p:nvSpPr>
         <p:spPr>
           <a:xfrm>
-            <a:off x="594360" y="475488"/>
+            <a:off x="612648" y="612648"/>
             <a:ext cx="7589520" cy="457200"/>
           </a:xfrm>
           <a:prstGeom prst="rect">
@@ -11270,7 +12735,7 @@
               <a:buNone/>
             </a:pPr>
             <a:r>
-              <a:rPr lang="en-US" sz="2300" b="1" dirty="0">
+              <a:rPr lang="en-US" sz="2300" b="1" dirty="0" err="1">
                 <a:solidFill>
                   <a:srgbClr val="F7F7F3"/>
                 </a:solidFill>
@@ -11278,7 +12743,29 @@
                 <a:ea typeface="Aptos Display" pitchFamily="34" charset="-122"/>
                 <a:cs typeface="Aptos Display" pitchFamily="34" charset="-120"/>
               </a:rPr>
-              <a:t>Преобразование Фурье как смена базиса</a:t>
+              <a:t>Нормализация</a:t>
+            </a:r>
+            <a:r>
+              <a:rPr lang="en-US" sz="2300" b="1" dirty="0">
+                <a:solidFill>
+                  <a:srgbClr val="F7F7F3"/>
+                </a:solidFill>
+                <a:latin typeface="Aptos Display" pitchFamily="34" charset="0"/>
+                <a:ea typeface="Aptos Display" pitchFamily="34" charset="-122"/>
+                <a:cs typeface="Aptos Display" pitchFamily="34" charset="-120"/>
+              </a:rPr>
+              <a:t> </a:t>
+            </a:r>
+            <a:r>
+              <a:rPr lang="en-US" sz="2300" b="1" dirty="0" err="1">
+                <a:solidFill>
+                  <a:srgbClr val="F7F7F3"/>
+                </a:solidFill>
+                <a:latin typeface="Aptos Display" pitchFamily="34" charset="0"/>
+                <a:ea typeface="Aptos Display" pitchFamily="34" charset="-122"/>
+                <a:cs typeface="Aptos Display" pitchFamily="34" charset="-120"/>
+              </a:rPr>
+              <a:t>громкости</a:t>
             </a:r>
             <a:endParaRPr lang="en-US" sz="2300" dirty="0"/>
           </a:p>
@@ -11317,7 +12804,7 @@
                 <a:ea typeface="Aptos" pitchFamily="34" charset="-122"/>
                 <a:cs typeface="Aptos" pitchFamily="34" charset="-120"/>
               </a:rPr>
-              <a:t>7</a:t>
+              <a:t>10</a:t>
             </a:r>
             <a:endParaRPr lang="en-US" sz="850" dirty="0"/>
           </a:p>
@@ -11331,12 +12818,12 @@
         </p:nvSpPr>
         <p:spPr>
           <a:xfrm>
-            <a:off x="658368" y="1325880"/>
-            <a:ext cx="10972800" cy="4526280"/>
+            <a:off x="658368" y="1234440"/>
+            <a:ext cx="10972800" cy="4572000"/>
           </a:xfrm>
           <a:prstGeom prst="roundRect">
             <a:avLst>
-              <a:gd name="adj" fmla="val 3636"/>
+              <a:gd name="adj" fmla="val 3600"/>
             </a:avLst>
           </a:prstGeom>
           <a:solidFill>
@@ -11359,18 +12846,18 @@
       </p:sp>
       <p:sp>
         <p:nvSpPr>
-          <p:cNvPr id="9" name="Shape 7"/>
-          <p:cNvSpPr/>
-          <p:nvPr/>
-        </p:nvSpPr>
-        <p:spPr>
-          <a:xfrm>
-            <a:off x="960120" y="1874520"/>
-            <a:ext cx="2286000" cy="1371600"/>
+          <p:cNvPr id="10" name="Shape 8"/>
+          <p:cNvSpPr/>
+          <p:nvPr/>
+        </p:nvSpPr>
+        <p:spPr>
+          <a:xfrm>
+            <a:off x="896112" y="1965960"/>
+            <a:ext cx="1755648" cy="914400"/>
           </a:xfrm>
           <a:prstGeom prst="roundRect">
             <a:avLst>
-              <a:gd name="adj" fmla="val 12000"/>
+              <a:gd name="adj" fmla="val 18000"/>
             </a:avLst>
           </a:prstGeom>
           <a:solidFill>
@@ -11393,103 +12880,19 @@
       </p:sp>
       <p:sp>
         <p:nvSpPr>
-          <p:cNvPr id="10" name="Text 8"/>
-          <p:cNvSpPr/>
-          <p:nvPr/>
-        </p:nvSpPr>
-        <p:spPr>
-          <a:xfrm>
-            <a:off x="1143000" y="2162556"/>
-            <a:ext cx="1874520" cy="457200"/>
-          </a:xfrm>
-          <a:prstGeom prst="rect">
-            <a:avLst/>
-          </a:prstGeom>
-          <a:noFill/>
-          <a:ln/>
-        </p:spPr>
-        <p:txBody>
-          <a:bodyPr wrap="square" lIns="0" tIns="0" rIns="0" bIns="0" rtlCol="0" anchor="ctr"/>
-          <a:lstStyle/>
-          <a:p>
-            <a:pPr marL="0" indent="0" algn="ctr">
-              <a:buNone/>
-            </a:pPr>
-            <a:r>
-              <a:rPr lang="en-US" sz="2400" b="1" dirty="0">
-                <a:solidFill>
-                  <a:srgbClr val="F7F7F3"/>
-                </a:solidFill>
-              </a:rPr>
-              <a:t>временной</a:t>
-            </a:r>
-            <a:endParaRPr lang="en-US" sz="2400" dirty="0"/>
-          </a:p>
-          <a:p>
-            <a:pPr marL="0" indent="0" algn="ctr">
-              <a:buNone/>
-            </a:pPr>
-            <a:r>
-              <a:rPr lang="en-US" sz="2400" b="1" dirty="0">
-                <a:solidFill>
-                  <a:srgbClr val="F7F7F3"/>
-                </a:solidFill>
-              </a:rPr>
-              <a:t>базис</a:t>
-            </a:r>
-            <a:endParaRPr lang="en-US" sz="2400" dirty="0"/>
-          </a:p>
-        </p:txBody>
-      </p:sp>
-      <p:sp>
-        <p:nvSpPr>
-          <p:cNvPr id="11" name="Text 9"/>
-          <p:cNvSpPr/>
-          <p:nvPr/>
-        </p:nvSpPr>
-        <p:spPr>
-          <a:xfrm>
-            <a:off x="1234440" y="2907792"/>
-            <a:ext cx="1737360" cy="182880"/>
-          </a:xfrm>
-          <a:prstGeom prst="rect">
-            <a:avLst/>
-          </a:prstGeom>
-          <a:noFill/>
-          <a:ln/>
-        </p:spPr>
-        <p:txBody>
-          <a:bodyPr wrap="square" lIns="0" tIns="0" rIns="0" bIns="0" rtlCol="0" anchor="ctr"/>
-          <a:lstStyle/>
-          <a:p>
-            <a:pPr marL="0" indent="0" algn="ctr">
-              <a:buNone/>
-            </a:pPr>
-            <a:r>
-              <a:rPr lang="en-US" sz="1250" dirty="0">
-                <a:solidFill>
-                  <a:srgbClr val="9FB4C9"/>
-                </a:solidFill>
-              </a:rPr>
-              <a:t>x — координаты сигнала</a:t>
-            </a:r>
-            <a:endParaRPr lang="en-US" sz="1250" dirty="0"/>
-          </a:p>
-        </p:txBody>
-      </p:sp>
-      <p:sp>
-        <p:nvSpPr>
-          <p:cNvPr id="12" name="Shape 10"/>
-          <p:cNvSpPr/>
-          <p:nvPr/>
-        </p:nvSpPr>
-        <p:spPr>
-          <a:xfrm>
-            <a:off x="3611880" y="2286000"/>
-            <a:ext cx="548640" cy="457200"/>
-          </a:xfrm>
-          <a:prstGeom prst="chevron">
-            <a:avLst/>
+          <p:cNvPr id="11" name="Shape 9"/>
+          <p:cNvSpPr/>
+          <p:nvPr/>
+        </p:nvSpPr>
+        <p:spPr>
+          <a:xfrm>
+            <a:off x="1005840" y="2103120"/>
+            <a:ext cx="804672" cy="256032"/>
+          </a:xfrm>
+          <a:prstGeom prst="roundRect">
+            <a:avLst>
+              <a:gd name="adj" fmla="val 42857"/>
+            </a:avLst>
           </a:prstGeom>
           <a:solidFill>
             <a:srgbClr val="2DD4FF"/>
@@ -11511,17 +12914,335 @@
       </p:sp>
       <p:sp>
         <p:nvSpPr>
-          <p:cNvPr id="17" name="Shape 14"/>
-          <p:cNvSpPr/>
-          <p:nvPr/>
-        </p:nvSpPr>
-        <p:spPr>
-          <a:xfrm>
-            <a:off x="7635240" y="2286000"/>
-            <a:ext cx="548640" cy="457200"/>
+          <p:cNvPr id="12" name="Text 10"/>
+          <p:cNvSpPr/>
+          <p:nvPr/>
+        </p:nvSpPr>
+        <p:spPr>
+          <a:xfrm>
+            <a:off x="1051560" y="2121408"/>
+            <a:ext cx="713232" cy="182880"/>
+          </a:xfrm>
+          <a:prstGeom prst="rect">
+            <a:avLst/>
+          </a:prstGeom>
+          <a:noFill/>
+          <a:ln/>
+        </p:spPr>
+        <p:txBody>
+          <a:bodyPr wrap="square" lIns="0" tIns="0" rIns="0" bIns="0" rtlCol="0" anchor="ctr"/>
+          <a:lstStyle/>
+          <a:p>
+            <a:pPr marL="0" indent="0" algn="ctr">
+              <a:buNone/>
+            </a:pPr>
+            <a:r>
+              <a:rPr lang="en-US" sz="850" b="1" dirty="0">
+                <a:solidFill>
+                  <a:srgbClr val="061426"/>
+                </a:solidFill>
+                <a:latin typeface="Aptos" pitchFamily="34" charset="0"/>
+                <a:ea typeface="Aptos" pitchFamily="34" charset="-122"/>
+                <a:cs typeface="Aptos" pitchFamily="34" charset="-120"/>
+              </a:rPr>
+              <a:t>СИГНАЛ</a:t>
+            </a:r>
+            <a:endParaRPr lang="en-US" sz="850" dirty="0"/>
+          </a:p>
+        </p:txBody>
+      </p:sp>
+      <p:sp>
+        <p:nvSpPr>
+          <p:cNvPr id="13" name="Text 11"/>
+          <p:cNvSpPr/>
+          <p:nvPr/>
+        </p:nvSpPr>
+        <p:spPr>
+          <a:xfrm>
+            <a:off x="1005840" y="2486163"/>
+            <a:ext cx="1572768" cy="256032"/>
+          </a:xfrm>
+          <a:prstGeom prst="rect">
+            <a:avLst/>
+          </a:prstGeom>
+          <a:noFill/>
+          <a:ln/>
+        </p:spPr>
+        <p:txBody>
+          <a:bodyPr wrap="square" lIns="0" tIns="0" rIns="0" bIns="0" rtlCol="0" anchor="ctr"/>
+          <a:lstStyle/>
+          <a:p>
+            <a:pPr marL="0" indent="0" algn="ctr">
+              <a:buNone/>
+            </a:pPr>
+            <a:r>
+              <a:rPr lang="en-US" sz="1110" dirty="0">
+                <a:solidFill>
+                  <a:srgbClr val="D9E6F2"/>
+                </a:solidFill>
+              </a:rPr>
+              <a:t>окна по 1024/2048 отсчётов</a:t>
+            </a:r>
+            <a:endParaRPr lang="en-US" sz="1110" dirty="0"/>
+          </a:p>
+        </p:txBody>
+      </p:sp>
+      <p:sp>
+        <p:nvSpPr>
+          <p:cNvPr id="14" name="Shape 12"/>
+          <p:cNvSpPr/>
+          <p:nvPr/>
+        </p:nvSpPr>
+        <p:spPr>
+          <a:xfrm>
+            <a:off x="2734056" y="2295144"/>
+            <a:ext cx="164592" cy="201168"/>
           </a:xfrm>
           <a:prstGeom prst="chevron">
             <a:avLst/>
+          </a:prstGeom>
+          <a:solidFill>
+            <a:srgbClr val="17395A"/>
+          </a:solidFill>
+          <a:ln w="12700">
+            <a:solidFill>
+              <a:srgbClr val="17395A"/>
+            </a:solidFill>
+            <a:prstDash val="solid"/>
+          </a:ln>
+        </p:spPr>
+        <p:txBody>
+          <a:bodyPr/>
+          <a:lstStyle/>
+          <a:p>
+            <a:endParaRPr lang="ru-BY"/>
+          </a:p>
+        </p:txBody>
+      </p:sp>
+      <p:sp>
+        <p:nvSpPr>
+          <p:cNvPr id="15" name="Shape 13"/>
+          <p:cNvSpPr/>
+          <p:nvPr/>
+        </p:nvSpPr>
+        <p:spPr>
+          <a:xfrm>
+            <a:off x="2944368" y="1965960"/>
+            <a:ext cx="1755648" cy="914400"/>
+          </a:xfrm>
+          <a:prstGeom prst="roundRect">
+            <a:avLst>
+              <a:gd name="adj" fmla="val 18000"/>
+            </a:avLst>
+          </a:prstGeom>
+          <a:solidFill>
+            <a:srgbClr val="0D2947"/>
+          </a:solidFill>
+          <a:ln w="12700">
+            <a:solidFill>
+              <a:srgbClr val="17395A"/>
+            </a:solidFill>
+            <a:prstDash val="solid"/>
+          </a:ln>
+        </p:spPr>
+        <p:txBody>
+          <a:bodyPr/>
+          <a:lstStyle/>
+          <a:p>
+            <a:endParaRPr lang="ru-BY"/>
+          </a:p>
+        </p:txBody>
+      </p:sp>
+      <p:sp>
+        <p:nvSpPr>
+          <p:cNvPr id="16" name="Shape 14"/>
+          <p:cNvSpPr/>
+          <p:nvPr/>
+        </p:nvSpPr>
+        <p:spPr>
+          <a:xfrm>
+            <a:off x="3054096" y="2103120"/>
+            <a:ext cx="804672" cy="256032"/>
+          </a:xfrm>
+          <a:prstGeom prst="roundRect">
+            <a:avLst>
+              <a:gd name="adj" fmla="val 42857"/>
+            </a:avLst>
+          </a:prstGeom>
+          <a:solidFill>
+            <a:srgbClr val="8C7CFF"/>
+          </a:solidFill>
+          <a:ln w="12700">
+            <a:solidFill>
+              <a:srgbClr val="8C7CFF"/>
+            </a:solidFill>
+            <a:prstDash val="solid"/>
+          </a:ln>
+        </p:spPr>
+        <p:txBody>
+          <a:bodyPr/>
+          <a:lstStyle/>
+          <a:p>
+            <a:endParaRPr lang="ru-BY"/>
+          </a:p>
+        </p:txBody>
+      </p:sp>
+      <p:sp>
+        <p:nvSpPr>
+          <p:cNvPr id="17" name="Text 15"/>
+          <p:cNvSpPr/>
+          <p:nvPr/>
+        </p:nvSpPr>
+        <p:spPr>
+          <a:xfrm>
+            <a:off x="3099816" y="2121408"/>
+            <a:ext cx="713232" cy="182880"/>
+          </a:xfrm>
+          <a:prstGeom prst="rect">
+            <a:avLst/>
+          </a:prstGeom>
+          <a:noFill/>
+          <a:ln/>
+        </p:spPr>
+        <p:txBody>
+          <a:bodyPr wrap="square" lIns="0" tIns="0" rIns="0" bIns="0" rtlCol="0" anchor="ctr"/>
+          <a:lstStyle/>
+          <a:p>
+            <a:pPr marL="0" indent="0" algn="ctr">
+              <a:buNone/>
+            </a:pPr>
+            <a:r>
+              <a:rPr lang="en-US" sz="850" b="1" dirty="0">
+                <a:solidFill>
+                  <a:srgbClr val="061426"/>
+                </a:solidFill>
+                <a:latin typeface="Aptos" pitchFamily="34" charset="0"/>
+                <a:ea typeface="Aptos" pitchFamily="34" charset="-122"/>
+                <a:cs typeface="Aptos" pitchFamily="34" charset="-120"/>
+              </a:rPr>
+              <a:t>БПФ</a:t>
+            </a:r>
+            <a:endParaRPr lang="en-US" sz="850" dirty="0"/>
+          </a:p>
+        </p:txBody>
+      </p:sp>
+      <p:sp>
+        <p:nvSpPr>
+          <p:cNvPr id="18" name="Text 16"/>
+          <p:cNvSpPr/>
+          <p:nvPr/>
+        </p:nvSpPr>
+        <p:spPr>
+          <a:xfrm>
+            <a:off x="3035808" y="2458731"/>
+            <a:ext cx="1572768" cy="256032"/>
+          </a:xfrm>
+          <a:prstGeom prst="rect">
+            <a:avLst/>
+          </a:prstGeom>
+          <a:noFill/>
+          <a:ln/>
+        </p:spPr>
+        <p:txBody>
+          <a:bodyPr wrap="square" lIns="0" tIns="0" rIns="0" bIns="0" rtlCol="0" anchor="ctr"/>
+          <a:lstStyle/>
+          <a:p>
+            <a:pPr marL="0" indent="0" algn="ctr">
+              <a:buNone/>
+            </a:pPr>
+            <a:r>
+              <a:rPr lang="en-US" sz="1110" dirty="0">
+                <a:solidFill>
+                  <a:srgbClr val="D9E6F2"/>
+                </a:solidFill>
+              </a:rPr>
+              <a:t>получаем спектр</a:t>
+            </a:r>
+            <a:endParaRPr lang="en-US" sz="1110" dirty="0"/>
+          </a:p>
+        </p:txBody>
+      </p:sp>
+      <p:sp>
+        <p:nvSpPr>
+          <p:cNvPr id="19" name="Shape 17"/>
+          <p:cNvSpPr/>
+          <p:nvPr/>
+        </p:nvSpPr>
+        <p:spPr>
+          <a:xfrm>
+            <a:off x="4782312" y="2295144"/>
+            <a:ext cx="164592" cy="201168"/>
+          </a:xfrm>
+          <a:prstGeom prst="chevron">
+            <a:avLst/>
+          </a:prstGeom>
+          <a:solidFill>
+            <a:srgbClr val="17395A"/>
+          </a:solidFill>
+          <a:ln w="12700">
+            <a:solidFill>
+              <a:srgbClr val="17395A"/>
+            </a:solidFill>
+            <a:prstDash val="solid"/>
+          </a:ln>
+        </p:spPr>
+        <p:txBody>
+          <a:bodyPr/>
+          <a:lstStyle/>
+          <a:p>
+            <a:endParaRPr lang="ru-BY"/>
+          </a:p>
+        </p:txBody>
+      </p:sp>
+      <p:sp>
+        <p:nvSpPr>
+          <p:cNvPr id="20" name="Shape 18"/>
+          <p:cNvSpPr/>
+          <p:nvPr/>
+        </p:nvSpPr>
+        <p:spPr>
+          <a:xfrm>
+            <a:off x="4992624" y="1965960"/>
+            <a:ext cx="1755648" cy="914400"/>
+          </a:xfrm>
+          <a:prstGeom prst="roundRect">
+            <a:avLst>
+              <a:gd name="adj" fmla="val 18000"/>
+            </a:avLst>
+          </a:prstGeom>
+          <a:solidFill>
+            <a:srgbClr val="0D2947"/>
+          </a:solidFill>
+          <a:ln w="12700">
+            <a:solidFill>
+              <a:srgbClr val="17395A"/>
+            </a:solidFill>
+            <a:prstDash val="solid"/>
+          </a:ln>
+        </p:spPr>
+        <p:txBody>
+          <a:bodyPr/>
+          <a:lstStyle/>
+          <a:p>
+            <a:endParaRPr lang="ru-BY"/>
+          </a:p>
+        </p:txBody>
+      </p:sp>
+      <p:sp>
+        <p:nvSpPr>
+          <p:cNvPr id="21" name="Shape 19"/>
+          <p:cNvSpPr/>
+          <p:nvPr/>
+        </p:nvSpPr>
+        <p:spPr>
+          <a:xfrm>
+            <a:off x="5102352" y="2103120"/>
+            <a:ext cx="804672" cy="256032"/>
+          </a:xfrm>
+          <a:prstGeom prst="roundRect">
+            <a:avLst>
+              <a:gd name="adj" fmla="val 42857"/>
+            </a:avLst>
           </a:prstGeom>
           <a:solidFill>
             <a:srgbClr val="FFB14A"/>
@@ -11543,18 +13264,125 @@
       </p:sp>
       <p:sp>
         <p:nvSpPr>
-          <p:cNvPr id="18" name="Shape 15"/>
-          <p:cNvSpPr/>
-          <p:nvPr/>
-        </p:nvSpPr>
-        <p:spPr>
-          <a:xfrm>
-            <a:off x="8503920" y="1874520"/>
-            <a:ext cx="2286000" cy="1371600"/>
+          <p:cNvPr id="22" name="Text 20"/>
+          <p:cNvSpPr/>
+          <p:nvPr/>
+        </p:nvSpPr>
+        <p:spPr>
+          <a:xfrm>
+            <a:off x="5148072" y="2121408"/>
+            <a:ext cx="713232" cy="182880"/>
+          </a:xfrm>
+          <a:prstGeom prst="rect">
+            <a:avLst/>
+          </a:prstGeom>
+          <a:noFill/>
+          <a:ln/>
+        </p:spPr>
+        <p:txBody>
+          <a:bodyPr wrap="square" lIns="0" tIns="0" rIns="0" bIns="0" rtlCol="0" anchor="ctr"/>
+          <a:lstStyle/>
+          <a:p>
+            <a:pPr marL="0" indent="0" algn="ctr">
+              <a:buNone/>
+            </a:pPr>
+            <a:r>
+              <a:rPr lang="en-US" sz="850" b="1" dirty="0">
+                <a:solidFill>
+                  <a:srgbClr val="061426"/>
+                </a:solidFill>
+                <a:latin typeface="Aptos" pitchFamily="34" charset="0"/>
+                <a:ea typeface="Aptos" pitchFamily="34" charset="-122"/>
+                <a:cs typeface="Aptos" pitchFamily="34" charset="-120"/>
+              </a:rPr>
+              <a:t>ЭНЕРГИЯ</a:t>
+            </a:r>
+            <a:endParaRPr lang="en-US" sz="850" dirty="0"/>
+          </a:p>
+        </p:txBody>
+      </p:sp>
+      <p:sp>
+        <p:nvSpPr>
+          <p:cNvPr id="23" name="Text 21"/>
+          <p:cNvSpPr/>
+          <p:nvPr/>
+        </p:nvSpPr>
+        <p:spPr>
+          <a:xfrm>
+            <a:off x="5084064" y="2458731"/>
+            <a:ext cx="1572768" cy="256032"/>
+          </a:xfrm>
+          <a:prstGeom prst="rect">
+            <a:avLst/>
+          </a:prstGeom>
+          <a:noFill/>
+          <a:ln/>
+        </p:spPr>
+        <p:txBody>
+          <a:bodyPr wrap="square" lIns="0" tIns="0" rIns="0" bIns="0" rtlCol="0" anchor="ctr"/>
+          <a:lstStyle/>
+          <a:p>
+            <a:pPr marL="0" indent="0" algn="ctr">
+              <a:buNone/>
+            </a:pPr>
+            <a:r>
+              <a:rPr lang="en-US" sz="1110" dirty="0">
+                <a:solidFill>
+                  <a:srgbClr val="D9E6F2"/>
+                </a:solidFill>
+              </a:rPr>
+              <a:t>суммируем |X[k]|² / N</a:t>
+            </a:r>
+            <a:endParaRPr lang="en-US" sz="1110" dirty="0"/>
+          </a:p>
+        </p:txBody>
+      </p:sp>
+      <p:sp>
+        <p:nvSpPr>
+          <p:cNvPr id="24" name="Shape 22"/>
+          <p:cNvSpPr/>
+          <p:nvPr/>
+        </p:nvSpPr>
+        <p:spPr>
+          <a:xfrm>
+            <a:off x="6830568" y="2295144"/>
+            <a:ext cx="164592" cy="201168"/>
+          </a:xfrm>
+          <a:prstGeom prst="chevron">
+            <a:avLst/>
+          </a:prstGeom>
+          <a:solidFill>
+            <a:srgbClr val="17395A"/>
+          </a:solidFill>
+          <a:ln w="12700">
+            <a:solidFill>
+              <a:srgbClr val="17395A"/>
+            </a:solidFill>
+            <a:prstDash val="solid"/>
+          </a:ln>
+        </p:spPr>
+        <p:txBody>
+          <a:bodyPr/>
+          <a:lstStyle/>
+          <a:p>
+            <a:endParaRPr lang="ru-BY"/>
+          </a:p>
+        </p:txBody>
+      </p:sp>
+      <p:sp>
+        <p:nvSpPr>
+          <p:cNvPr id="25" name="Shape 23"/>
+          <p:cNvSpPr/>
+          <p:nvPr/>
+        </p:nvSpPr>
+        <p:spPr>
+          <a:xfrm>
+            <a:off x="7040880" y="1965960"/>
+            <a:ext cx="1755648" cy="914400"/>
           </a:xfrm>
           <a:prstGeom prst="roundRect">
             <a:avLst>
-              <a:gd name="adj" fmla="val 12000"/>
+              <a:gd name="adj" fmla="val 18000"/>
             </a:avLst>
           </a:prstGeom>
           <a:solidFill>
@@ -11577,104 +13405,302 @@
       </p:sp>
       <p:sp>
         <p:nvSpPr>
-          <p:cNvPr id="19" name="Text 16"/>
-          <p:cNvSpPr/>
-          <p:nvPr/>
-        </p:nvSpPr>
-        <p:spPr>
-          <a:xfrm>
-            <a:off x="8503920" y="2039514"/>
-            <a:ext cx="2362200" cy="667512"/>
-          </a:xfrm>
-          <a:prstGeom prst="rect">
-            <a:avLst/>
-          </a:prstGeom>
-          <a:noFill/>
-          <a:ln/>
-        </p:spPr>
-        <p:txBody>
-          <a:bodyPr wrap="square" lIns="0" tIns="0" rIns="0" bIns="0" rtlCol="0" anchor="ctr"/>
-          <a:lstStyle/>
-          <a:p>
-            <a:pPr marL="0" indent="0" algn="ctr">
-              <a:buNone/>
-            </a:pPr>
-            <a:r>
-              <a:rPr lang="en-US" sz="2400" b="1" dirty="0">
-                <a:solidFill>
-                  <a:srgbClr val="F7F7F3"/>
-                </a:solidFill>
-              </a:rPr>
-              <a:t>гармонический</a:t>
-            </a:r>
-            <a:endParaRPr lang="en-US" sz="2400" dirty="0"/>
-          </a:p>
-          <a:p>
-            <a:pPr marL="0" indent="0" algn="ctr">
-              <a:buNone/>
-            </a:pPr>
-            <a:r>
-              <a:rPr lang="en-US" sz="2400" b="1" dirty="0">
-                <a:solidFill>
-                  <a:srgbClr val="F7F7F3"/>
-                </a:solidFill>
-              </a:rPr>
-              <a:t>базис</a:t>
-            </a:r>
-            <a:endParaRPr lang="en-US" sz="2400" dirty="0"/>
-          </a:p>
-        </p:txBody>
-      </p:sp>
-      <p:sp>
-        <p:nvSpPr>
-          <p:cNvPr id="20" name="Text 17"/>
-          <p:cNvSpPr/>
-          <p:nvPr/>
-        </p:nvSpPr>
-        <p:spPr>
-          <a:xfrm>
-            <a:off x="8705088" y="2907792"/>
-            <a:ext cx="1883664" cy="182880"/>
-          </a:xfrm>
-          <a:prstGeom prst="rect">
-            <a:avLst/>
-          </a:prstGeom>
-          <a:noFill/>
-          <a:ln/>
-        </p:spPr>
-        <p:txBody>
-          <a:bodyPr wrap="square" lIns="0" tIns="0" rIns="0" bIns="0" rtlCol="0" anchor="ctr"/>
-          <a:lstStyle/>
-          <a:p>
-            <a:pPr marL="0" indent="0" algn="ctr">
-              <a:buNone/>
-            </a:pPr>
-            <a:r>
-              <a:rPr lang="en-US" sz="1250" dirty="0">
-                <a:solidFill>
-                  <a:srgbClr val="9FB4C9"/>
-                </a:solidFill>
-              </a:rPr>
-              <a:t>X — спектральные координаты</a:t>
-            </a:r>
-            <a:endParaRPr lang="en-US" sz="1250" dirty="0"/>
-          </a:p>
-        </p:txBody>
-      </p:sp>
-      <p:sp>
-        <p:nvSpPr>
-          <p:cNvPr id="21" name="Shape 18"/>
-          <p:cNvSpPr/>
-          <p:nvPr/>
-        </p:nvSpPr>
-        <p:spPr>
-          <a:xfrm>
-            <a:off x="3794760" y="4041648"/>
-            <a:ext cx="4937760" cy="841248"/>
+          <p:cNvPr id="26" name="Shape 24"/>
+          <p:cNvSpPr/>
+          <p:nvPr/>
+        </p:nvSpPr>
+        <p:spPr>
+          <a:xfrm>
+            <a:off x="7150608" y="2103120"/>
+            <a:ext cx="804672" cy="256032"/>
           </a:xfrm>
           <a:prstGeom prst="roundRect">
             <a:avLst>
-              <a:gd name="adj" fmla="val 13043"/>
+              <a:gd name="adj" fmla="val 42857"/>
+            </a:avLst>
+          </a:prstGeom>
+          <a:solidFill>
+            <a:srgbClr val="43D17C"/>
+          </a:solidFill>
+          <a:ln w="12700">
+            <a:solidFill>
+              <a:srgbClr val="43D17C"/>
+            </a:solidFill>
+            <a:prstDash val="solid"/>
+          </a:ln>
+        </p:spPr>
+        <p:txBody>
+          <a:bodyPr/>
+          <a:lstStyle/>
+          <a:p>
+            <a:endParaRPr lang="ru-BY"/>
+          </a:p>
+        </p:txBody>
+      </p:sp>
+      <p:sp>
+        <p:nvSpPr>
+          <p:cNvPr id="27" name="Text 25"/>
+          <p:cNvSpPr/>
+          <p:nvPr/>
+        </p:nvSpPr>
+        <p:spPr>
+          <a:xfrm>
+            <a:off x="7196328" y="2121408"/>
+            <a:ext cx="713232" cy="182880"/>
+          </a:xfrm>
+          <a:prstGeom prst="rect">
+            <a:avLst/>
+          </a:prstGeom>
+          <a:noFill/>
+          <a:ln/>
+        </p:spPr>
+        <p:txBody>
+          <a:bodyPr wrap="square" lIns="0" tIns="0" rIns="0" bIns="0" rtlCol="0" anchor="ctr"/>
+          <a:lstStyle/>
+          <a:p>
+            <a:pPr marL="0" indent="0" algn="ctr">
+              <a:buNone/>
+            </a:pPr>
+            <a:r>
+              <a:rPr lang="en-US" sz="850" b="1" dirty="0">
+                <a:solidFill>
+                  <a:srgbClr val="061426"/>
+                </a:solidFill>
+                <a:latin typeface="Aptos" pitchFamily="34" charset="0"/>
+                <a:ea typeface="Aptos" pitchFamily="34" charset="-122"/>
+                <a:cs typeface="Aptos" pitchFamily="34" charset="-120"/>
+              </a:rPr>
+              <a:t>СРАВНЕНИЕ</a:t>
+            </a:r>
+            <a:endParaRPr lang="en-US" sz="850" dirty="0"/>
+          </a:p>
+        </p:txBody>
+      </p:sp>
+      <p:sp>
+        <p:nvSpPr>
+          <p:cNvPr id="28" name="Text 26"/>
+          <p:cNvSpPr/>
+          <p:nvPr/>
+        </p:nvSpPr>
+        <p:spPr>
+          <a:xfrm>
+            <a:off x="7132320" y="2467674"/>
+            <a:ext cx="1572768" cy="256032"/>
+          </a:xfrm>
+          <a:prstGeom prst="rect">
+            <a:avLst/>
+          </a:prstGeom>
+          <a:noFill/>
+          <a:ln/>
+        </p:spPr>
+        <p:txBody>
+          <a:bodyPr wrap="square" lIns="0" tIns="0" rIns="0" bIns="0" rtlCol="0" anchor="ctr"/>
+          <a:lstStyle/>
+          <a:p>
+            <a:pPr marL="0" indent="0" algn="ctr">
+              <a:buNone/>
+            </a:pPr>
+            <a:r>
+              <a:rPr lang="en-US" sz="1110" dirty="0">
+                <a:solidFill>
+                  <a:srgbClr val="D9E6F2"/>
+                </a:solidFill>
+              </a:rPr>
+              <a:t>с целевым уровнем</a:t>
+            </a:r>
+            <a:endParaRPr lang="en-US" sz="1110" dirty="0"/>
+          </a:p>
+        </p:txBody>
+      </p:sp>
+      <p:sp>
+        <p:nvSpPr>
+          <p:cNvPr id="29" name="Shape 27"/>
+          <p:cNvSpPr/>
+          <p:nvPr/>
+        </p:nvSpPr>
+        <p:spPr>
+          <a:xfrm>
+            <a:off x="8878824" y="2295144"/>
+            <a:ext cx="164592" cy="201168"/>
+          </a:xfrm>
+          <a:prstGeom prst="chevron">
+            <a:avLst/>
+          </a:prstGeom>
+          <a:solidFill>
+            <a:srgbClr val="17395A"/>
+          </a:solidFill>
+          <a:ln w="12700">
+            <a:solidFill>
+              <a:srgbClr val="17395A"/>
+            </a:solidFill>
+            <a:prstDash val="solid"/>
+          </a:ln>
+        </p:spPr>
+        <p:txBody>
+          <a:bodyPr/>
+          <a:lstStyle/>
+          <a:p>
+            <a:endParaRPr lang="ru-BY"/>
+          </a:p>
+        </p:txBody>
+      </p:sp>
+      <p:sp>
+        <p:nvSpPr>
+          <p:cNvPr id="30" name="Shape 28"/>
+          <p:cNvSpPr/>
+          <p:nvPr/>
+        </p:nvSpPr>
+        <p:spPr>
+          <a:xfrm>
+            <a:off x="9089136" y="1965960"/>
+            <a:ext cx="1755648" cy="914400"/>
+          </a:xfrm>
+          <a:prstGeom prst="roundRect">
+            <a:avLst>
+              <a:gd name="adj" fmla="val 18000"/>
+            </a:avLst>
+          </a:prstGeom>
+          <a:solidFill>
+            <a:srgbClr val="0D2947"/>
+          </a:solidFill>
+          <a:ln w="12700">
+            <a:solidFill>
+              <a:srgbClr val="17395A"/>
+            </a:solidFill>
+            <a:prstDash val="solid"/>
+          </a:ln>
+        </p:spPr>
+        <p:txBody>
+          <a:bodyPr/>
+          <a:lstStyle/>
+          <a:p>
+            <a:endParaRPr lang="ru-BY"/>
+          </a:p>
+        </p:txBody>
+      </p:sp>
+      <p:sp>
+        <p:nvSpPr>
+          <p:cNvPr id="31" name="Shape 29"/>
+          <p:cNvSpPr/>
+          <p:nvPr/>
+        </p:nvSpPr>
+        <p:spPr>
+          <a:xfrm>
+            <a:off x="9198864" y="2103120"/>
+            <a:ext cx="804672" cy="256032"/>
+          </a:xfrm>
+          <a:prstGeom prst="roundRect">
+            <a:avLst>
+              <a:gd name="adj" fmla="val 42857"/>
+            </a:avLst>
+          </a:prstGeom>
+          <a:solidFill>
+            <a:srgbClr val="6B7280"/>
+          </a:solidFill>
+          <a:ln w="12700">
+            <a:solidFill>
+              <a:srgbClr val="6B7280"/>
+            </a:solidFill>
+            <a:prstDash val="solid"/>
+          </a:ln>
+        </p:spPr>
+        <p:txBody>
+          <a:bodyPr/>
+          <a:lstStyle/>
+          <a:p>
+            <a:endParaRPr lang="ru-BY"/>
+          </a:p>
+        </p:txBody>
+      </p:sp>
+      <p:sp>
+        <p:nvSpPr>
+          <p:cNvPr id="32" name="Text 30"/>
+          <p:cNvSpPr/>
+          <p:nvPr/>
+        </p:nvSpPr>
+        <p:spPr>
+          <a:xfrm>
+            <a:off x="9244584" y="2121407"/>
+            <a:ext cx="758952" cy="279645"/>
+          </a:xfrm>
+          <a:prstGeom prst="rect">
+            <a:avLst/>
+          </a:prstGeom>
+          <a:noFill/>
+          <a:ln/>
+        </p:spPr>
+        <p:txBody>
+          <a:bodyPr wrap="square" lIns="0" tIns="0" rIns="0" bIns="0" rtlCol="0" anchor="ctr"/>
+          <a:lstStyle/>
+          <a:p>
+            <a:pPr marL="0" indent="0" algn="ctr">
+              <a:buNone/>
+            </a:pPr>
+            <a:r>
+              <a:rPr lang="en-US" sz="850" b="1" dirty="0">
+                <a:solidFill>
+                  <a:srgbClr val="F7F7F3"/>
+                </a:solidFill>
+                <a:latin typeface="Aptos" pitchFamily="34" charset="0"/>
+                <a:ea typeface="Aptos" pitchFamily="34" charset="-122"/>
+                <a:cs typeface="Aptos" pitchFamily="34" charset="-120"/>
+              </a:rPr>
+              <a:t>МАСШТАБИРОВАНИЕ</a:t>
+            </a:r>
+            <a:endParaRPr lang="en-US" sz="850" dirty="0"/>
+          </a:p>
+        </p:txBody>
+      </p:sp>
+      <p:sp>
+        <p:nvSpPr>
+          <p:cNvPr id="33" name="Text 31"/>
+          <p:cNvSpPr/>
+          <p:nvPr/>
+        </p:nvSpPr>
+        <p:spPr>
+          <a:xfrm>
+            <a:off x="9180576" y="2483349"/>
+            <a:ext cx="1572768" cy="256032"/>
+          </a:xfrm>
+          <a:prstGeom prst="rect">
+            <a:avLst/>
+          </a:prstGeom>
+          <a:noFill/>
+          <a:ln/>
+        </p:spPr>
+        <p:txBody>
+          <a:bodyPr wrap="square" lIns="0" tIns="0" rIns="0" bIns="0" rtlCol="0" anchor="ctr"/>
+          <a:lstStyle/>
+          <a:p>
+            <a:pPr marL="0" indent="0" algn="ctr">
+              <a:buNone/>
+            </a:pPr>
+            <a:r>
+              <a:rPr lang="en-US" sz="1110" dirty="0">
+                <a:solidFill>
+                  <a:srgbClr val="D9E6F2"/>
+                </a:solidFill>
+              </a:rPr>
+              <a:t>усиление или ослабление</a:t>
+            </a:r>
+            <a:endParaRPr lang="en-US" sz="1110" dirty="0"/>
+          </a:p>
+        </p:txBody>
+      </p:sp>
+      <p:sp>
+        <p:nvSpPr>
+          <p:cNvPr id="34" name="Shape 32"/>
+          <p:cNvSpPr/>
+          <p:nvPr/>
+        </p:nvSpPr>
+        <p:spPr>
+          <a:xfrm>
+            <a:off x="896112" y="3337560"/>
+            <a:ext cx="5989320" cy="1874520"/>
+          </a:xfrm>
+          <a:prstGeom prst="roundRect">
+            <a:avLst>
+              <a:gd name="adj" fmla="val 5854"/>
             </a:avLst>
           </a:prstGeom>
           <a:solidFill>
@@ -11686,13 +13712,6 @@
             </a:solidFill>
             <a:prstDash val="solid"/>
           </a:ln>
-          <a:effectLst>
-            <a:outerShdw blurRad="12700" dist="6350" dir="2700000" algn="bl" rotWithShape="0">
-              <a:srgbClr val="000000">
-                <a:alpha val="18000"/>
-              </a:srgbClr>
-            </a:outerShdw>
-          </a:effectLst>
         </p:spPr>
         <p:txBody>
           <a:bodyPr/>
@@ -11702,46 +13721,16 @@
           </a:p>
         </p:txBody>
       </p:sp>
-      <p:pic>
-        <p:nvPicPr>
-          <p:cNvPr id="22" name="Image 1" descr="preencoded.png"/>
-          <p:cNvPicPr>
-            <a:picLocks noChangeAspect="1"/>
-          </p:cNvPicPr>
-          <p:nvPr/>
-        </p:nvPicPr>
-        <p:blipFill>
-          <a:blip r:embed="rId3">
-            <a:extLst>
-              <a:ext uri="{96DAC541-7B7A-43D3-8B79-37D633B846F1}">
-                <asvg:svgBlip xmlns:asvg="http://schemas.microsoft.com/office/drawing/2016/SVG/main" r:embed="rId4"/>
-              </a:ext>
-            </a:extLst>
-          </a:blip>
-          <a:stretch>
-            <a:fillRect/>
-          </a:stretch>
-        </p:blipFill>
-        <p:spPr>
-          <a:xfrm>
-            <a:off x="3931920" y="4206240"/>
-            <a:ext cx="4663440" cy="585216"/>
-          </a:xfrm>
-          <a:prstGeom prst="rect">
-            <a:avLst/>
-          </a:prstGeom>
-        </p:spPr>
-      </p:pic>
-      <p:sp>
-        <p:nvSpPr>
-          <p:cNvPr id="23" name="Text 19"/>
-          <p:cNvSpPr/>
-          <p:nvPr/>
-        </p:nvSpPr>
-        <p:spPr>
-          <a:xfrm>
-            <a:off x="1965960" y="5047488"/>
-            <a:ext cx="8686800" cy="384048"/>
+      <p:sp>
+        <p:nvSpPr>
+          <p:cNvPr id="36" name="Text 34"/>
+          <p:cNvSpPr/>
+          <p:nvPr/>
+        </p:nvSpPr>
+        <p:spPr>
+          <a:xfrm>
+            <a:off x="1133856" y="3931920"/>
+            <a:ext cx="5440680" cy="640080"/>
           </a:xfrm>
           <a:prstGeom prst="rect">
             <a:avLst/>
@@ -11753,544 +13742,35 @@
           <a:bodyPr wrap="square" lIns="0" tIns="0" rIns="0" bIns="0" rtlCol="0" anchor="ctr"/>
           <a:lstStyle/>
           <a:p>
-            <a:pPr marL="0" indent="0" algn="ctr">
-              <a:buNone/>
-            </a:pPr>
-            <a:r>
-              <a:rPr lang="en-US" sz="1400" dirty="0">
-                <a:solidFill>
-                  <a:srgbClr val="D9E6F2"/>
-                </a:solidFill>
-              </a:rPr>
-              <a:t>То есть ДПФ меняет систему координат, но не длину вектора. Это тот же смысл, что и у ортогонального поворота в обычной геометрии.</a:t>
-            </a:r>
-            <a:endParaRPr lang="en-US" sz="1400" dirty="0"/>
-          </a:p>
-        </p:txBody>
-      </p:sp>
-      <p:sp>
-        <p:nvSpPr>
-          <p:cNvPr id="33" name="Shape 33">
-            <a:extLst>
-              <a:ext uri="{FF2B5EF4-FFF2-40B4-BE49-F238E27FC236}">
-                <a16:creationId xmlns:a16="http://schemas.microsoft.com/office/drawing/2014/main" id="{5F9971A3-5174-B447-069C-888DB0532536}"/>
-              </a:ext>
-            </a:extLst>
-          </p:cNvPr>
-          <p:cNvSpPr/>
-          <p:nvPr/>
-        </p:nvSpPr>
-        <p:spPr>
-          <a:xfrm>
-            <a:off x="4343400" y="1700784"/>
-            <a:ext cx="2971800" cy="1719072"/>
+            <a:pPr marL="0" indent="0">
+              <a:buNone/>
+            </a:pPr>
+            <a:r>
+              <a:rPr lang="en-US" sz="1420" dirty="0">
+                <a:solidFill>
+                  <a:srgbClr val="111827"/>
+                </a:solidFill>
+              </a:rPr>
+              <a:t>Теорема Парсеваля описывает физическую энергию сигнала. Субъективная loudness человека зависит ещё и от частотного состава, длительности и особенностей слуха.</a:t>
+            </a:r>
+            <a:endParaRPr lang="en-US" sz="1420" dirty="0"/>
+          </a:p>
+        </p:txBody>
+      </p:sp>
+      <p:sp>
+        <p:nvSpPr>
+          <p:cNvPr id="37" name="Shape 35"/>
+          <p:cNvSpPr/>
+          <p:nvPr/>
+        </p:nvSpPr>
+        <p:spPr>
+          <a:xfrm>
+            <a:off x="7150608" y="3337560"/>
+            <a:ext cx="4133088" cy="1874520"/>
           </a:xfrm>
           <a:prstGeom prst="roundRect">
             <a:avLst>
-              <a:gd name="adj" fmla="val 6383"/>
-            </a:avLst>
-          </a:prstGeom>
-          <a:solidFill>
-            <a:srgbClr val="F3F7FD"/>
-          </a:solidFill>
-          <a:ln w="12700">
-            <a:solidFill>
-              <a:srgbClr val="D9E7F6"/>
-            </a:solidFill>
-            <a:prstDash val="solid"/>
-          </a:ln>
-          <a:effectLst>
-            <a:outerShdw blurRad="19050" dist="12700" dir="2700000" algn="bl" rotWithShape="0">
-              <a:srgbClr val="000000">
-                <a:alpha val="18000"/>
-              </a:srgbClr>
-            </a:outerShdw>
-          </a:effectLst>
-        </p:spPr>
-        <p:txBody>
-          <a:bodyPr/>
-          <a:lstStyle/>
-          <a:p>
-            <a:endParaRPr lang="ru-BY"/>
-          </a:p>
-        </p:txBody>
-      </p:sp>
-      <p:pic>
-        <p:nvPicPr>
-          <p:cNvPr id="34" name="Image 1" descr="preencoded.png">
-            <a:extLst>
-              <a:ext uri="{FF2B5EF4-FFF2-40B4-BE49-F238E27FC236}">
-                <a16:creationId xmlns:a16="http://schemas.microsoft.com/office/drawing/2014/main" id="{08F9971F-A448-0B3A-98F8-9F4F311B061C}"/>
-              </a:ext>
-            </a:extLst>
-          </p:cNvPr>
-          <p:cNvPicPr>
-            <a:picLocks noChangeAspect="1"/>
-          </p:cNvPicPr>
-          <p:nvPr/>
-        </p:nvPicPr>
-        <p:blipFill>
-          <a:blip r:embed="rId5">
-            <a:extLst>
-              <a:ext uri="{96DAC541-7B7A-43D3-8B79-37D633B846F1}">
-                <asvg:svgBlip xmlns:asvg="http://schemas.microsoft.com/office/drawing/2016/SVG/main" r:embed="rId6"/>
-              </a:ext>
-            </a:extLst>
-          </a:blip>
-          <a:stretch>
-            <a:fillRect/>
-          </a:stretch>
-        </p:blipFill>
-        <p:spPr>
-          <a:xfrm>
-            <a:off x="5449824" y="1970532"/>
-            <a:ext cx="877824" cy="365760"/>
-          </a:xfrm>
-          <a:prstGeom prst="rect">
-            <a:avLst/>
-          </a:prstGeom>
-        </p:spPr>
-      </p:pic>
-      <p:pic>
-        <p:nvPicPr>
-          <p:cNvPr id="35" name="Image 2" descr="preencoded.png">
-            <a:extLst>
-              <a:ext uri="{FF2B5EF4-FFF2-40B4-BE49-F238E27FC236}">
-                <a16:creationId xmlns:a16="http://schemas.microsoft.com/office/drawing/2014/main" id="{4D9EAFD5-1C8F-918B-F543-C8F2A50D385B}"/>
-              </a:ext>
-            </a:extLst>
-          </p:cNvPr>
-          <p:cNvPicPr>
-            <a:picLocks noChangeAspect="1"/>
-          </p:cNvPicPr>
-          <p:nvPr/>
-        </p:nvPicPr>
-        <p:blipFill>
-          <a:blip r:embed="rId7">
-            <a:extLst>
-              <a:ext uri="{96DAC541-7B7A-43D3-8B79-37D633B846F1}">
-                <asvg:svgBlip xmlns:asvg="http://schemas.microsoft.com/office/drawing/2016/SVG/main" r:embed="rId8"/>
-              </a:ext>
-            </a:extLst>
-          </a:blip>
-          <a:stretch>
-            <a:fillRect/>
-          </a:stretch>
-        </p:blipFill>
-        <p:spPr>
-          <a:xfrm>
-            <a:off x="5174361" y="2464308"/>
-            <a:ext cx="1437894" cy="310896"/>
-          </a:xfrm>
-          <a:prstGeom prst="rect">
-            <a:avLst/>
-          </a:prstGeom>
-        </p:spPr>
-      </p:pic>
-      <p:sp>
-        <p:nvSpPr>
-          <p:cNvPr id="36" name="Text 34">
-            <a:extLst>
-              <a:ext uri="{FF2B5EF4-FFF2-40B4-BE49-F238E27FC236}">
-                <a16:creationId xmlns:a16="http://schemas.microsoft.com/office/drawing/2014/main" id="{FA94AA41-58CA-410F-2855-D7574ABE67FF}"/>
-              </a:ext>
-            </a:extLst>
-          </p:cNvPr>
-          <p:cNvSpPr/>
-          <p:nvPr/>
-        </p:nvSpPr>
-        <p:spPr>
-          <a:xfrm>
-            <a:off x="4754880" y="2875788"/>
-            <a:ext cx="2286000" cy="201168"/>
-          </a:xfrm>
-          <a:prstGeom prst="rect">
-            <a:avLst/>
-          </a:prstGeom>
-          <a:noFill/>
-          <a:ln/>
-        </p:spPr>
-        <p:txBody>
-          <a:bodyPr wrap="square" lIns="0" tIns="0" rIns="0" bIns="0" rtlCol="0" anchor="ctr"/>
-          <a:lstStyle/>
-          <a:p>
-            <a:pPr marL="0" indent="0" algn="ctr">
-              <a:buNone/>
-            </a:pPr>
-            <a:r>
-              <a:rPr lang="en-US" sz="1250" b="1" dirty="0">
-                <a:solidFill>
-                  <a:srgbClr val="102038"/>
-                </a:solidFill>
-                <a:latin typeface="Inter" pitchFamily="34" charset="0"/>
-                <a:ea typeface="Inter" pitchFamily="34" charset="-122"/>
-                <a:cs typeface="Inter" pitchFamily="34" charset="-120"/>
-              </a:rPr>
-              <a:t>Унитарное преобразование</a:t>
-            </a:r>
-            <a:endParaRPr lang="en-US" sz="1250" dirty="0"/>
-          </a:p>
-        </p:txBody>
-      </p:sp>
-    </p:spTree>
-  </p:cSld>
-  <p:clrMapOvr>
-    <a:masterClrMapping/>
-  </p:clrMapOvr>
-</p:sld>
-</file>
-
-<file path=ppt/slides/slide8.xml><?xml version="1.0" encoding="utf-8"?>
-<p:sld xmlns:a="http://schemas.openxmlformats.org/drawingml/2006/main" xmlns:r="http://schemas.openxmlformats.org/officeDocument/2006/relationships" xmlns:p="http://schemas.openxmlformats.org/presentationml/2006/main">
-  <p:cSld name="Slide 8">
-    <p:bg>
-      <p:bgPr>
-        <a:solidFill>
-          <a:srgbClr val="061426"/>
-        </a:solidFill>
-        <a:effectLst/>
-      </p:bgPr>
-    </p:bg>
-    <p:spTree>
-      <p:nvGrpSpPr>
-        <p:cNvPr id="1" name=""/>
-        <p:cNvGrpSpPr/>
-        <p:nvPr/>
-      </p:nvGrpSpPr>
-      <p:grpSpPr>
-        <a:xfrm>
-          <a:off x="0" y="0"/>
-          <a:ext cx="0" cy="0"/>
-          <a:chOff x="0" y="0"/>
-          <a:chExt cx="0" cy="0"/>
-        </a:xfrm>
-      </p:grpSpPr>
-      <p:sp>
-        <p:nvSpPr>
-          <p:cNvPr id="2" name="Shape 0"/>
-          <p:cNvSpPr/>
-          <p:nvPr/>
-        </p:nvSpPr>
-        <p:spPr>
-          <a:xfrm>
-            <a:off x="8732520" y="411480"/>
-            <a:ext cx="2560320" cy="0"/>
-          </a:xfrm>
-          <a:prstGeom prst="line">
-            <a:avLst/>
-          </a:prstGeom>
-          <a:noFill/>
-          <a:ln w="12700">
-            <a:solidFill>
-              <a:srgbClr val="17395A"/>
-            </a:solidFill>
-            <a:prstDash val="solid"/>
-          </a:ln>
-        </p:spPr>
-        <p:txBody>
-          <a:bodyPr/>
-          <a:lstStyle/>
-          <a:p>
-            <a:endParaRPr lang="ru-BY"/>
-          </a:p>
-        </p:txBody>
-      </p:sp>
-      <p:sp>
-        <p:nvSpPr>
-          <p:cNvPr id="3" name="Shape 1"/>
-          <p:cNvSpPr/>
-          <p:nvPr/>
-        </p:nvSpPr>
-        <p:spPr>
-          <a:xfrm>
-            <a:off x="11292840" y="411480"/>
-            <a:ext cx="0" cy="1097280"/>
-          </a:xfrm>
-          <a:prstGeom prst="line">
-            <a:avLst/>
-          </a:prstGeom>
-          <a:noFill/>
-          <a:ln w="12700">
-            <a:solidFill>
-              <a:srgbClr val="17395A"/>
-            </a:solidFill>
-            <a:prstDash val="solid"/>
-          </a:ln>
-        </p:spPr>
-        <p:txBody>
-          <a:bodyPr/>
-          <a:lstStyle/>
-          <a:p>
-            <a:endParaRPr lang="ru-BY"/>
-          </a:p>
-        </p:txBody>
-      </p:sp>
-      <p:sp>
-        <p:nvSpPr>
-          <p:cNvPr id="4" name="Text 2"/>
-          <p:cNvSpPr/>
-          <p:nvPr/>
-        </p:nvSpPr>
-        <p:spPr>
-          <a:xfrm>
-            <a:off x="594360" y="219456"/>
-            <a:ext cx="1645920" cy="201168"/>
-          </a:xfrm>
-          <a:prstGeom prst="rect">
-            <a:avLst/>
-          </a:prstGeom>
-          <a:noFill/>
-          <a:ln/>
-        </p:spPr>
-        <p:txBody>
-          <a:bodyPr wrap="square" lIns="0" tIns="0" rIns="0" bIns="0" rtlCol="0" anchor="ctr"/>
-          <a:lstStyle/>
-          <a:p>
-            <a:pPr marL="0" indent="0">
-              <a:buNone/>
-            </a:pPr>
-            <a:r>
-              <a:rPr lang="en-US" sz="950" b="1" dirty="0">
-                <a:solidFill>
-                  <a:srgbClr val="2DD4FF"/>
-                </a:solidFill>
-                <a:latin typeface="Aptos" pitchFamily="34" charset="0"/>
-                <a:ea typeface="Aptos" pitchFamily="34" charset="-122"/>
-                <a:cs typeface="Aptos" pitchFamily="34" charset="-120"/>
-              </a:rPr>
-              <a:t>ПРИМЕР</a:t>
-            </a:r>
-            <a:endParaRPr lang="en-US" sz="950" dirty="0"/>
-          </a:p>
-        </p:txBody>
-      </p:sp>
-      <p:sp>
-        <p:nvSpPr>
-          <p:cNvPr id="5" name="Shape 3"/>
-          <p:cNvSpPr/>
-          <p:nvPr/>
-        </p:nvSpPr>
-        <p:spPr>
-          <a:xfrm>
-            <a:off x="576072" y="429768"/>
-            <a:ext cx="73152" cy="0"/>
-          </a:xfrm>
-          <a:prstGeom prst="line">
-            <a:avLst/>
-          </a:prstGeom>
-          <a:noFill/>
-          <a:ln w="25400">
-            <a:solidFill>
-              <a:srgbClr val="2DD4FF"/>
-            </a:solidFill>
-            <a:prstDash val="solid"/>
-          </a:ln>
-        </p:spPr>
-        <p:txBody>
-          <a:bodyPr/>
-          <a:lstStyle/>
-          <a:p>
-            <a:endParaRPr lang="ru-BY"/>
-          </a:p>
-        </p:txBody>
-      </p:sp>
-      <p:sp>
-        <p:nvSpPr>
-          <p:cNvPr id="6" name="Text 4"/>
-          <p:cNvSpPr/>
-          <p:nvPr/>
-        </p:nvSpPr>
-        <p:spPr>
-          <a:xfrm>
-            <a:off x="594360" y="475488"/>
-            <a:ext cx="7589520" cy="457200"/>
-          </a:xfrm>
-          <a:prstGeom prst="rect">
-            <a:avLst/>
-          </a:prstGeom>
-          <a:noFill/>
-          <a:ln/>
-        </p:spPr>
-        <p:txBody>
-          <a:bodyPr wrap="square" lIns="0" tIns="0" rIns="0" bIns="0" rtlCol="0" anchor="ctr"/>
-          <a:lstStyle/>
-          <a:p>
-            <a:pPr marL="0" indent="0">
-              <a:buNone/>
-            </a:pPr>
-            <a:r>
-              <a:rPr lang="en-US" sz="2300" b="1" dirty="0">
-                <a:solidFill>
-                  <a:srgbClr val="F7F7F3"/>
-                </a:solidFill>
-                <a:latin typeface="Aptos Display" pitchFamily="34" charset="0"/>
-                <a:ea typeface="Aptos Display" pitchFamily="34" charset="-122"/>
-                <a:cs typeface="Aptos Display" pitchFamily="34" charset="-120"/>
-              </a:rPr>
-              <a:t>Проверка на простом сигнале x[n] = [1, −1, 1, −1]</a:t>
-            </a:r>
-            <a:endParaRPr lang="en-US" sz="2300" dirty="0"/>
-          </a:p>
-        </p:txBody>
-      </p:sp>
-      <p:sp>
-        <p:nvSpPr>
-          <p:cNvPr id="7" name="Text 5"/>
-          <p:cNvSpPr/>
-          <p:nvPr/>
-        </p:nvSpPr>
-        <p:spPr>
-          <a:xfrm>
-            <a:off x="11521440" y="6473952"/>
-            <a:ext cx="182880" cy="164592"/>
-          </a:xfrm>
-          <a:prstGeom prst="rect">
-            <a:avLst/>
-          </a:prstGeom>
-          <a:noFill/>
-          <a:ln/>
-        </p:spPr>
-        <p:txBody>
-          <a:bodyPr wrap="square" lIns="0" tIns="0" rIns="0" bIns="0" rtlCol="0" anchor="ctr"/>
-          <a:lstStyle/>
-          <a:p>
-            <a:pPr marL="0" indent="0" algn="r">
-              <a:buNone/>
-            </a:pPr>
-            <a:r>
-              <a:rPr lang="en-US" sz="850" dirty="0">
-                <a:solidFill>
-                  <a:srgbClr val="9FB4C9"/>
-                </a:solidFill>
-                <a:latin typeface="Aptos" pitchFamily="34" charset="0"/>
-                <a:ea typeface="Aptos" pitchFamily="34" charset="-122"/>
-                <a:cs typeface="Aptos" pitchFamily="34" charset="-120"/>
-              </a:rPr>
-              <a:t>8</a:t>
-            </a:r>
-            <a:endParaRPr lang="en-US" sz="850" dirty="0"/>
-          </a:p>
-        </p:txBody>
-      </p:sp>
-      <p:sp>
-        <p:nvSpPr>
-          <p:cNvPr id="8" name="Shape 6"/>
-          <p:cNvSpPr/>
-          <p:nvPr/>
-        </p:nvSpPr>
-        <p:spPr>
-          <a:xfrm>
-            <a:off x="658368" y="1188720"/>
-            <a:ext cx="10972800" cy="4572000"/>
-          </a:xfrm>
-          <a:prstGeom prst="roundRect">
-            <a:avLst>
-              <a:gd name="adj" fmla="val 3600"/>
-            </a:avLst>
-          </a:prstGeom>
-          <a:solidFill>
-            <a:srgbClr val="0A1F38"/>
-          </a:solidFill>
-          <a:ln w="12700">
-            <a:solidFill>
-              <a:srgbClr val="17395A"/>
-            </a:solidFill>
-            <a:prstDash val="solid"/>
-          </a:ln>
-        </p:spPr>
-        <p:txBody>
-          <a:bodyPr/>
-          <a:lstStyle/>
-          <a:p>
-            <a:endParaRPr lang="ru-BY"/>
-          </a:p>
-        </p:txBody>
-      </p:sp>
-      <p:sp>
-        <p:nvSpPr>
-          <p:cNvPr id="9" name="Shape 7"/>
-          <p:cNvSpPr/>
-          <p:nvPr/>
-        </p:nvSpPr>
-        <p:spPr>
-          <a:xfrm>
-            <a:off x="868680" y="1508760"/>
-            <a:ext cx="3108960" cy="749808"/>
-          </a:xfrm>
-          <a:prstGeom prst="roundRect">
-            <a:avLst>
-              <a:gd name="adj" fmla="val 14634"/>
-            </a:avLst>
-          </a:prstGeom>
-          <a:solidFill>
-            <a:srgbClr val="EDEBE6"/>
-          </a:solidFill>
-          <a:ln w="12700">
-            <a:solidFill>
-              <a:srgbClr val="EDEBE6"/>
-            </a:solidFill>
-            <a:prstDash val="solid"/>
-          </a:ln>
-          <a:effectLst>
-            <a:outerShdw blurRad="12700" dist="6350" dir="2700000" algn="bl" rotWithShape="0">
-              <a:srgbClr val="000000">
-                <a:alpha val="18000"/>
-              </a:srgbClr>
-            </a:outerShdw>
-          </a:effectLst>
-        </p:spPr>
-        <p:txBody>
-          <a:bodyPr/>
-          <a:lstStyle/>
-          <a:p>
-            <a:endParaRPr lang="ru-BY"/>
-          </a:p>
-        </p:txBody>
-      </p:sp>
-      <p:pic>
-        <p:nvPicPr>
-          <p:cNvPr id="10" name="Image 0" descr="preencoded.png"/>
-          <p:cNvPicPr>
-            <a:picLocks noChangeAspect="1"/>
-          </p:cNvPicPr>
-          <p:nvPr/>
-        </p:nvPicPr>
-        <p:blipFill>
-          <a:blip r:embed="rId3">
-            <a:extLst>
-              <a:ext uri="{96DAC541-7B7A-43D3-8B79-37D633B846F1}">
-                <asvg:svgBlip xmlns:asvg="http://schemas.microsoft.com/office/drawing/2016/SVG/main" r:embed="rId4"/>
-              </a:ext>
-            </a:extLst>
-          </a:blip>
-          <a:stretch>
-            <a:fillRect/>
-          </a:stretch>
-        </p:blipFill>
-        <p:spPr>
-          <a:xfrm>
-            <a:off x="1005840" y="1673352"/>
-            <a:ext cx="2834640" cy="493776"/>
-          </a:xfrm>
-          <a:prstGeom prst="rect">
-            <a:avLst/>
-          </a:prstGeom>
-        </p:spPr>
-      </p:pic>
-      <p:sp>
-        <p:nvSpPr>
-          <p:cNvPr id="11" name="Shape 8"/>
-          <p:cNvSpPr/>
-          <p:nvPr/>
-        </p:nvSpPr>
-        <p:spPr>
-          <a:xfrm>
-            <a:off x="868680" y="2514600"/>
-            <a:ext cx="3154680" cy="2148840"/>
-          </a:xfrm>
-          <a:prstGeom prst="roundRect">
-            <a:avLst>
-              <a:gd name="adj" fmla="val 7660"/>
+              <a:gd name="adj" fmla="val 8780"/>
             </a:avLst>
           </a:prstGeom>
           <a:solidFill>
@@ -12313,14 +13793,14 @@
       </p:sp>
       <p:sp>
         <p:nvSpPr>
-          <p:cNvPr id="12" name="Text 9"/>
-          <p:cNvSpPr/>
-          <p:nvPr/>
-        </p:nvSpPr>
-        <p:spPr>
-          <a:xfrm>
-            <a:off x="1097280" y="2724912"/>
-            <a:ext cx="1645920" cy="182880"/>
+          <p:cNvPr id="38" name="Text 36"/>
+          <p:cNvSpPr/>
+          <p:nvPr/>
+        </p:nvSpPr>
+        <p:spPr>
+          <a:xfrm>
+            <a:off x="7388352" y="3456432"/>
+            <a:ext cx="2651760" cy="356616"/>
           </a:xfrm>
           <a:prstGeom prst="rect">
             <a:avLst/>
@@ -12336,27 +13816,27 @@
               <a:buNone/>
             </a:pPr>
             <a:r>
-              <a:rPr lang="en-US" sz="1350" b="1" dirty="0">
-                <a:solidFill>
-                  <a:srgbClr val="2DD4FF"/>
-                </a:solidFill>
-              </a:rPr>
-              <a:t>Во временной области</a:t>
-            </a:r>
-            <a:endParaRPr lang="en-US" sz="1350" dirty="0"/>
-          </a:p>
-        </p:txBody>
-      </p:sp>
-      <p:sp>
-        <p:nvSpPr>
-          <p:cNvPr id="13" name="Text 10"/>
-          <p:cNvSpPr/>
-          <p:nvPr/>
-        </p:nvSpPr>
-        <p:spPr>
-          <a:xfrm>
-            <a:off x="1097280" y="3154680"/>
-            <a:ext cx="2377440" cy="237744"/>
+              <a:rPr lang="en-US" sz="1400" b="1" dirty="0">
+                <a:solidFill>
+                  <a:srgbClr val="F7F7F3"/>
+                </a:solidFill>
+              </a:rPr>
+              <a:t>Поэтому в реальных аудиосервисах</a:t>
+            </a:r>
+            <a:endParaRPr lang="en-US" sz="1400" dirty="0"/>
+          </a:p>
+        </p:txBody>
+      </p:sp>
+      <p:sp>
+        <p:nvSpPr>
+          <p:cNvPr id="39" name="Text 37"/>
+          <p:cNvSpPr/>
+          <p:nvPr/>
+        </p:nvSpPr>
+        <p:spPr>
+          <a:xfrm>
+            <a:off x="7388352" y="4023360"/>
+            <a:ext cx="3657600" cy="877824"/>
           </a:xfrm>
           <a:prstGeom prst="rect">
             <a:avLst/>
@@ -12372,1450 +13852,14 @@
               <a:buNone/>
             </a:pPr>
             <a:r>
-              <a:rPr lang="en-US" sz="1750" dirty="0">
-                <a:solidFill>
-                  <a:srgbClr val="F7F7F3"/>
-                </a:solidFill>
-              </a:rPr>
-              <a:t>1² + (−1)² + 1² + (−1)² = 4</a:t>
-            </a:r>
-            <a:endParaRPr lang="en-US" sz="1750" dirty="0"/>
-          </a:p>
-        </p:txBody>
-      </p:sp>
-      <p:sp>
-        <p:nvSpPr>
-          <p:cNvPr id="14" name="Text 11"/>
-          <p:cNvSpPr/>
-          <p:nvPr/>
-        </p:nvSpPr>
-        <p:spPr>
-          <a:xfrm>
-            <a:off x="1097280" y="3822192"/>
-            <a:ext cx="1005840" cy="182880"/>
-          </a:xfrm>
-          <a:prstGeom prst="rect">
-            <a:avLst/>
-          </a:prstGeom>
-          <a:noFill/>
-          <a:ln/>
-        </p:spPr>
-        <p:txBody>
-          <a:bodyPr wrap="square" lIns="0" tIns="0" rIns="0" bIns="0" rtlCol="0" anchor="ctr"/>
-          <a:lstStyle/>
-          <a:p>
-            <a:pPr marL="0" indent="0">
-              <a:buNone/>
-            </a:pPr>
-            <a:r>
-              <a:rPr lang="en-US" sz="1600" b="1" dirty="0">
-                <a:solidFill>
-                  <a:srgbClr val="9FB4C9"/>
-                </a:solidFill>
-              </a:rPr>
-              <a:t>Eₜ = 4</a:t>
-            </a:r>
-            <a:endParaRPr lang="en-US" sz="1600" dirty="0"/>
-          </a:p>
-        </p:txBody>
-      </p:sp>
-      <p:sp>
-        <p:nvSpPr>
-          <p:cNvPr id="15" name="Shape 12"/>
-          <p:cNvSpPr/>
-          <p:nvPr/>
-        </p:nvSpPr>
-        <p:spPr>
-          <a:xfrm>
-            <a:off x="4315968" y="1965960"/>
-            <a:ext cx="2788920" cy="2743200"/>
-          </a:xfrm>
-          <a:prstGeom prst="roundRect">
-            <a:avLst>
-              <a:gd name="adj" fmla="val 4000"/>
-            </a:avLst>
-          </a:prstGeom>
-          <a:solidFill>
-            <a:srgbClr val="EDEBE6"/>
-          </a:solidFill>
-          <a:ln w="12700">
-            <a:solidFill>
-              <a:srgbClr val="EDEBE6"/>
-            </a:solidFill>
-            <a:prstDash val="solid"/>
-          </a:ln>
-        </p:spPr>
-        <p:txBody>
-          <a:bodyPr/>
-          <a:lstStyle/>
-          <a:p>
-            <a:endParaRPr lang="ru-BY"/>
-          </a:p>
-        </p:txBody>
-      </p:sp>
-      <p:sp>
-        <p:nvSpPr>
-          <p:cNvPr id="16" name="Text 13"/>
-          <p:cNvSpPr/>
-          <p:nvPr/>
-        </p:nvSpPr>
-        <p:spPr>
-          <a:xfrm>
-            <a:off x="4572000" y="2240280"/>
-            <a:ext cx="1463040" cy="182880"/>
-          </a:xfrm>
-          <a:prstGeom prst="rect">
-            <a:avLst/>
-          </a:prstGeom>
-          <a:noFill/>
-          <a:ln/>
-        </p:spPr>
-        <p:txBody>
-          <a:bodyPr wrap="square" lIns="0" tIns="0" rIns="0" bIns="0" rtlCol="0" anchor="ctr"/>
-          <a:lstStyle/>
-          <a:p>
-            <a:pPr marL="0" indent="0">
-              <a:buNone/>
-            </a:pPr>
-            <a:r>
-              <a:rPr lang="en-US" sz="1350" b="1" dirty="0">
-                <a:solidFill>
-                  <a:srgbClr val="334155"/>
-                </a:solidFill>
-              </a:rPr>
-              <a:t>Коэффициенты ДПФ</a:t>
-            </a:r>
-            <a:endParaRPr lang="en-US" sz="1350" dirty="0"/>
-          </a:p>
-        </p:txBody>
-      </p:sp>
-      <p:sp>
-        <p:nvSpPr>
-          <p:cNvPr id="17" name="Text 14"/>
-          <p:cNvSpPr/>
-          <p:nvPr/>
-        </p:nvSpPr>
-        <p:spPr>
-          <a:xfrm>
-            <a:off x="4572000" y="2651760"/>
-            <a:ext cx="1371600" cy="1097280"/>
-          </a:xfrm>
-          <a:prstGeom prst="rect">
-            <a:avLst/>
-          </a:prstGeom>
-          <a:noFill/>
-          <a:ln/>
-        </p:spPr>
-        <p:txBody>
-          <a:bodyPr wrap="square" lIns="0" tIns="0" rIns="0" bIns="0" rtlCol="0" anchor="ctr"/>
-          <a:lstStyle/>
-          <a:p>
-            <a:pPr marL="0" indent="0">
-              <a:buNone/>
-            </a:pPr>
-            <a:r>
-              <a:rPr lang="en-US" sz="1700" b="1" dirty="0">
-                <a:solidFill>
-                  <a:srgbClr val="111827"/>
-                </a:solidFill>
-              </a:rPr>
-              <a:t>X[0] = 0</a:t>
-            </a:r>
-            <a:endParaRPr lang="en-US" sz="1700" dirty="0"/>
-          </a:p>
-          <a:p>
-            <a:pPr marL="0" indent="0">
-              <a:buNone/>
-            </a:pPr>
-            <a:r>
-              <a:rPr lang="en-US" sz="1700" b="1" dirty="0">
-                <a:solidFill>
-                  <a:srgbClr val="111827"/>
-                </a:solidFill>
-              </a:rPr>
-              <a:t>X[1] = 0</a:t>
-            </a:r>
-            <a:endParaRPr lang="en-US" sz="1700" dirty="0"/>
-          </a:p>
-          <a:p>
-            <a:pPr marL="0" indent="0">
-              <a:buNone/>
-            </a:pPr>
-            <a:r>
-              <a:rPr lang="en-US" sz="1700" b="1" dirty="0">
-                <a:solidFill>
-                  <a:srgbClr val="111827"/>
-                </a:solidFill>
-              </a:rPr>
-              <a:t>X[2] = 4</a:t>
-            </a:r>
-            <a:endParaRPr lang="en-US" sz="1700" dirty="0"/>
-          </a:p>
-          <a:p>
-            <a:pPr marL="0" indent="0">
-              <a:buNone/>
-            </a:pPr>
-            <a:r>
-              <a:rPr lang="en-US" sz="1700" b="1" dirty="0">
-                <a:solidFill>
-                  <a:srgbClr val="111827"/>
-                </a:solidFill>
-              </a:rPr>
-              <a:t>X[3] = 0</a:t>
-            </a:r>
-            <a:endParaRPr lang="en-US" sz="1700" dirty="0"/>
-          </a:p>
-        </p:txBody>
-      </p:sp>
-      <p:sp>
-        <p:nvSpPr>
-          <p:cNvPr id="18" name="Text 15"/>
-          <p:cNvSpPr/>
-          <p:nvPr/>
-        </p:nvSpPr>
-        <p:spPr>
-          <a:xfrm>
-            <a:off x="4572000" y="4114800"/>
-            <a:ext cx="1965960" cy="310896"/>
-          </a:xfrm>
-          <a:prstGeom prst="rect">
-            <a:avLst/>
-          </a:prstGeom>
-          <a:noFill/>
-          <a:ln/>
-        </p:spPr>
-        <p:txBody>
-          <a:bodyPr wrap="square" lIns="0" tIns="0" rIns="0" bIns="0" rtlCol="0" anchor="ctr"/>
-          <a:lstStyle/>
-          <a:p>
-            <a:pPr marL="0" indent="0">
-              <a:buNone/>
-            </a:pPr>
-            <a:r>
-              <a:rPr lang="en-US" sz="1150" dirty="0">
-                <a:solidFill>
-                  <a:srgbClr val="475569"/>
-                </a:solidFill>
-              </a:rPr>
-              <a:t>вся энергия сосредоточена в одной гармонике</a:t>
-            </a:r>
-            <a:endParaRPr lang="en-US" sz="1150" dirty="0"/>
-          </a:p>
-        </p:txBody>
-      </p:sp>
-      <p:sp>
-        <p:nvSpPr>
-          <p:cNvPr id="19" name="Shape 16"/>
-          <p:cNvSpPr/>
-          <p:nvPr/>
-        </p:nvSpPr>
-        <p:spPr>
-          <a:xfrm>
-            <a:off x="7388352" y="2514600"/>
-            <a:ext cx="3154680" cy="2148840"/>
-          </a:xfrm>
-          <a:prstGeom prst="roundRect">
-            <a:avLst>
-              <a:gd name="adj" fmla="val 7660"/>
-            </a:avLst>
-          </a:prstGeom>
-          <a:solidFill>
-            <a:srgbClr val="0D2947"/>
-          </a:solidFill>
-          <a:ln w="12700">
-            <a:solidFill>
-              <a:srgbClr val="17395A"/>
-            </a:solidFill>
-            <a:prstDash val="solid"/>
-          </a:ln>
-        </p:spPr>
-        <p:txBody>
-          <a:bodyPr/>
-          <a:lstStyle/>
-          <a:p>
-            <a:endParaRPr lang="ru-BY"/>
-          </a:p>
-        </p:txBody>
-      </p:sp>
-      <p:sp>
-        <p:nvSpPr>
-          <p:cNvPr id="20" name="Text 17"/>
-          <p:cNvSpPr/>
-          <p:nvPr/>
-        </p:nvSpPr>
-        <p:spPr>
-          <a:xfrm>
-            <a:off x="7607808" y="2724912"/>
-            <a:ext cx="1783080" cy="182880"/>
-          </a:xfrm>
-          <a:prstGeom prst="rect">
-            <a:avLst/>
-          </a:prstGeom>
-          <a:noFill/>
-          <a:ln/>
-        </p:spPr>
-        <p:txBody>
-          <a:bodyPr wrap="square" lIns="0" tIns="0" rIns="0" bIns="0" rtlCol="0" anchor="ctr"/>
-          <a:lstStyle/>
-          <a:p>
-            <a:pPr marL="0" indent="0">
-              <a:buNone/>
-            </a:pPr>
-            <a:r>
-              <a:rPr lang="en-US" sz="1350" b="1" dirty="0">
-                <a:solidFill>
-                  <a:srgbClr val="FFB14A"/>
-                </a:solidFill>
-              </a:rPr>
-              <a:t>В частотной области</a:t>
-            </a:r>
-            <a:endParaRPr lang="en-US" sz="1350" dirty="0"/>
-          </a:p>
-        </p:txBody>
-      </p:sp>
-      <p:sp>
-        <p:nvSpPr>
-          <p:cNvPr id="21" name="Text 18"/>
-          <p:cNvSpPr/>
-          <p:nvPr/>
-        </p:nvSpPr>
-        <p:spPr>
-          <a:xfrm>
-            <a:off x="7607808" y="3154680"/>
-            <a:ext cx="2560320" cy="237744"/>
-          </a:xfrm>
-          <a:prstGeom prst="rect">
-            <a:avLst/>
-          </a:prstGeom>
-          <a:noFill/>
-          <a:ln/>
-        </p:spPr>
-        <p:txBody>
-          <a:bodyPr wrap="square" lIns="0" tIns="0" rIns="0" bIns="0" rtlCol="0" anchor="ctr"/>
-          <a:lstStyle/>
-          <a:p>
-            <a:pPr marL="0" indent="0">
-              <a:buNone/>
-            </a:pPr>
-            <a:r>
-              <a:rPr lang="en-US" sz="1750" dirty="0">
-                <a:solidFill>
-                  <a:srgbClr val="F7F7F3"/>
-                </a:solidFill>
-              </a:rPr>
-              <a:t>(1/4)·(0 + 0 + 16 + 0) = 4</a:t>
-            </a:r>
-            <a:endParaRPr lang="en-US" sz="1750" dirty="0"/>
-          </a:p>
-        </p:txBody>
-      </p:sp>
-      <p:sp>
-        <p:nvSpPr>
-          <p:cNvPr id="22" name="Text 19"/>
-          <p:cNvSpPr/>
-          <p:nvPr/>
-        </p:nvSpPr>
-        <p:spPr>
-          <a:xfrm>
-            <a:off x="7607808" y="3822192"/>
-            <a:ext cx="1005840" cy="182880"/>
-          </a:xfrm>
-          <a:prstGeom prst="rect">
-            <a:avLst/>
-          </a:prstGeom>
-          <a:noFill/>
-          <a:ln/>
-        </p:spPr>
-        <p:txBody>
-          <a:bodyPr wrap="square" lIns="0" tIns="0" rIns="0" bIns="0" rtlCol="0" anchor="ctr"/>
-          <a:lstStyle/>
-          <a:p>
-            <a:pPr marL="0" indent="0">
-              <a:buNone/>
-            </a:pPr>
-            <a:r>
-              <a:rPr lang="en-US" sz="1600" b="1" dirty="0">
-                <a:solidFill>
-                  <a:srgbClr val="9FB4C9"/>
-                </a:solidFill>
-              </a:rPr>
-              <a:t>E_f = 4</a:t>
-            </a:r>
-            <a:endParaRPr lang="en-US" sz="1600" dirty="0"/>
-          </a:p>
-        </p:txBody>
-      </p:sp>
-      <p:sp>
-        <p:nvSpPr>
-          <p:cNvPr id="23" name="Text 20"/>
-          <p:cNvSpPr/>
-          <p:nvPr/>
-        </p:nvSpPr>
-        <p:spPr>
-          <a:xfrm>
-            <a:off x="1078992" y="5010912"/>
-            <a:ext cx="9692640" cy="274320"/>
-          </a:xfrm>
-          <a:prstGeom prst="rect">
-            <a:avLst/>
-          </a:prstGeom>
-          <a:noFill/>
-          <a:ln/>
-        </p:spPr>
-        <p:txBody>
-          <a:bodyPr wrap="square" lIns="0" tIns="0" rIns="0" bIns="0" rtlCol="0" anchor="ctr"/>
-          <a:lstStyle/>
-          <a:p>
-            <a:pPr algn="ctr"/>
-            <a:r>
-              <a:rPr lang="en-US" sz="1400" dirty="0">
+              <a:rPr lang="en-US" sz="1260" dirty="0">
                 <a:solidFill>
                   <a:srgbClr val="D9E6F2"/>
                 </a:solidFill>
               </a:rPr>
-              <a:t>Итог: Eₜ = E_f = 4 — теорема подтверждается прямым </a:t>
-            </a:r>
-            <a:r>
-              <a:rPr lang="en-US" sz="1400" dirty="0" err="1">
-                <a:solidFill>
-                  <a:srgbClr val="D9E6F2"/>
-                </a:solidFill>
-              </a:rPr>
-              <a:t>расчётом</a:t>
-            </a:r>
-            <a:r>
-              <a:rPr lang="en-US" sz="1400" dirty="0">
-                <a:solidFill>
-                  <a:srgbClr val="D9E6F2"/>
-                </a:solidFill>
-              </a:rPr>
-              <a:t>.</a:t>
-            </a:r>
-            <a:br>
-              <a:rPr lang="ru-RU" sz="1400" dirty="0">
-                <a:solidFill>
-                  <a:srgbClr val="D9E6F2"/>
-                </a:solidFill>
-              </a:rPr>
-            </a:br>
-            <a:r>
-              <a:rPr lang="ru-RU" sz="1400" dirty="0">
-                <a:solidFill>
-                  <a:srgbClr val="D9E6F2"/>
-                </a:solidFill>
-              </a:rPr>
-              <a:t>Пример показывает, что энергия может собраться  в одной частоте</a:t>
-            </a:r>
-            <a:endParaRPr lang="en-US" sz="1400" dirty="0"/>
-          </a:p>
-        </p:txBody>
-      </p:sp>
-    </p:spTree>
-  </p:cSld>
-  <p:clrMapOvr>
-    <a:masterClrMapping/>
-  </p:clrMapOvr>
-</p:sld>
-</file>
-
-<file path=ppt/slides/slide9.xml><?xml version="1.0" encoding="utf-8"?>
-<p:sld xmlns:a="http://schemas.openxmlformats.org/drawingml/2006/main" xmlns:r="http://schemas.openxmlformats.org/officeDocument/2006/relationships" xmlns:p="http://schemas.openxmlformats.org/presentationml/2006/main">
-  <p:cSld name="Slide 9">
-    <p:bg>
-      <p:bgPr>
-        <a:solidFill>
-          <a:srgbClr val="061426"/>
-        </a:solidFill>
-        <a:effectLst/>
-      </p:bgPr>
-    </p:bg>
-    <p:spTree>
-      <p:nvGrpSpPr>
-        <p:cNvPr id="1" name=""/>
-        <p:cNvGrpSpPr/>
-        <p:nvPr/>
-      </p:nvGrpSpPr>
-      <p:grpSpPr>
-        <a:xfrm>
-          <a:off x="0" y="0"/>
-          <a:ext cx="0" cy="0"/>
-          <a:chOff x="0" y="0"/>
-          <a:chExt cx="0" cy="0"/>
-        </a:xfrm>
-      </p:grpSpPr>
-      <p:sp>
-        <p:nvSpPr>
-          <p:cNvPr id="2" name="Shape 0"/>
-          <p:cNvSpPr/>
-          <p:nvPr/>
-        </p:nvSpPr>
-        <p:spPr>
-          <a:xfrm>
-            <a:off x="8732520" y="411480"/>
-            <a:ext cx="2560320" cy="0"/>
-          </a:xfrm>
-          <a:prstGeom prst="line">
-            <a:avLst/>
-          </a:prstGeom>
-          <a:noFill/>
-          <a:ln w="12700">
-            <a:solidFill>
-              <a:srgbClr val="17395A"/>
-            </a:solidFill>
-            <a:prstDash val="solid"/>
-          </a:ln>
-        </p:spPr>
-        <p:txBody>
-          <a:bodyPr/>
-          <a:lstStyle/>
-          <a:p>
-            <a:endParaRPr lang="ru-BY"/>
-          </a:p>
-        </p:txBody>
-      </p:sp>
-      <p:sp>
-        <p:nvSpPr>
-          <p:cNvPr id="3" name="Shape 1"/>
-          <p:cNvSpPr/>
-          <p:nvPr/>
-        </p:nvSpPr>
-        <p:spPr>
-          <a:xfrm>
-            <a:off x="11292840" y="411480"/>
-            <a:ext cx="0" cy="1097280"/>
-          </a:xfrm>
-          <a:prstGeom prst="line">
-            <a:avLst/>
-          </a:prstGeom>
-          <a:noFill/>
-          <a:ln w="12700">
-            <a:solidFill>
-              <a:srgbClr val="17395A"/>
-            </a:solidFill>
-            <a:prstDash val="solid"/>
-          </a:ln>
-        </p:spPr>
-        <p:txBody>
-          <a:bodyPr/>
-          <a:lstStyle/>
-          <a:p>
-            <a:endParaRPr lang="ru-BY"/>
-          </a:p>
-        </p:txBody>
-      </p:sp>
-      <p:sp>
-        <p:nvSpPr>
-          <p:cNvPr id="4" name="Text 2"/>
-          <p:cNvSpPr/>
-          <p:nvPr/>
-        </p:nvSpPr>
-        <p:spPr>
-          <a:xfrm>
-            <a:off x="594360" y="219456"/>
-            <a:ext cx="1645920" cy="201168"/>
-          </a:xfrm>
-          <a:prstGeom prst="rect">
-            <a:avLst/>
-          </a:prstGeom>
-          <a:noFill/>
-          <a:ln/>
-        </p:spPr>
-        <p:txBody>
-          <a:bodyPr wrap="square" lIns="0" tIns="0" rIns="0" bIns="0" rtlCol="0" anchor="ctr"/>
-          <a:lstStyle/>
-          <a:p>
-            <a:pPr marL="0" indent="0">
-              <a:buNone/>
-            </a:pPr>
-            <a:r>
-              <a:rPr lang="en-US" sz="950" b="1" dirty="0">
-                <a:solidFill>
-                  <a:srgbClr val="2DD4FF"/>
-                </a:solidFill>
-                <a:latin typeface="Aptos" pitchFamily="34" charset="0"/>
-                <a:ea typeface="Aptos" pitchFamily="34" charset="-122"/>
-                <a:cs typeface="Aptos" pitchFamily="34" charset="-120"/>
-              </a:rPr>
-              <a:t>ПРАКТИЧЕСКАЯ РОЛЬ</a:t>
-            </a:r>
-            <a:endParaRPr lang="en-US" sz="950" dirty="0"/>
-          </a:p>
-        </p:txBody>
-      </p:sp>
-      <p:sp>
-        <p:nvSpPr>
-          <p:cNvPr id="5" name="Shape 3"/>
-          <p:cNvSpPr/>
-          <p:nvPr/>
-        </p:nvSpPr>
-        <p:spPr>
-          <a:xfrm>
-            <a:off x="576072" y="429768"/>
-            <a:ext cx="73152" cy="0"/>
-          </a:xfrm>
-          <a:prstGeom prst="line">
-            <a:avLst/>
-          </a:prstGeom>
-          <a:noFill/>
-          <a:ln w="25400">
-            <a:solidFill>
-              <a:srgbClr val="2DD4FF"/>
-            </a:solidFill>
-            <a:prstDash val="solid"/>
-          </a:ln>
-        </p:spPr>
-        <p:txBody>
-          <a:bodyPr/>
-          <a:lstStyle/>
-          <a:p>
-            <a:endParaRPr lang="ru-BY"/>
-          </a:p>
-        </p:txBody>
-      </p:sp>
-      <p:sp>
-        <p:nvSpPr>
-          <p:cNvPr id="6" name="Text 4"/>
-          <p:cNvSpPr/>
-          <p:nvPr/>
-        </p:nvSpPr>
-        <p:spPr>
-          <a:xfrm>
-            <a:off x="594360" y="475488"/>
-            <a:ext cx="7589520" cy="457200"/>
-          </a:xfrm>
-          <a:prstGeom prst="rect">
-            <a:avLst/>
-          </a:prstGeom>
-          <a:noFill/>
-          <a:ln/>
-        </p:spPr>
-        <p:txBody>
-          <a:bodyPr wrap="square" lIns="0" tIns="0" rIns="0" bIns="0" rtlCol="0" anchor="ctr"/>
-          <a:lstStyle/>
-          <a:p>
-            <a:pPr marL="0" indent="0">
-              <a:buNone/>
-            </a:pPr>
-            <a:r>
-              <a:rPr lang="en-US" sz="2300" b="1" dirty="0">
-                <a:solidFill>
-                  <a:srgbClr val="F7F7F3"/>
-                </a:solidFill>
-                <a:latin typeface="Aptos Display" pitchFamily="34" charset="0"/>
-                <a:ea typeface="Aptos Display" pitchFamily="34" charset="-122"/>
-                <a:cs typeface="Aptos Display" pitchFamily="34" charset="-120"/>
-              </a:rPr>
-              <a:t>Зачем теорема нужна в вычислительных системах</a:t>
-            </a:r>
-            <a:endParaRPr lang="en-US" sz="2300" dirty="0"/>
-          </a:p>
-        </p:txBody>
-      </p:sp>
-      <p:sp>
-        <p:nvSpPr>
-          <p:cNvPr id="7" name="Text 5"/>
-          <p:cNvSpPr/>
-          <p:nvPr/>
-        </p:nvSpPr>
-        <p:spPr>
-          <a:xfrm>
-            <a:off x="11521440" y="6473952"/>
-            <a:ext cx="182880" cy="164592"/>
-          </a:xfrm>
-          <a:prstGeom prst="rect">
-            <a:avLst/>
-          </a:prstGeom>
-          <a:noFill/>
-          <a:ln/>
-        </p:spPr>
-        <p:txBody>
-          <a:bodyPr wrap="square" lIns="0" tIns="0" rIns="0" bIns="0" rtlCol="0" anchor="ctr"/>
-          <a:lstStyle/>
-          <a:p>
-            <a:pPr marL="0" indent="0" algn="r">
-              <a:buNone/>
-            </a:pPr>
-            <a:r>
-              <a:rPr lang="en-US" sz="850" dirty="0">
-                <a:solidFill>
-                  <a:srgbClr val="9FB4C9"/>
-                </a:solidFill>
-                <a:latin typeface="Aptos" pitchFamily="34" charset="0"/>
-                <a:ea typeface="Aptos" pitchFamily="34" charset="-122"/>
-                <a:cs typeface="Aptos" pitchFamily="34" charset="-120"/>
-              </a:rPr>
-              <a:t>9</a:t>
-            </a:r>
-            <a:endParaRPr lang="en-US" sz="850" dirty="0"/>
-          </a:p>
-        </p:txBody>
-      </p:sp>
-      <p:sp>
-        <p:nvSpPr>
-          <p:cNvPr id="8" name="Shape 6"/>
-          <p:cNvSpPr/>
-          <p:nvPr/>
-        </p:nvSpPr>
-        <p:spPr>
-          <a:xfrm>
-            <a:off x="658368" y="1234440"/>
-            <a:ext cx="10972800" cy="4526280"/>
-          </a:xfrm>
-          <a:prstGeom prst="roundRect">
-            <a:avLst>
-              <a:gd name="adj" fmla="val 3636"/>
-            </a:avLst>
-          </a:prstGeom>
-          <a:solidFill>
-            <a:srgbClr val="0A1F38"/>
-          </a:solidFill>
-          <a:ln w="12700">
-            <a:solidFill>
-              <a:srgbClr val="17395A"/>
-            </a:solidFill>
-            <a:prstDash val="solid"/>
-          </a:ln>
-        </p:spPr>
-        <p:txBody>
-          <a:bodyPr/>
-          <a:lstStyle/>
-          <a:p>
-            <a:endParaRPr lang="ru-BY"/>
-          </a:p>
-        </p:txBody>
-      </p:sp>
-      <p:sp>
-        <p:nvSpPr>
-          <p:cNvPr id="9" name="Shape 7"/>
-          <p:cNvSpPr/>
-          <p:nvPr/>
-        </p:nvSpPr>
-        <p:spPr>
-          <a:xfrm>
-            <a:off x="896112" y="1517904"/>
-            <a:ext cx="1097280" cy="256032"/>
-          </a:xfrm>
-          <a:prstGeom prst="roundRect">
-            <a:avLst>
-              <a:gd name="adj" fmla="val 42857"/>
-            </a:avLst>
-          </a:prstGeom>
-          <a:solidFill>
-            <a:srgbClr val="2DD4FF"/>
-          </a:solidFill>
-          <a:ln w="12700">
-            <a:solidFill>
-              <a:srgbClr val="2DD4FF"/>
-            </a:solidFill>
-            <a:prstDash val="solid"/>
-          </a:ln>
-        </p:spPr>
-        <p:txBody>
-          <a:bodyPr/>
-          <a:lstStyle/>
-          <a:p>
-            <a:endParaRPr lang="ru-BY"/>
-          </a:p>
-        </p:txBody>
-      </p:sp>
-      <p:sp>
-        <p:nvSpPr>
-          <p:cNvPr id="10" name="Text 8"/>
-          <p:cNvSpPr/>
-          <p:nvPr/>
-        </p:nvSpPr>
-        <p:spPr>
-          <a:xfrm>
-            <a:off x="941832" y="1536192"/>
-            <a:ext cx="1005840" cy="182880"/>
-          </a:xfrm>
-          <a:prstGeom prst="rect">
-            <a:avLst/>
-          </a:prstGeom>
-          <a:noFill/>
-          <a:ln/>
-        </p:spPr>
-        <p:txBody>
-          <a:bodyPr wrap="square" lIns="0" tIns="0" rIns="0" bIns="0" rtlCol="0" anchor="ctr"/>
-          <a:lstStyle/>
-          <a:p>
-            <a:pPr marL="0" indent="0" algn="ctr">
-              <a:buNone/>
-            </a:pPr>
-            <a:r>
-              <a:rPr lang="en-US" sz="850" b="1" dirty="0">
-                <a:solidFill>
-                  <a:srgbClr val="061426"/>
-                </a:solidFill>
-                <a:latin typeface="Aptos" pitchFamily="34" charset="0"/>
-                <a:ea typeface="Aptos" pitchFamily="34" charset="-122"/>
-                <a:cs typeface="Aptos" pitchFamily="34" charset="-120"/>
-              </a:rPr>
-              <a:t>ПОСЛЕ БПФ</a:t>
-            </a:r>
-            <a:endParaRPr lang="en-US" sz="850" dirty="0"/>
-          </a:p>
-        </p:txBody>
-      </p:sp>
-      <p:sp>
-        <p:nvSpPr>
-          <p:cNvPr id="11" name="Shape 9"/>
-          <p:cNvSpPr/>
-          <p:nvPr/>
-        </p:nvSpPr>
-        <p:spPr>
-          <a:xfrm>
-            <a:off x="2139696" y="1517904"/>
-            <a:ext cx="1325880" cy="256032"/>
-          </a:xfrm>
-          <a:prstGeom prst="roundRect">
-            <a:avLst>
-              <a:gd name="adj" fmla="val 42857"/>
-            </a:avLst>
-          </a:prstGeom>
-          <a:solidFill>
-            <a:srgbClr val="FFB14A"/>
-          </a:solidFill>
-          <a:ln w="12700">
-            <a:solidFill>
-              <a:srgbClr val="FFB14A"/>
-            </a:solidFill>
-            <a:prstDash val="solid"/>
-          </a:ln>
-        </p:spPr>
-        <p:txBody>
-          <a:bodyPr/>
-          <a:lstStyle/>
-          <a:p>
-            <a:endParaRPr lang="ru-BY"/>
-          </a:p>
-        </p:txBody>
-      </p:sp>
-      <p:sp>
-        <p:nvSpPr>
-          <p:cNvPr id="12" name="Text 10"/>
-          <p:cNvSpPr/>
-          <p:nvPr/>
-        </p:nvSpPr>
-        <p:spPr>
-          <a:xfrm>
-            <a:off x="2185416" y="1536192"/>
-            <a:ext cx="1234440" cy="182880"/>
-          </a:xfrm>
-          <a:prstGeom prst="rect">
-            <a:avLst/>
-          </a:prstGeom>
-          <a:noFill/>
-          <a:ln/>
-        </p:spPr>
-        <p:txBody>
-          <a:bodyPr wrap="square" lIns="0" tIns="0" rIns="0" bIns="0" rtlCol="0" anchor="ctr"/>
-          <a:lstStyle/>
-          <a:p>
-            <a:pPr marL="0" indent="0" algn="ctr">
-              <a:buNone/>
-            </a:pPr>
-            <a:r>
-              <a:rPr lang="en-US" sz="850" b="1" dirty="0">
-                <a:solidFill>
-                  <a:srgbClr val="061426"/>
-                </a:solidFill>
-                <a:latin typeface="Aptos" pitchFamily="34" charset="0"/>
-                <a:ea typeface="Aptos" pitchFamily="34" charset="-122"/>
-                <a:cs typeface="Aptos" pitchFamily="34" charset="-120"/>
-              </a:rPr>
-              <a:t>ФИЛЬТРЫ И СЖАТИЕ</a:t>
-            </a:r>
-            <a:endParaRPr lang="en-US" sz="850" dirty="0"/>
-          </a:p>
-        </p:txBody>
-      </p:sp>
-      <p:sp>
-        <p:nvSpPr>
-          <p:cNvPr id="13" name="Shape 11"/>
-          <p:cNvSpPr/>
-          <p:nvPr/>
-        </p:nvSpPr>
-        <p:spPr>
-          <a:xfrm>
-            <a:off x="3630168" y="1517904"/>
-            <a:ext cx="1737360" cy="256032"/>
-          </a:xfrm>
-          <a:prstGeom prst="roundRect">
-            <a:avLst>
-              <a:gd name="adj" fmla="val 42857"/>
-            </a:avLst>
-          </a:prstGeom>
-          <a:solidFill>
-            <a:srgbClr val="43D17C"/>
-          </a:solidFill>
-          <a:ln w="12700">
-            <a:solidFill>
-              <a:srgbClr val="43D17C"/>
-            </a:solidFill>
-            <a:prstDash val="solid"/>
-          </a:ln>
-        </p:spPr>
-        <p:txBody>
-          <a:bodyPr/>
-          <a:lstStyle/>
-          <a:p>
-            <a:endParaRPr lang="ru-BY"/>
-          </a:p>
-        </p:txBody>
-      </p:sp>
-      <p:sp>
-        <p:nvSpPr>
-          <p:cNvPr id="14" name="Text 12"/>
-          <p:cNvSpPr/>
-          <p:nvPr/>
-        </p:nvSpPr>
-        <p:spPr>
-          <a:xfrm>
-            <a:off x="3675888" y="1536192"/>
-            <a:ext cx="1645920" cy="182880"/>
-          </a:xfrm>
-          <a:prstGeom prst="rect">
-            <a:avLst/>
-          </a:prstGeom>
-          <a:noFill/>
-          <a:ln/>
-        </p:spPr>
-        <p:txBody>
-          <a:bodyPr wrap="square" lIns="0" tIns="0" rIns="0" bIns="0" rtlCol="0" anchor="ctr"/>
-          <a:lstStyle/>
-          <a:p>
-            <a:pPr marL="0" indent="0" algn="ctr">
-              <a:buNone/>
-            </a:pPr>
-            <a:r>
-              <a:rPr lang="en-US" sz="850" b="1" dirty="0">
-                <a:solidFill>
-                  <a:srgbClr val="061426"/>
-                </a:solidFill>
-                <a:latin typeface="Aptos" pitchFamily="34" charset="0"/>
-                <a:ea typeface="Aptos" pitchFamily="34" charset="-122"/>
-                <a:cs typeface="Aptos" pitchFamily="34" charset="-120"/>
-              </a:rPr>
-              <a:t>ПРОВЕРКА КОРРЕКТНОСТИ</a:t>
-            </a:r>
-            <a:endParaRPr lang="en-US" sz="850" dirty="0"/>
-          </a:p>
-        </p:txBody>
-      </p:sp>
-      <p:sp>
-        <p:nvSpPr>
-          <p:cNvPr id="15" name="Shape 13"/>
-          <p:cNvSpPr/>
-          <p:nvPr/>
-        </p:nvSpPr>
-        <p:spPr>
-          <a:xfrm>
-            <a:off x="896112" y="1965960"/>
-            <a:ext cx="5074920" cy="3291840"/>
-          </a:xfrm>
-          <a:prstGeom prst="roundRect">
-            <a:avLst>
-              <a:gd name="adj" fmla="val 5000"/>
-            </a:avLst>
-          </a:prstGeom>
-          <a:solidFill>
-            <a:srgbClr val="0D2947"/>
-          </a:solidFill>
-          <a:ln w="12700">
-            <a:solidFill>
-              <a:srgbClr val="17395A"/>
-            </a:solidFill>
-            <a:prstDash val="solid"/>
-          </a:ln>
-        </p:spPr>
-        <p:txBody>
-          <a:bodyPr/>
-          <a:lstStyle/>
-          <a:p>
-            <a:endParaRPr lang="ru-BY"/>
-          </a:p>
-        </p:txBody>
-      </p:sp>
-      <p:sp>
-        <p:nvSpPr>
-          <p:cNvPr id="16" name="Shape 14"/>
-          <p:cNvSpPr/>
-          <p:nvPr/>
-        </p:nvSpPr>
-        <p:spPr>
-          <a:xfrm>
-            <a:off x="1115568" y="2404872"/>
-            <a:ext cx="82296" cy="82296"/>
-          </a:xfrm>
-          <a:prstGeom prst="ellipse">
-            <a:avLst/>
-          </a:prstGeom>
-          <a:solidFill>
-            <a:srgbClr val="2DD4FF"/>
-          </a:solidFill>
-          <a:ln w="12700">
-            <a:solidFill>
-              <a:srgbClr val="2DD4FF"/>
-            </a:solidFill>
-            <a:prstDash val="solid"/>
-          </a:ln>
-        </p:spPr>
-        <p:txBody>
-          <a:bodyPr/>
-          <a:lstStyle/>
-          <a:p>
-            <a:endParaRPr lang="ru-BY"/>
-          </a:p>
-        </p:txBody>
-      </p:sp>
-      <p:sp>
-        <p:nvSpPr>
-          <p:cNvPr id="17" name="Text 15"/>
-          <p:cNvSpPr/>
-          <p:nvPr/>
-        </p:nvSpPr>
-        <p:spPr>
-          <a:xfrm>
-            <a:off x="1280160" y="2331720"/>
-            <a:ext cx="4407408" cy="777240"/>
-          </a:xfrm>
-          <a:prstGeom prst="rect">
-            <a:avLst/>
-          </a:prstGeom>
-          <a:noFill/>
-          <a:ln/>
-        </p:spPr>
-        <p:txBody>
-          <a:bodyPr wrap="square" lIns="0" tIns="0" rIns="0" bIns="0" rtlCol="0" anchor="ctr"/>
-          <a:lstStyle/>
-          <a:p>
-            <a:pPr marL="0" indent="0">
-              <a:buNone/>
-            </a:pPr>
-            <a:r>
-              <a:rPr lang="en-US" sz="1500" dirty="0">
-                <a:solidFill>
-                  <a:srgbClr val="D9E6F2"/>
-                </a:solidFill>
-                <a:latin typeface="Aptos" pitchFamily="34" charset="0"/>
-                <a:ea typeface="Aptos" pitchFamily="34" charset="-122"/>
-                <a:cs typeface="Aptos" pitchFamily="34" charset="-120"/>
-              </a:rPr>
-              <a:t>После реализации ДПФ/БПФ можно сравнить энергию сигнала в двух представлениях.</a:t>
-            </a:r>
-            <a:endParaRPr lang="en-US" sz="1500" dirty="0"/>
-          </a:p>
-        </p:txBody>
-      </p:sp>
-      <p:sp>
-        <p:nvSpPr>
-          <p:cNvPr id="18" name="Shape 16"/>
-          <p:cNvSpPr/>
-          <p:nvPr/>
-        </p:nvSpPr>
-        <p:spPr>
-          <a:xfrm>
-            <a:off x="1115568" y="3182112"/>
-            <a:ext cx="82296" cy="82296"/>
-          </a:xfrm>
-          <a:prstGeom prst="ellipse">
-            <a:avLst/>
-          </a:prstGeom>
-          <a:solidFill>
-            <a:srgbClr val="2DD4FF"/>
-          </a:solidFill>
-          <a:ln w="12700">
-            <a:solidFill>
-              <a:srgbClr val="2DD4FF"/>
-            </a:solidFill>
-            <a:prstDash val="solid"/>
-          </a:ln>
-        </p:spPr>
-        <p:txBody>
-          <a:bodyPr/>
-          <a:lstStyle/>
-          <a:p>
-            <a:endParaRPr lang="ru-BY"/>
-          </a:p>
-        </p:txBody>
-      </p:sp>
-      <p:sp>
-        <p:nvSpPr>
-          <p:cNvPr id="19" name="Text 17"/>
-          <p:cNvSpPr/>
-          <p:nvPr/>
-        </p:nvSpPr>
-        <p:spPr>
-          <a:xfrm>
-            <a:off x="1280160" y="3108960"/>
-            <a:ext cx="4407408" cy="777240"/>
-          </a:xfrm>
-          <a:prstGeom prst="rect">
-            <a:avLst/>
-          </a:prstGeom>
-          <a:noFill/>
-          <a:ln/>
-        </p:spPr>
-        <p:txBody>
-          <a:bodyPr wrap="square" lIns="0" tIns="0" rIns="0" bIns="0" rtlCol="0" anchor="ctr"/>
-          <a:lstStyle/>
-          <a:p>
-            <a:pPr marL="0" indent="0">
-              <a:buNone/>
-            </a:pPr>
-            <a:r>
-              <a:rPr lang="en-US" sz="1500" dirty="0">
-                <a:solidFill>
-                  <a:srgbClr val="D9E6F2"/>
-                </a:solidFill>
-                <a:latin typeface="Aptos" pitchFamily="34" charset="0"/>
-                <a:ea typeface="Aptos" pitchFamily="34" charset="-122"/>
-                <a:cs typeface="Aptos" pitchFamily="34" charset="-120"/>
-              </a:rPr>
-              <a:t>Если равенство заметно нарушается, чаще всего ошибка в нормировке, множителе 1/N или индексах.</a:t>
-            </a:r>
-            <a:endParaRPr lang="en-US" sz="1500" dirty="0"/>
-          </a:p>
-        </p:txBody>
-      </p:sp>
-      <p:sp>
-        <p:nvSpPr>
-          <p:cNvPr id="20" name="Shape 18"/>
-          <p:cNvSpPr/>
-          <p:nvPr/>
-        </p:nvSpPr>
-        <p:spPr>
-          <a:xfrm>
-            <a:off x="1115568" y="3959352"/>
-            <a:ext cx="82296" cy="82296"/>
-          </a:xfrm>
-          <a:prstGeom prst="ellipse">
-            <a:avLst/>
-          </a:prstGeom>
-          <a:solidFill>
-            <a:srgbClr val="2DD4FF"/>
-          </a:solidFill>
-          <a:ln w="12700">
-            <a:solidFill>
-              <a:srgbClr val="2DD4FF"/>
-            </a:solidFill>
-            <a:prstDash val="solid"/>
-          </a:ln>
-        </p:spPr>
-        <p:txBody>
-          <a:bodyPr/>
-          <a:lstStyle/>
-          <a:p>
-            <a:endParaRPr lang="ru-BY"/>
-          </a:p>
-        </p:txBody>
-      </p:sp>
-      <p:sp>
-        <p:nvSpPr>
-          <p:cNvPr id="21" name="Text 19"/>
-          <p:cNvSpPr/>
-          <p:nvPr/>
-        </p:nvSpPr>
-        <p:spPr>
-          <a:xfrm>
-            <a:off x="1280160" y="3886200"/>
-            <a:ext cx="4407408" cy="777240"/>
-          </a:xfrm>
-          <a:prstGeom prst="rect">
-            <a:avLst/>
-          </a:prstGeom>
-          <a:noFill/>
-          <a:ln/>
-        </p:spPr>
-        <p:txBody>
-          <a:bodyPr wrap="square" lIns="0" tIns="0" rIns="0" bIns="0" rtlCol="0" anchor="ctr"/>
-          <a:lstStyle/>
-          <a:p>
-            <a:pPr marL="0" indent="0">
-              <a:buNone/>
-            </a:pPr>
-            <a:r>
-              <a:rPr lang="en-US" sz="1500" dirty="0">
-                <a:solidFill>
-                  <a:srgbClr val="D9E6F2"/>
-                </a:solidFill>
-                <a:latin typeface="Aptos" pitchFamily="34" charset="0"/>
-                <a:ea typeface="Aptos" pitchFamily="34" charset="-122"/>
-                <a:cs typeface="Aptos" pitchFamily="34" charset="-120"/>
-              </a:rPr>
-              <a:t>Поэтому теорема работает как быстрый и строгий тест для программ обработки сигналов.</a:t>
-            </a:r>
-            <a:endParaRPr lang="en-US" sz="1500" dirty="0"/>
-          </a:p>
-        </p:txBody>
-      </p:sp>
-      <p:sp>
-        <p:nvSpPr>
-          <p:cNvPr id="22" name="Shape 20"/>
-          <p:cNvSpPr/>
-          <p:nvPr/>
-        </p:nvSpPr>
-        <p:spPr>
-          <a:xfrm>
-            <a:off x="6236208" y="1965960"/>
-            <a:ext cx="5047488" cy="3291840"/>
-          </a:xfrm>
-          <a:prstGeom prst="roundRect">
-            <a:avLst>
-              <a:gd name="adj" fmla="val 3333"/>
-            </a:avLst>
-          </a:prstGeom>
-          <a:solidFill>
-            <a:srgbClr val="EDEBE6"/>
-          </a:solidFill>
-          <a:ln w="12700">
-            <a:solidFill>
-              <a:srgbClr val="EDEBE6"/>
-            </a:solidFill>
-            <a:prstDash val="solid"/>
-          </a:ln>
-        </p:spPr>
-        <p:txBody>
-          <a:bodyPr/>
-          <a:lstStyle/>
-          <a:p>
-            <a:endParaRPr lang="ru-BY"/>
-          </a:p>
-        </p:txBody>
-      </p:sp>
-      <p:sp>
-        <p:nvSpPr>
-          <p:cNvPr id="23" name="Text 21"/>
-          <p:cNvSpPr/>
-          <p:nvPr/>
-        </p:nvSpPr>
-        <p:spPr>
-          <a:xfrm>
-            <a:off x="6510528" y="2240280"/>
-            <a:ext cx="2011680" cy="201168"/>
-          </a:xfrm>
-          <a:prstGeom prst="rect">
-            <a:avLst/>
-          </a:prstGeom>
-          <a:noFill/>
-          <a:ln/>
-        </p:spPr>
-        <p:txBody>
-          <a:bodyPr wrap="square" lIns="0" tIns="0" rIns="0" bIns="0" rtlCol="0" anchor="ctr"/>
-          <a:lstStyle/>
-          <a:p>
-            <a:pPr marL="0" indent="0">
-              <a:buNone/>
-            </a:pPr>
-            <a:r>
-              <a:rPr lang="en-US" sz="1400" b="1" dirty="0">
-                <a:solidFill>
-                  <a:srgbClr val="1F2937"/>
-                </a:solidFill>
-              </a:rPr>
-              <a:t>Типичные причины ошибки</a:t>
-            </a:r>
-            <a:endParaRPr lang="en-US" sz="1400" dirty="0"/>
-          </a:p>
-        </p:txBody>
-      </p:sp>
-      <p:sp>
-        <p:nvSpPr>
-          <p:cNvPr id="24" name="Text 22"/>
-          <p:cNvSpPr/>
-          <p:nvPr/>
-        </p:nvSpPr>
-        <p:spPr>
-          <a:xfrm>
-            <a:off x="6510528" y="2633472"/>
-            <a:ext cx="2651760" cy="1554480"/>
-          </a:xfrm>
-          <a:prstGeom prst="rect">
-            <a:avLst/>
-          </a:prstGeom>
-          <a:noFill/>
-          <a:ln/>
-        </p:spPr>
-        <p:txBody>
-          <a:bodyPr wrap="square" lIns="0" tIns="0" rIns="0" bIns="0" rtlCol="0" anchor="ctr"/>
-          <a:lstStyle/>
-          <a:p>
-            <a:pPr marL="0" indent="0">
-              <a:buNone/>
-            </a:pPr>
-            <a:r>
-              <a:rPr lang="en-US" sz="1550" dirty="0">
-                <a:solidFill>
-                  <a:srgbClr val="111827"/>
-                </a:solidFill>
-              </a:rPr>
-              <a:t>• неверный множитель 1/N</a:t>
-            </a:r>
-            <a:endParaRPr lang="en-US" sz="1550" dirty="0"/>
-          </a:p>
-          <a:p>
-            <a:pPr marL="0" indent="0">
-              <a:buNone/>
-            </a:pPr>
-            <a:r>
-              <a:rPr lang="en-US" sz="1550" dirty="0">
-                <a:solidFill>
-                  <a:srgbClr val="111827"/>
-                </a:solidFill>
-              </a:rPr>
-              <a:t>• переставленные индексы</a:t>
-            </a:r>
-            <a:endParaRPr lang="en-US" sz="1550" dirty="0"/>
-          </a:p>
-          <a:p>
-            <a:pPr marL="0" indent="0">
-              <a:buNone/>
-            </a:pPr>
-            <a:r>
-              <a:rPr lang="en-US" sz="1550" dirty="0">
-                <a:solidFill>
-                  <a:srgbClr val="111827"/>
-                </a:solidFill>
-              </a:rPr>
-              <a:t>• потеря части отсчётов</a:t>
-            </a:r>
-            <a:endParaRPr lang="en-US" sz="1550" dirty="0"/>
-          </a:p>
-          <a:p>
-            <a:pPr marL="0" indent="0">
-              <a:buNone/>
-            </a:pPr>
-            <a:r>
-              <a:rPr lang="en-US" sz="1550" dirty="0">
-                <a:solidFill>
-                  <a:srgbClr val="111827"/>
-                </a:solidFill>
-              </a:rPr>
-              <a:t>• некорректное сопряжение</a:t>
-            </a:r>
-            <a:endParaRPr lang="en-US" sz="1550" dirty="0"/>
-          </a:p>
-          <a:p>
-            <a:pPr marL="0" indent="0">
-              <a:buNone/>
-            </a:pPr>
-            <a:r>
-              <a:rPr lang="en-US" sz="1550" dirty="0">
-                <a:solidFill>
-                  <a:srgbClr val="111827"/>
-                </a:solidFill>
-              </a:rPr>
-              <a:t>• ошибки в коде фильтра / FFT</a:t>
-            </a:r>
-            <a:endParaRPr lang="en-US" sz="1550" dirty="0"/>
-          </a:p>
-        </p:txBody>
-      </p:sp>
-      <p:sp>
-        <p:nvSpPr>
-          <p:cNvPr id="25" name="Shape 23"/>
-          <p:cNvSpPr/>
-          <p:nvPr/>
-        </p:nvSpPr>
-        <p:spPr>
-          <a:xfrm>
-            <a:off x="9308592" y="4279392"/>
-            <a:ext cx="1371600" cy="420624"/>
-          </a:xfrm>
-          <a:prstGeom prst="roundRect">
-            <a:avLst>
-              <a:gd name="adj" fmla="val 26087"/>
-            </a:avLst>
-          </a:prstGeom>
-          <a:solidFill>
-            <a:srgbClr val="EDEBE6"/>
-          </a:solidFill>
-          <a:ln w="12700">
-            <a:solidFill>
-              <a:srgbClr val="EDEBE6"/>
-            </a:solidFill>
-            <a:prstDash val="solid"/>
-          </a:ln>
-          <a:effectLst>
-            <a:outerShdw blurRad="12700" dist="6350" dir="2700000" algn="bl" rotWithShape="0">
-              <a:srgbClr val="000000">
-                <a:alpha val="18000"/>
-              </a:srgbClr>
-            </a:outerShdw>
-          </a:effectLst>
-        </p:spPr>
-        <p:txBody>
-          <a:bodyPr/>
-          <a:lstStyle/>
-          <a:p>
-            <a:endParaRPr lang="ru-BY"/>
-          </a:p>
-        </p:txBody>
-      </p:sp>
-      <p:pic>
-        <p:nvPicPr>
-          <p:cNvPr id="26" name="Image 0" descr="preencoded.png"/>
-          <p:cNvPicPr>
-            <a:picLocks noChangeAspect="1"/>
-          </p:cNvPicPr>
-          <p:nvPr/>
-        </p:nvPicPr>
-        <p:blipFill>
-          <a:blip r:embed="rId3">
-            <a:extLst>
-              <a:ext uri="{96DAC541-7B7A-43D3-8B79-37D633B846F1}">
-                <asvg:svgBlip xmlns:asvg="http://schemas.microsoft.com/office/drawing/2016/SVG/main" r:embed="rId4"/>
-              </a:ext>
-            </a:extLst>
-          </a:blip>
-          <a:stretch>
-            <a:fillRect/>
-          </a:stretch>
-        </p:blipFill>
-        <p:spPr>
-          <a:xfrm>
-            <a:off x="9445752" y="4443984"/>
-            <a:ext cx="1097280" cy="164592"/>
-          </a:xfrm>
-          <a:prstGeom prst="rect">
-            <a:avLst/>
-          </a:prstGeom>
-        </p:spPr>
-      </p:pic>
-      <p:sp>
-        <p:nvSpPr>
-          <p:cNvPr id="27" name="Text 24"/>
-          <p:cNvSpPr/>
-          <p:nvPr/>
-        </p:nvSpPr>
-        <p:spPr>
-          <a:xfrm>
-            <a:off x="6510528" y="4736592"/>
-            <a:ext cx="4206240" cy="256032"/>
-          </a:xfrm>
-          <a:prstGeom prst="rect">
-            <a:avLst/>
-          </a:prstGeom>
-          <a:noFill/>
-          <a:ln/>
-        </p:spPr>
-        <p:txBody>
-          <a:bodyPr wrap="square" lIns="0" tIns="0" rIns="0" bIns="0" rtlCol="0" anchor="ctr"/>
-          <a:lstStyle/>
-          <a:p>
-            <a:pPr marL="0" indent="0">
-              <a:buNone/>
-            </a:pPr>
-            <a:r>
-              <a:rPr lang="en-US" sz="1180" dirty="0">
-                <a:solidFill>
-                  <a:srgbClr val="475569"/>
-                </a:solidFill>
-              </a:rPr>
-              <a:t>Один и тот же инвариант удобно проверять и по времени, и по спектру.</a:t>
-            </a:r>
-            <a:endParaRPr lang="en-US" sz="1180" dirty="0"/>
+              <a:t>для итоговой оценки loudness применяют перцептивные меры (например, LUFS по ITU-R BS.1770), а Парсеваль остаётся математической основой для спектральной энергии, RMS и предварительной нормировки.</a:t>
+            </a:r>
+            <a:endParaRPr lang="en-US" sz="1260" dirty="0"/>
           </a:p>
         </p:txBody>
       </p:sp>
